--- a/BCHAIN-ACCESS_Package/images/Figure_5.pptx
+++ b/BCHAIN-ACCESS_Package/images/Figure_5.pptx
@@ -1,19 +1,26 @@
 
 <file path=ppt/presentation.xml><?xml version="1.0" encoding="utf-8"?>
-<p:presentation xmlns:a="http://schemas.openxmlformats.org/drawingml/2006/main" xmlns:r="http://schemas.openxmlformats.org/officeDocument/2006/relationships" xmlns:p="http://schemas.openxmlformats.org/presentationml/2006/main" saveSubsetFonts="1" autoCompressPictures="0">
+<p:presentation xmlns:a="http://schemas.openxmlformats.org/drawingml/2006/main" xmlns:r="http://schemas.openxmlformats.org/officeDocument/2006/relationships" xmlns:p="http://schemas.openxmlformats.org/presentationml/2006/main" embedTrueTypeFonts="1" saveSubsetFonts="1">
   <p:sldMasterIdLst>
     <p:sldMasterId id="2147483648" r:id="rId1"/>
   </p:sldMasterIdLst>
   <p:sldIdLst>
-    <p:sldId id="256" r:id="rId7"/>
+    <p:sldId id="256" r:id="rId2"/>
   </p:sldIdLst>
-  <p:sldSz cx="12191695" cy="7010224" type="screen4x3"/>
+  <p:sldSz cx="18288000" cy="10287000"/>
   <p:notesSz cx="6858000" cy="9144000"/>
+  <p:embeddedFontLst>
+    <p:embeddedFont>
+      <p:font typeface="Times New Roman Bold" panose="02020803070505020304" pitchFamily="18" charset="0"/>
+      <p:regular r:id="rId3"/>
+      <p:bold r:id="rId4"/>
+    </p:embeddedFont>
+  </p:embeddedFontLst>
   <p:defaultTextStyle>
     <a:defPPr>
       <a:defRPr lang="en-US"/>
     </a:defPPr>
-    <a:lvl1pPr marL="0" algn="l" defTabSz="457200" rtl="0" eaLnBrk="1" latinLnBrk="0" hangingPunct="1">
+    <a:lvl1pPr marL="0" algn="l" defTabSz="914400" rtl="0" eaLnBrk="1" latinLnBrk="0" hangingPunct="1">
       <a:defRPr sz="1800" kern="1200">
         <a:solidFill>
           <a:schemeClr val="tx1"/>
@@ -23,7 +30,7 @@
         <a:cs typeface="+mn-cs"/>
       </a:defRPr>
     </a:lvl1pPr>
-    <a:lvl2pPr marL="457200" algn="l" defTabSz="457200" rtl="0" eaLnBrk="1" latinLnBrk="0" hangingPunct="1">
+    <a:lvl2pPr marL="457200" algn="l" defTabSz="914400" rtl="0" eaLnBrk="1" latinLnBrk="0" hangingPunct="1">
       <a:defRPr sz="1800" kern="1200">
         <a:solidFill>
           <a:schemeClr val="tx1"/>
@@ -33,7 +40,7 @@
         <a:cs typeface="+mn-cs"/>
       </a:defRPr>
     </a:lvl2pPr>
-    <a:lvl3pPr marL="914400" algn="l" defTabSz="457200" rtl="0" eaLnBrk="1" latinLnBrk="0" hangingPunct="1">
+    <a:lvl3pPr marL="914400" algn="l" defTabSz="914400" rtl="0" eaLnBrk="1" latinLnBrk="0" hangingPunct="1">
       <a:defRPr sz="1800" kern="1200">
         <a:solidFill>
           <a:schemeClr val="tx1"/>
@@ -43,7 +50,7 @@
         <a:cs typeface="+mn-cs"/>
       </a:defRPr>
     </a:lvl3pPr>
-    <a:lvl4pPr marL="1371600" algn="l" defTabSz="457200" rtl="0" eaLnBrk="1" latinLnBrk="0" hangingPunct="1">
+    <a:lvl4pPr marL="1371600" algn="l" defTabSz="914400" rtl="0" eaLnBrk="1" latinLnBrk="0" hangingPunct="1">
       <a:defRPr sz="1800" kern="1200">
         <a:solidFill>
           <a:schemeClr val="tx1"/>
@@ -53,7 +60,7 @@
         <a:cs typeface="+mn-cs"/>
       </a:defRPr>
     </a:lvl4pPr>
-    <a:lvl5pPr marL="1828800" algn="l" defTabSz="457200" rtl="0" eaLnBrk="1" latinLnBrk="0" hangingPunct="1">
+    <a:lvl5pPr marL="1828800" algn="l" defTabSz="914400" rtl="0" eaLnBrk="1" latinLnBrk="0" hangingPunct="1">
       <a:defRPr sz="1800" kern="1200">
         <a:solidFill>
           <a:schemeClr val="tx1"/>
@@ -63,7 +70,7 @@
         <a:cs typeface="+mn-cs"/>
       </a:defRPr>
     </a:lvl5pPr>
-    <a:lvl6pPr marL="2286000" algn="l" defTabSz="457200" rtl="0" eaLnBrk="1" latinLnBrk="0" hangingPunct="1">
+    <a:lvl6pPr marL="2286000" algn="l" defTabSz="914400" rtl="0" eaLnBrk="1" latinLnBrk="0" hangingPunct="1">
       <a:defRPr sz="1800" kern="1200">
         <a:solidFill>
           <a:schemeClr val="tx1"/>
@@ -73,7 +80,7 @@
         <a:cs typeface="+mn-cs"/>
       </a:defRPr>
     </a:lvl6pPr>
-    <a:lvl7pPr marL="2743200" algn="l" defTabSz="457200" rtl="0" eaLnBrk="1" latinLnBrk="0" hangingPunct="1">
+    <a:lvl7pPr marL="2743200" algn="l" defTabSz="914400" rtl="0" eaLnBrk="1" latinLnBrk="0" hangingPunct="1">
       <a:defRPr sz="1800" kern="1200">
         <a:solidFill>
           <a:schemeClr val="tx1"/>
@@ -83,7 +90,7 @@
         <a:cs typeface="+mn-cs"/>
       </a:defRPr>
     </a:lvl7pPr>
-    <a:lvl8pPr marL="3200400" algn="l" defTabSz="457200" rtl="0" eaLnBrk="1" latinLnBrk="0" hangingPunct="1">
+    <a:lvl8pPr marL="3200400" algn="l" defTabSz="914400" rtl="0" eaLnBrk="1" latinLnBrk="0" hangingPunct="1">
       <a:defRPr sz="1800" kern="1200">
         <a:solidFill>
           <a:schemeClr val="tx1"/>
@@ -93,7 +100,7 @@
         <a:cs typeface="+mn-cs"/>
       </a:defRPr>
     </a:lvl8pPr>
-    <a:lvl9pPr marL="3657600" algn="l" defTabSz="457200" rtl="0" eaLnBrk="1" latinLnBrk="0" hangingPunct="1">
+    <a:lvl9pPr marL="3657600" algn="l" defTabSz="914400" rtl="0" eaLnBrk="1" latinLnBrk="0" hangingPunct="1">
       <a:defRPr sz="1800" kern="1200">
         <a:solidFill>
           <a:schemeClr val="tx1"/>
@@ -104,6 +111,22 @@
       </a:defRPr>
     </a:lvl9pPr>
   </p:defaultTextStyle>
+  <p:extLst>
+    <p:ext uri="{EFAFB233-063F-42B5-8137-9DF3F51BA10A}">
+      <p15:sldGuideLst xmlns:p15="http://schemas.microsoft.com/office/powerpoint/2012/main">
+        <p15:guide id="1" orient="horz" pos="2160">
+          <p15:clr>
+            <a:srgbClr val="A4A3A4"/>
+          </p15:clr>
+        </p15:guide>
+        <p15:guide id="2" pos="2880">
+          <p15:clr>
+            <a:srgbClr val="A4A3A4"/>
+          </p15:clr>
+        </p15:guide>
+      </p15:sldGuideLst>
+    </p:ext>
+  </p:extLst>
 </p:presentation>
 </file>
 
@@ -145,10 +168,9 @@
           <a:lstStyle/>
           <a:p>
             <a:r>
-              <a:rPr lang="en-US" smtClean="0"/>
+              <a:rPr lang="en-US"/>
               <a:t>Click to edit Master title style</a:t>
             </a:r>
-            <a:endParaRPr lang="en-US"/>
           </a:p>
         </p:txBody>
       </p:sp>
@@ -264,10 +286,9 @@
           </a:lstStyle>
           <a:p>
             <a:r>
-              <a:rPr lang="en-US" smtClean="0"/>
+              <a:rPr lang="en-US"/>
               <a:t>Click to edit Master subtitle style</a:t>
             </a:r>
-            <a:endParaRPr lang="en-US"/>
           </a:p>
         </p:txBody>
       </p:sp>
@@ -286,9 +307,10 @@
           <a:bodyPr/>
           <a:lstStyle/>
           <a:p>
-            <a:fld id="{5BCAD085-E8A6-8845-BD4E-CB4CCA059FC4}" type="datetimeFigureOut">
+            <a:fld id="{1D8BD707-D9CF-40AE-B4C6-C98DA3205C09}" type="datetimeFigureOut">
               <a:rPr lang="en-US" smtClean="0"/>
-              <a:t>1/27/13</a:t>
+              <a:pPr/>
+              <a:t>7/13/2026</a:t>
             </a:fld>
             <a:endParaRPr lang="en-US"/>
           </a:p>
@@ -328,8 +350,9 @@
           <a:bodyPr/>
           <a:lstStyle/>
           <a:p>
-            <a:fld id="{C1FF6DA9-008F-8B48-92A6-B652298478BF}" type="slidenum">
+            <a:fld id="{B6F15528-21DE-4FAA-801E-634DDDAF4B2B}" type="slidenum">
               <a:rPr lang="en-US" smtClean="0"/>
+              <a:pPr/>
               <a:t>‹#›</a:t>
             </a:fld>
             <a:endParaRPr lang="en-US"/>
@@ -337,11 +360,6 @@
         </p:txBody>
       </p:sp>
     </p:spTree>
-    <p:extLst>
-      <p:ext uri="{BB962C8B-B14F-4D97-AF65-F5344CB8AC3E}">
-        <p14:creationId xmlns:p14="http://schemas.microsoft.com/office/powerpoint/2010/main" val="3168075583"/>
-      </p:ext>
-    </p:extLst>
   </p:cSld>
   <p:clrMapOvr>
     <a:masterClrMapping/>
@@ -382,10 +400,9 @@
           <a:lstStyle/>
           <a:p>
             <a:r>
-              <a:rPr lang="en-US" smtClean="0"/>
+              <a:rPr lang="en-US"/>
               <a:t>Click to edit Master title style</a:t>
             </a:r>
-            <a:endParaRPr lang="en-US"/>
           </a:p>
         </p:txBody>
       </p:sp>
@@ -406,38 +423,37 @@
           <a:p>
             <a:pPr lvl="0"/>
             <a:r>
-              <a:rPr lang="en-US" smtClean="0"/>
+              <a:rPr lang="en-US"/>
               <a:t>Click to edit Master text styles</a:t>
             </a:r>
           </a:p>
           <a:p>
             <a:pPr lvl="1"/>
             <a:r>
-              <a:rPr lang="en-US" smtClean="0"/>
+              <a:rPr lang="en-US"/>
               <a:t>Second level</a:t>
             </a:r>
           </a:p>
           <a:p>
             <a:pPr lvl="2"/>
             <a:r>
-              <a:rPr lang="en-US" smtClean="0"/>
+              <a:rPr lang="en-US"/>
               <a:t>Third level</a:t>
             </a:r>
           </a:p>
           <a:p>
             <a:pPr lvl="3"/>
             <a:r>
-              <a:rPr lang="en-US" smtClean="0"/>
+              <a:rPr lang="en-US"/>
               <a:t>Fourth level</a:t>
             </a:r>
           </a:p>
           <a:p>
             <a:pPr lvl="4"/>
             <a:r>
-              <a:rPr lang="en-US" smtClean="0"/>
+              <a:rPr lang="en-US"/>
               <a:t>Fifth level</a:t>
             </a:r>
-            <a:endParaRPr lang="en-US"/>
           </a:p>
         </p:txBody>
       </p:sp>
@@ -456,9 +472,10 @@
           <a:bodyPr/>
           <a:lstStyle/>
           <a:p>
-            <a:fld id="{5BCAD085-E8A6-8845-BD4E-CB4CCA059FC4}" type="datetimeFigureOut">
+            <a:fld id="{1D8BD707-D9CF-40AE-B4C6-C98DA3205C09}" type="datetimeFigureOut">
               <a:rPr lang="en-US" smtClean="0"/>
-              <a:t>1/27/13</a:t>
+              <a:pPr/>
+              <a:t>7/13/2026</a:t>
             </a:fld>
             <a:endParaRPr lang="en-US"/>
           </a:p>
@@ -498,8 +515,9 @@
           <a:bodyPr/>
           <a:lstStyle/>
           <a:p>
-            <a:fld id="{C1FF6DA9-008F-8B48-92A6-B652298478BF}" type="slidenum">
+            <a:fld id="{B6F15528-21DE-4FAA-801E-634DDDAF4B2B}" type="slidenum">
               <a:rPr lang="en-US" smtClean="0"/>
+              <a:pPr/>
               <a:t>‹#›</a:t>
             </a:fld>
             <a:endParaRPr lang="en-US"/>
@@ -507,11 +525,6 @@
         </p:txBody>
       </p:sp>
     </p:spTree>
-    <p:extLst>
-      <p:ext uri="{BB962C8B-B14F-4D97-AF65-F5344CB8AC3E}">
-        <p14:creationId xmlns:p14="http://schemas.microsoft.com/office/powerpoint/2010/main" val="2910927964"/>
-      </p:ext>
-    </p:extLst>
   </p:cSld>
   <p:clrMapOvr>
     <a:masterClrMapping/>
@@ -557,10 +570,9 @@
           <a:lstStyle/>
           <a:p>
             <a:r>
-              <a:rPr lang="en-US" smtClean="0"/>
+              <a:rPr lang="en-US"/>
               <a:t>Click to edit Master title style</a:t>
             </a:r>
-            <a:endParaRPr lang="en-US"/>
           </a:p>
         </p:txBody>
       </p:sp>
@@ -586,38 +598,37 @@
           <a:p>
             <a:pPr lvl="0"/>
             <a:r>
-              <a:rPr lang="en-US" smtClean="0"/>
+              <a:rPr lang="en-US"/>
               <a:t>Click to edit Master text styles</a:t>
             </a:r>
           </a:p>
           <a:p>
             <a:pPr lvl="1"/>
             <a:r>
-              <a:rPr lang="en-US" smtClean="0"/>
+              <a:rPr lang="en-US"/>
               <a:t>Second level</a:t>
             </a:r>
           </a:p>
           <a:p>
             <a:pPr lvl="2"/>
             <a:r>
-              <a:rPr lang="en-US" smtClean="0"/>
+              <a:rPr lang="en-US"/>
               <a:t>Third level</a:t>
             </a:r>
           </a:p>
           <a:p>
             <a:pPr lvl="3"/>
             <a:r>
-              <a:rPr lang="en-US" smtClean="0"/>
+              <a:rPr lang="en-US"/>
               <a:t>Fourth level</a:t>
             </a:r>
           </a:p>
           <a:p>
             <a:pPr lvl="4"/>
             <a:r>
-              <a:rPr lang="en-US" smtClean="0"/>
+              <a:rPr lang="en-US"/>
               <a:t>Fifth level</a:t>
             </a:r>
-            <a:endParaRPr lang="en-US"/>
           </a:p>
         </p:txBody>
       </p:sp>
@@ -636,9 +647,10 @@
           <a:bodyPr/>
           <a:lstStyle/>
           <a:p>
-            <a:fld id="{5BCAD085-E8A6-8845-BD4E-CB4CCA059FC4}" type="datetimeFigureOut">
+            <a:fld id="{1D8BD707-D9CF-40AE-B4C6-C98DA3205C09}" type="datetimeFigureOut">
               <a:rPr lang="en-US" smtClean="0"/>
-              <a:t>1/27/13</a:t>
+              <a:pPr/>
+              <a:t>7/13/2026</a:t>
             </a:fld>
             <a:endParaRPr lang="en-US"/>
           </a:p>
@@ -678,8 +690,9 @@
           <a:bodyPr/>
           <a:lstStyle/>
           <a:p>
-            <a:fld id="{C1FF6DA9-008F-8B48-92A6-B652298478BF}" type="slidenum">
+            <a:fld id="{B6F15528-21DE-4FAA-801E-634DDDAF4B2B}" type="slidenum">
               <a:rPr lang="en-US" smtClean="0"/>
+              <a:pPr/>
               <a:t>‹#›</a:t>
             </a:fld>
             <a:endParaRPr lang="en-US"/>
@@ -687,11 +700,6 @@
         </p:txBody>
       </p:sp>
     </p:spTree>
-    <p:extLst>
-      <p:ext uri="{BB962C8B-B14F-4D97-AF65-F5344CB8AC3E}">
-        <p14:creationId xmlns:p14="http://schemas.microsoft.com/office/powerpoint/2010/main" val="3612223792"/>
-      </p:ext>
-    </p:extLst>
   </p:cSld>
   <p:clrMapOvr>
     <a:masterClrMapping/>
@@ -732,10 +740,9 @@
           <a:lstStyle/>
           <a:p>
             <a:r>
-              <a:rPr lang="en-US" smtClean="0"/>
+              <a:rPr lang="en-US"/>
               <a:t>Click to edit Master title style</a:t>
             </a:r>
-            <a:endParaRPr lang="en-US"/>
           </a:p>
         </p:txBody>
       </p:sp>
@@ -756,38 +763,37 @@
           <a:p>
             <a:pPr lvl="0"/>
             <a:r>
-              <a:rPr lang="en-US" smtClean="0"/>
+              <a:rPr lang="en-US"/>
               <a:t>Click to edit Master text styles</a:t>
             </a:r>
           </a:p>
           <a:p>
             <a:pPr lvl="1"/>
             <a:r>
-              <a:rPr lang="en-US" smtClean="0"/>
+              <a:rPr lang="en-US"/>
               <a:t>Second level</a:t>
             </a:r>
           </a:p>
           <a:p>
             <a:pPr lvl="2"/>
             <a:r>
-              <a:rPr lang="en-US" smtClean="0"/>
+              <a:rPr lang="en-US"/>
               <a:t>Third level</a:t>
             </a:r>
           </a:p>
           <a:p>
             <a:pPr lvl="3"/>
             <a:r>
-              <a:rPr lang="en-US" smtClean="0"/>
+              <a:rPr lang="en-US"/>
               <a:t>Fourth level</a:t>
             </a:r>
           </a:p>
           <a:p>
             <a:pPr lvl="4"/>
             <a:r>
-              <a:rPr lang="en-US" smtClean="0"/>
+              <a:rPr lang="en-US"/>
               <a:t>Fifth level</a:t>
             </a:r>
-            <a:endParaRPr lang="en-US"/>
           </a:p>
         </p:txBody>
       </p:sp>
@@ -806,9 +812,10 @@
           <a:bodyPr/>
           <a:lstStyle/>
           <a:p>
-            <a:fld id="{5BCAD085-E8A6-8845-BD4E-CB4CCA059FC4}" type="datetimeFigureOut">
+            <a:fld id="{1D8BD707-D9CF-40AE-B4C6-C98DA3205C09}" type="datetimeFigureOut">
               <a:rPr lang="en-US" smtClean="0"/>
-              <a:t>1/27/13</a:t>
+              <a:pPr/>
+              <a:t>7/13/2026</a:t>
             </a:fld>
             <a:endParaRPr lang="en-US"/>
           </a:p>
@@ -848,8 +855,9 @@
           <a:bodyPr/>
           <a:lstStyle/>
           <a:p>
-            <a:fld id="{C1FF6DA9-008F-8B48-92A6-B652298478BF}" type="slidenum">
+            <a:fld id="{B6F15528-21DE-4FAA-801E-634DDDAF4B2B}" type="slidenum">
               <a:rPr lang="en-US" smtClean="0"/>
+              <a:pPr/>
               <a:t>‹#›</a:t>
             </a:fld>
             <a:endParaRPr lang="en-US"/>
@@ -857,11 +865,6 @@
         </p:txBody>
       </p:sp>
     </p:spTree>
-    <p:extLst>
-      <p:ext uri="{BB962C8B-B14F-4D97-AF65-F5344CB8AC3E}">
-        <p14:creationId xmlns:p14="http://schemas.microsoft.com/office/powerpoint/2010/main" val="2614314258"/>
-      </p:ext>
-    </p:extLst>
   </p:cSld>
   <p:clrMapOvr>
     <a:masterClrMapping/>
@@ -911,10 +914,9 @@
           </a:lstStyle>
           <a:p>
             <a:r>
-              <a:rPr lang="en-US" smtClean="0"/>
+              <a:rPr lang="en-US"/>
               <a:t>Click to edit Master title style</a:t>
             </a:r>
-            <a:endParaRPr lang="en-US"/>
           </a:p>
         </p:txBody>
       </p:sp>
@@ -1031,7 +1033,7 @@
           <a:p>
             <a:pPr lvl="0"/>
             <a:r>
-              <a:rPr lang="en-US" smtClean="0"/>
+              <a:rPr lang="en-US"/>
               <a:t>Click to edit Master text styles</a:t>
             </a:r>
           </a:p>
@@ -1052,9 +1054,10 @@
           <a:bodyPr/>
           <a:lstStyle/>
           <a:p>
-            <a:fld id="{5BCAD085-E8A6-8845-BD4E-CB4CCA059FC4}" type="datetimeFigureOut">
+            <a:fld id="{1D8BD707-D9CF-40AE-B4C6-C98DA3205C09}" type="datetimeFigureOut">
               <a:rPr lang="en-US" smtClean="0"/>
-              <a:t>1/27/13</a:t>
+              <a:pPr/>
+              <a:t>7/13/2026</a:t>
             </a:fld>
             <a:endParaRPr lang="en-US"/>
           </a:p>
@@ -1094,8 +1097,9 @@
           <a:bodyPr/>
           <a:lstStyle/>
           <a:p>
-            <a:fld id="{C1FF6DA9-008F-8B48-92A6-B652298478BF}" type="slidenum">
+            <a:fld id="{B6F15528-21DE-4FAA-801E-634DDDAF4B2B}" type="slidenum">
               <a:rPr lang="en-US" smtClean="0"/>
+              <a:pPr/>
               <a:t>‹#›</a:t>
             </a:fld>
             <a:endParaRPr lang="en-US"/>
@@ -1103,11 +1107,6 @@
         </p:txBody>
       </p:sp>
     </p:spTree>
-    <p:extLst>
-      <p:ext uri="{BB962C8B-B14F-4D97-AF65-F5344CB8AC3E}">
-        <p14:creationId xmlns:p14="http://schemas.microsoft.com/office/powerpoint/2010/main" val="960648375"/>
-      </p:ext>
-    </p:extLst>
   </p:cSld>
   <p:clrMapOvr>
     <a:masterClrMapping/>
@@ -1148,10 +1147,9 @@
           <a:lstStyle/>
           <a:p>
             <a:r>
-              <a:rPr lang="en-US" smtClean="0"/>
+              <a:rPr lang="en-US"/>
               <a:t>Click to edit Master title style</a:t>
             </a:r>
-            <a:endParaRPr lang="en-US"/>
           </a:p>
         </p:txBody>
       </p:sp>
@@ -1205,38 +1203,37 @@
           <a:p>
             <a:pPr lvl="0"/>
             <a:r>
-              <a:rPr lang="en-US" smtClean="0"/>
+              <a:rPr lang="en-US"/>
               <a:t>Click to edit Master text styles</a:t>
             </a:r>
           </a:p>
           <a:p>
             <a:pPr lvl="1"/>
             <a:r>
-              <a:rPr lang="en-US" smtClean="0"/>
+              <a:rPr lang="en-US"/>
               <a:t>Second level</a:t>
             </a:r>
           </a:p>
           <a:p>
             <a:pPr lvl="2"/>
             <a:r>
-              <a:rPr lang="en-US" smtClean="0"/>
+              <a:rPr lang="en-US"/>
               <a:t>Third level</a:t>
             </a:r>
           </a:p>
           <a:p>
             <a:pPr lvl="3"/>
             <a:r>
-              <a:rPr lang="en-US" smtClean="0"/>
+              <a:rPr lang="en-US"/>
               <a:t>Fourth level</a:t>
             </a:r>
           </a:p>
           <a:p>
             <a:pPr lvl="4"/>
             <a:r>
-              <a:rPr lang="en-US" smtClean="0"/>
+              <a:rPr lang="en-US"/>
               <a:t>Fifth level</a:t>
             </a:r>
-            <a:endParaRPr lang="en-US"/>
           </a:p>
         </p:txBody>
       </p:sp>
@@ -1290,38 +1287,37 @@
           <a:p>
             <a:pPr lvl="0"/>
             <a:r>
-              <a:rPr lang="en-US" smtClean="0"/>
+              <a:rPr lang="en-US"/>
               <a:t>Click to edit Master text styles</a:t>
             </a:r>
           </a:p>
           <a:p>
             <a:pPr lvl="1"/>
             <a:r>
-              <a:rPr lang="en-US" smtClean="0"/>
+              <a:rPr lang="en-US"/>
               <a:t>Second level</a:t>
             </a:r>
           </a:p>
           <a:p>
             <a:pPr lvl="2"/>
             <a:r>
-              <a:rPr lang="en-US" smtClean="0"/>
+              <a:rPr lang="en-US"/>
               <a:t>Third level</a:t>
             </a:r>
           </a:p>
           <a:p>
             <a:pPr lvl="3"/>
             <a:r>
-              <a:rPr lang="en-US" smtClean="0"/>
+              <a:rPr lang="en-US"/>
               <a:t>Fourth level</a:t>
             </a:r>
           </a:p>
           <a:p>
             <a:pPr lvl="4"/>
             <a:r>
-              <a:rPr lang="en-US" smtClean="0"/>
+              <a:rPr lang="en-US"/>
               <a:t>Fifth level</a:t>
             </a:r>
-            <a:endParaRPr lang="en-US"/>
           </a:p>
         </p:txBody>
       </p:sp>
@@ -1340,9 +1336,10 @@
           <a:bodyPr/>
           <a:lstStyle/>
           <a:p>
-            <a:fld id="{5BCAD085-E8A6-8845-BD4E-CB4CCA059FC4}" type="datetimeFigureOut">
+            <a:fld id="{1D8BD707-D9CF-40AE-B4C6-C98DA3205C09}" type="datetimeFigureOut">
               <a:rPr lang="en-US" smtClean="0"/>
-              <a:t>1/27/13</a:t>
+              <a:pPr/>
+              <a:t>7/13/2026</a:t>
             </a:fld>
             <a:endParaRPr lang="en-US"/>
           </a:p>
@@ -1382,8 +1379,9 @@
           <a:bodyPr/>
           <a:lstStyle/>
           <a:p>
-            <a:fld id="{C1FF6DA9-008F-8B48-92A6-B652298478BF}" type="slidenum">
+            <a:fld id="{B6F15528-21DE-4FAA-801E-634DDDAF4B2B}" type="slidenum">
               <a:rPr lang="en-US" smtClean="0"/>
+              <a:pPr/>
               <a:t>‹#›</a:t>
             </a:fld>
             <a:endParaRPr lang="en-US"/>
@@ -1391,11 +1389,6 @@
         </p:txBody>
       </p:sp>
     </p:spTree>
-    <p:extLst>
-      <p:ext uri="{BB962C8B-B14F-4D97-AF65-F5344CB8AC3E}">
-        <p14:creationId xmlns:p14="http://schemas.microsoft.com/office/powerpoint/2010/main" val="2782244947"/>
-      </p:ext>
-    </p:extLst>
   </p:cSld>
   <p:clrMapOvr>
     <a:masterClrMapping/>
@@ -1440,10 +1433,9 @@
           </a:lstStyle>
           <a:p>
             <a:r>
-              <a:rPr lang="en-US" smtClean="0"/>
+              <a:rPr lang="en-US"/>
               <a:t>Click to edit Master title style</a:t>
             </a:r>
-            <a:endParaRPr lang="en-US"/>
           </a:p>
         </p:txBody>
       </p:sp>
@@ -1506,7 +1498,7 @@
           <a:p>
             <a:pPr lvl="0"/>
             <a:r>
-              <a:rPr lang="en-US" smtClean="0"/>
+              <a:rPr lang="en-US"/>
               <a:t>Click to edit Master text styles</a:t>
             </a:r>
           </a:p>
@@ -1562,38 +1554,37 @@
           <a:p>
             <a:pPr lvl="0"/>
             <a:r>
-              <a:rPr lang="en-US" smtClean="0"/>
+              <a:rPr lang="en-US"/>
               <a:t>Click to edit Master text styles</a:t>
             </a:r>
           </a:p>
           <a:p>
             <a:pPr lvl="1"/>
             <a:r>
-              <a:rPr lang="en-US" smtClean="0"/>
+              <a:rPr lang="en-US"/>
               <a:t>Second level</a:t>
             </a:r>
           </a:p>
           <a:p>
             <a:pPr lvl="2"/>
             <a:r>
-              <a:rPr lang="en-US" smtClean="0"/>
+              <a:rPr lang="en-US"/>
               <a:t>Third level</a:t>
             </a:r>
           </a:p>
           <a:p>
             <a:pPr lvl="3"/>
             <a:r>
-              <a:rPr lang="en-US" smtClean="0"/>
+              <a:rPr lang="en-US"/>
               <a:t>Fourth level</a:t>
             </a:r>
           </a:p>
           <a:p>
             <a:pPr lvl="4"/>
             <a:r>
-              <a:rPr lang="en-US" smtClean="0"/>
+              <a:rPr lang="en-US"/>
               <a:t>Fifth level</a:t>
             </a:r>
-            <a:endParaRPr lang="en-US"/>
           </a:p>
         </p:txBody>
       </p:sp>
@@ -1656,7 +1647,7 @@
           <a:p>
             <a:pPr lvl="0"/>
             <a:r>
-              <a:rPr lang="en-US" smtClean="0"/>
+              <a:rPr lang="en-US"/>
               <a:t>Click to edit Master text styles</a:t>
             </a:r>
           </a:p>
@@ -1712,38 +1703,37 @@
           <a:p>
             <a:pPr lvl="0"/>
             <a:r>
-              <a:rPr lang="en-US" smtClean="0"/>
+              <a:rPr lang="en-US"/>
               <a:t>Click to edit Master text styles</a:t>
             </a:r>
           </a:p>
           <a:p>
             <a:pPr lvl="1"/>
             <a:r>
-              <a:rPr lang="en-US" smtClean="0"/>
+              <a:rPr lang="en-US"/>
               <a:t>Second level</a:t>
             </a:r>
           </a:p>
           <a:p>
             <a:pPr lvl="2"/>
             <a:r>
-              <a:rPr lang="en-US" smtClean="0"/>
+              <a:rPr lang="en-US"/>
               <a:t>Third level</a:t>
             </a:r>
           </a:p>
           <a:p>
             <a:pPr lvl="3"/>
             <a:r>
-              <a:rPr lang="en-US" smtClean="0"/>
+              <a:rPr lang="en-US"/>
               <a:t>Fourth level</a:t>
             </a:r>
           </a:p>
           <a:p>
             <a:pPr lvl="4"/>
             <a:r>
-              <a:rPr lang="en-US" smtClean="0"/>
+              <a:rPr lang="en-US"/>
               <a:t>Fifth level</a:t>
             </a:r>
-            <a:endParaRPr lang="en-US"/>
           </a:p>
         </p:txBody>
       </p:sp>
@@ -1762,9 +1752,10 @@
           <a:bodyPr/>
           <a:lstStyle/>
           <a:p>
-            <a:fld id="{5BCAD085-E8A6-8845-BD4E-CB4CCA059FC4}" type="datetimeFigureOut">
+            <a:fld id="{1D8BD707-D9CF-40AE-B4C6-C98DA3205C09}" type="datetimeFigureOut">
               <a:rPr lang="en-US" smtClean="0"/>
-              <a:t>1/27/13</a:t>
+              <a:pPr/>
+              <a:t>7/13/2026</a:t>
             </a:fld>
             <a:endParaRPr lang="en-US"/>
           </a:p>
@@ -1804,8 +1795,9 @@
           <a:bodyPr/>
           <a:lstStyle/>
           <a:p>
-            <a:fld id="{C1FF6DA9-008F-8B48-92A6-B652298478BF}" type="slidenum">
+            <a:fld id="{B6F15528-21DE-4FAA-801E-634DDDAF4B2B}" type="slidenum">
               <a:rPr lang="en-US" smtClean="0"/>
+              <a:pPr/>
               <a:t>‹#›</a:t>
             </a:fld>
             <a:endParaRPr lang="en-US"/>
@@ -1813,11 +1805,6 @@
         </p:txBody>
       </p:sp>
     </p:spTree>
-    <p:extLst>
-      <p:ext uri="{BB962C8B-B14F-4D97-AF65-F5344CB8AC3E}">
-        <p14:creationId xmlns:p14="http://schemas.microsoft.com/office/powerpoint/2010/main" val="990158736"/>
-      </p:ext>
-    </p:extLst>
   </p:cSld>
   <p:clrMapOvr>
     <a:masterClrMapping/>
@@ -1858,10 +1845,9 @@
           <a:lstStyle/>
           <a:p>
             <a:r>
-              <a:rPr lang="en-US" smtClean="0"/>
+              <a:rPr lang="en-US"/>
               <a:t>Click to edit Master title style</a:t>
             </a:r>
-            <a:endParaRPr lang="en-US"/>
           </a:p>
         </p:txBody>
       </p:sp>
@@ -1880,9 +1866,10 @@
           <a:bodyPr/>
           <a:lstStyle/>
           <a:p>
-            <a:fld id="{5BCAD085-E8A6-8845-BD4E-CB4CCA059FC4}" type="datetimeFigureOut">
+            <a:fld id="{1D8BD707-D9CF-40AE-B4C6-C98DA3205C09}" type="datetimeFigureOut">
               <a:rPr lang="en-US" smtClean="0"/>
-              <a:t>1/27/13</a:t>
+              <a:pPr/>
+              <a:t>7/13/2026</a:t>
             </a:fld>
             <a:endParaRPr lang="en-US"/>
           </a:p>
@@ -1922,8 +1909,9 @@
           <a:bodyPr/>
           <a:lstStyle/>
           <a:p>
-            <a:fld id="{C1FF6DA9-008F-8B48-92A6-B652298478BF}" type="slidenum">
+            <a:fld id="{B6F15528-21DE-4FAA-801E-634DDDAF4B2B}" type="slidenum">
               <a:rPr lang="en-US" smtClean="0"/>
+              <a:pPr/>
               <a:t>‹#›</a:t>
             </a:fld>
             <a:endParaRPr lang="en-US"/>
@@ -1931,11 +1919,6 @@
         </p:txBody>
       </p:sp>
     </p:spTree>
-    <p:extLst>
-      <p:ext uri="{BB962C8B-B14F-4D97-AF65-F5344CB8AC3E}">
-        <p14:creationId xmlns:p14="http://schemas.microsoft.com/office/powerpoint/2010/main" val="727027711"/>
-      </p:ext>
-    </p:extLst>
   </p:cSld>
   <p:clrMapOvr>
     <a:masterClrMapping/>
@@ -1975,9 +1958,10 @@
           <a:bodyPr/>
           <a:lstStyle/>
           <a:p>
-            <a:fld id="{5BCAD085-E8A6-8845-BD4E-CB4CCA059FC4}" type="datetimeFigureOut">
+            <a:fld id="{1D8BD707-D9CF-40AE-B4C6-C98DA3205C09}" type="datetimeFigureOut">
               <a:rPr lang="en-US" smtClean="0"/>
-              <a:t>1/27/13</a:t>
+              <a:pPr/>
+              <a:t>7/13/2026</a:t>
             </a:fld>
             <a:endParaRPr lang="en-US"/>
           </a:p>
@@ -2017,8 +2001,9 @@
           <a:bodyPr/>
           <a:lstStyle/>
           <a:p>
-            <a:fld id="{C1FF6DA9-008F-8B48-92A6-B652298478BF}" type="slidenum">
+            <a:fld id="{B6F15528-21DE-4FAA-801E-634DDDAF4B2B}" type="slidenum">
               <a:rPr lang="en-US" smtClean="0"/>
+              <a:pPr/>
               <a:t>‹#›</a:t>
             </a:fld>
             <a:endParaRPr lang="en-US"/>
@@ -2026,11 +2011,6 @@
         </p:txBody>
       </p:sp>
     </p:spTree>
-    <p:extLst>
-      <p:ext uri="{BB962C8B-B14F-4D97-AF65-F5344CB8AC3E}">
-        <p14:creationId xmlns:p14="http://schemas.microsoft.com/office/powerpoint/2010/main" val="1212999818"/>
-      </p:ext>
-    </p:extLst>
   </p:cSld>
   <p:clrMapOvr>
     <a:masterClrMapping/>
@@ -2080,10 +2060,9 @@
           </a:lstStyle>
           <a:p>
             <a:r>
-              <a:rPr lang="en-US" smtClean="0"/>
+              <a:rPr lang="en-US"/>
               <a:t>Click to edit Master title style</a:t>
             </a:r>
-            <a:endParaRPr lang="en-US"/>
           </a:p>
         </p:txBody>
       </p:sp>
@@ -2137,38 +2116,37 @@
           <a:p>
             <a:pPr lvl="0"/>
             <a:r>
-              <a:rPr lang="en-US" smtClean="0"/>
+              <a:rPr lang="en-US"/>
               <a:t>Click to edit Master text styles</a:t>
             </a:r>
           </a:p>
           <a:p>
             <a:pPr lvl="1"/>
             <a:r>
-              <a:rPr lang="en-US" smtClean="0"/>
+              <a:rPr lang="en-US"/>
               <a:t>Second level</a:t>
             </a:r>
           </a:p>
           <a:p>
             <a:pPr lvl="2"/>
             <a:r>
-              <a:rPr lang="en-US" smtClean="0"/>
+              <a:rPr lang="en-US"/>
               <a:t>Third level</a:t>
             </a:r>
           </a:p>
           <a:p>
             <a:pPr lvl="3"/>
             <a:r>
-              <a:rPr lang="en-US" smtClean="0"/>
+              <a:rPr lang="en-US"/>
               <a:t>Fourth level</a:t>
             </a:r>
           </a:p>
           <a:p>
             <a:pPr lvl="4"/>
             <a:r>
-              <a:rPr lang="en-US" smtClean="0"/>
+              <a:rPr lang="en-US"/>
               <a:t>Fifth level</a:t>
             </a:r>
-            <a:endParaRPr lang="en-US"/>
           </a:p>
         </p:txBody>
       </p:sp>
@@ -2231,7 +2209,7 @@
           <a:p>
             <a:pPr lvl="0"/>
             <a:r>
-              <a:rPr lang="en-US" smtClean="0"/>
+              <a:rPr lang="en-US"/>
               <a:t>Click to edit Master text styles</a:t>
             </a:r>
           </a:p>
@@ -2252,9 +2230,10 @@
           <a:bodyPr/>
           <a:lstStyle/>
           <a:p>
-            <a:fld id="{5BCAD085-E8A6-8845-BD4E-CB4CCA059FC4}" type="datetimeFigureOut">
+            <a:fld id="{1D8BD707-D9CF-40AE-B4C6-C98DA3205C09}" type="datetimeFigureOut">
               <a:rPr lang="en-US" smtClean="0"/>
-              <a:t>1/27/13</a:t>
+              <a:pPr/>
+              <a:t>7/13/2026</a:t>
             </a:fld>
             <a:endParaRPr lang="en-US"/>
           </a:p>
@@ -2294,8 +2273,9 @@
           <a:bodyPr/>
           <a:lstStyle/>
           <a:p>
-            <a:fld id="{C1FF6DA9-008F-8B48-92A6-B652298478BF}" type="slidenum">
+            <a:fld id="{B6F15528-21DE-4FAA-801E-634DDDAF4B2B}" type="slidenum">
               <a:rPr lang="en-US" smtClean="0"/>
+              <a:pPr/>
               <a:t>‹#›</a:t>
             </a:fld>
             <a:endParaRPr lang="en-US"/>
@@ -2303,11 +2283,6 @@
         </p:txBody>
       </p:sp>
     </p:spTree>
-    <p:extLst>
-      <p:ext uri="{BB962C8B-B14F-4D97-AF65-F5344CB8AC3E}">
-        <p14:creationId xmlns:p14="http://schemas.microsoft.com/office/powerpoint/2010/main" val="1840726560"/>
-      </p:ext>
-    </p:extLst>
   </p:cSld>
   <p:clrMapOvr>
     <a:masterClrMapping/>
@@ -2357,10 +2332,9 @@
           </a:lstStyle>
           <a:p>
             <a:r>
-              <a:rPr lang="en-US" smtClean="0"/>
+              <a:rPr lang="en-US"/>
               <a:t>Click to edit Master title style</a:t>
             </a:r>
-            <a:endParaRPr lang="en-US"/>
           </a:p>
         </p:txBody>
       </p:sp>
@@ -2484,7 +2458,7 @@
           <a:p>
             <a:pPr lvl="0"/>
             <a:r>
-              <a:rPr lang="en-US" smtClean="0"/>
+              <a:rPr lang="en-US"/>
               <a:t>Click to edit Master text styles</a:t>
             </a:r>
           </a:p>
@@ -2505,9 +2479,10 @@
           <a:bodyPr/>
           <a:lstStyle/>
           <a:p>
-            <a:fld id="{5BCAD085-E8A6-8845-BD4E-CB4CCA059FC4}" type="datetimeFigureOut">
+            <a:fld id="{1D8BD707-D9CF-40AE-B4C6-C98DA3205C09}" type="datetimeFigureOut">
               <a:rPr lang="en-US" smtClean="0"/>
-              <a:t>1/27/13</a:t>
+              <a:pPr/>
+              <a:t>7/13/2026</a:t>
             </a:fld>
             <a:endParaRPr lang="en-US"/>
           </a:p>
@@ -2547,8 +2522,9 @@
           <a:bodyPr/>
           <a:lstStyle/>
           <a:p>
-            <a:fld id="{C1FF6DA9-008F-8B48-92A6-B652298478BF}" type="slidenum">
+            <a:fld id="{B6F15528-21DE-4FAA-801E-634DDDAF4B2B}" type="slidenum">
               <a:rPr lang="en-US" smtClean="0"/>
+              <a:pPr/>
               <a:t>‹#›</a:t>
             </a:fld>
             <a:endParaRPr lang="en-US"/>
@@ -2556,11 +2532,6 @@
         </p:txBody>
       </p:sp>
     </p:spTree>
-    <p:extLst>
-      <p:ext uri="{BB962C8B-B14F-4D97-AF65-F5344CB8AC3E}">
-        <p14:creationId xmlns:p14="http://schemas.microsoft.com/office/powerpoint/2010/main" val="3889236939"/>
-      </p:ext>
-    </p:extLst>
   </p:cSld>
   <p:clrMapOvr>
     <a:masterClrMapping/>
@@ -2616,10 +2587,9 @@
           <a:lstStyle/>
           <a:p>
             <a:r>
-              <a:rPr lang="en-US" smtClean="0"/>
+              <a:rPr lang="en-US"/>
               <a:t>Click to edit Master title style</a:t>
             </a:r>
-            <a:endParaRPr lang="en-US"/>
           </a:p>
         </p:txBody>
       </p:sp>
@@ -2650,38 +2620,37 @@
           <a:p>
             <a:pPr lvl="0"/>
             <a:r>
-              <a:rPr lang="en-US" smtClean="0"/>
+              <a:rPr lang="en-US"/>
               <a:t>Click to edit Master text styles</a:t>
             </a:r>
           </a:p>
           <a:p>
             <a:pPr lvl="1"/>
             <a:r>
-              <a:rPr lang="en-US" smtClean="0"/>
+              <a:rPr lang="en-US"/>
               <a:t>Second level</a:t>
             </a:r>
           </a:p>
           <a:p>
             <a:pPr lvl="2"/>
             <a:r>
-              <a:rPr lang="en-US" smtClean="0"/>
+              <a:rPr lang="en-US"/>
               <a:t>Third level</a:t>
             </a:r>
           </a:p>
           <a:p>
             <a:pPr lvl="3"/>
             <a:r>
-              <a:rPr lang="en-US" smtClean="0"/>
+              <a:rPr lang="en-US"/>
               <a:t>Fourth level</a:t>
             </a:r>
           </a:p>
           <a:p>
             <a:pPr lvl="4"/>
             <a:r>
-              <a:rPr lang="en-US" smtClean="0"/>
+              <a:rPr lang="en-US"/>
               <a:t>Fifth level</a:t>
             </a:r>
-            <a:endParaRPr lang="en-US"/>
           </a:p>
         </p:txBody>
       </p:sp>
@@ -2718,9 +2687,10 @@
             </a:lvl1pPr>
           </a:lstStyle>
           <a:p>
-            <a:fld id="{5BCAD085-E8A6-8845-BD4E-CB4CCA059FC4}" type="datetimeFigureOut">
+            <a:fld id="{1D8BD707-D9CF-40AE-B4C6-C98DA3205C09}" type="datetimeFigureOut">
               <a:rPr lang="en-US" smtClean="0"/>
-              <a:t>1/27/13</a:t>
+              <a:pPr/>
+              <a:t>7/13/2026</a:t>
             </a:fld>
             <a:endParaRPr lang="en-US"/>
           </a:p>
@@ -2796,8 +2766,9 @@
             </a:lvl1pPr>
           </a:lstStyle>
           <a:p>
-            <a:fld id="{C1FF6DA9-008F-8B48-92A6-B652298478BF}" type="slidenum">
+            <a:fld id="{B6F15528-21DE-4FAA-801E-634DDDAF4B2B}" type="slidenum">
               <a:rPr lang="en-US" smtClean="0"/>
+              <a:pPr/>
               <a:t>‹#›</a:t>
             </a:fld>
             <a:endParaRPr lang="en-US"/>
@@ -2805,11 +2776,6 @@
         </p:txBody>
       </p:sp>
     </p:spTree>
-    <p:extLst>
-      <p:ext uri="{BB962C8B-B14F-4D97-AF65-F5344CB8AC3E}">
-        <p14:creationId xmlns:p14="http://schemas.microsoft.com/office/powerpoint/2010/main" val="2209977519"/>
-      </p:ext>
-    </p:extLst>
   </p:cSld>
   <p:clrMap bg1="lt1" tx1="dk1" bg2="lt2" tx2="dk2" accent1="accent1" accent2="accent2" accent3="accent3" accent4="accent4" accent5="accent5" accent6="accent6" hlink="hlink" folHlink="folHlink"/>
   <p:sldLayoutIdLst>
@@ -2827,7 +2793,7 @@
   </p:sldLayoutIdLst>
   <p:txStyles>
     <p:titleStyle>
-      <a:lvl1pPr algn="ctr" defTabSz="457200" rtl="0" eaLnBrk="1" latinLnBrk="0" hangingPunct="1">
+      <a:lvl1pPr algn="ctr" defTabSz="914400" rtl="0" eaLnBrk="1" latinLnBrk="0" hangingPunct="1">
         <a:spcBef>
           <a:spcPct val="0"/>
         </a:spcBef>
@@ -2843,11 +2809,11 @@
       </a:lvl1pPr>
     </p:titleStyle>
     <p:bodyStyle>
-      <a:lvl1pPr marL="342900" indent="-342900" algn="l" defTabSz="457200" rtl="0" eaLnBrk="1" latinLnBrk="0" hangingPunct="1">
+      <a:lvl1pPr marL="342900" indent="-342900" algn="l" defTabSz="914400" rtl="0" eaLnBrk="1" latinLnBrk="0" hangingPunct="1">
         <a:spcBef>
           <a:spcPct val="20000"/>
         </a:spcBef>
-        <a:buFont typeface="Arial"/>
+        <a:buFont typeface="Arial" pitchFamily="34" charset="0"/>
         <a:buChar char="•"/>
         <a:defRPr sz="3200" kern="1200">
           <a:solidFill>
@@ -2858,11 +2824,11 @@
           <a:cs typeface="+mn-cs"/>
         </a:defRPr>
       </a:lvl1pPr>
-      <a:lvl2pPr marL="742950" indent="-285750" algn="l" defTabSz="457200" rtl="0" eaLnBrk="1" latinLnBrk="0" hangingPunct="1">
+      <a:lvl2pPr marL="742950" indent="-285750" algn="l" defTabSz="914400" rtl="0" eaLnBrk="1" latinLnBrk="0" hangingPunct="1">
         <a:spcBef>
           <a:spcPct val="20000"/>
         </a:spcBef>
-        <a:buFont typeface="Arial"/>
+        <a:buFont typeface="Arial" pitchFamily="34" charset="0"/>
         <a:buChar char="–"/>
         <a:defRPr sz="2800" kern="1200">
           <a:solidFill>
@@ -2873,11 +2839,11 @@
           <a:cs typeface="+mn-cs"/>
         </a:defRPr>
       </a:lvl2pPr>
-      <a:lvl3pPr marL="1143000" indent="-228600" algn="l" defTabSz="457200" rtl="0" eaLnBrk="1" latinLnBrk="0" hangingPunct="1">
+      <a:lvl3pPr marL="1143000" indent="-228600" algn="l" defTabSz="914400" rtl="0" eaLnBrk="1" latinLnBrk="0" hangingPunct="1">
         <a:spcBef>
           <a:spcPct val="20000"/>
         </a:spcBef>
-        <a:buFont typeface="Arial"/>
+        <a:buFont typeface="Arial" pitchFamily="34" charset="0"/>
         <a:buChar char="•"/>
         <a:defRPr sz="2400" kern="1200">
           <a:solidFill>
@@ -2888,11 +2854,11 @@
           <a:cs typeface="+mn-cs"/>
         </a:defRPr>
       </a:lvl3pPr>
-      <a:lvl4pPr marL="1600200" indent="-228600" algn="l" defTabSz="457200" rtl="0" eaLnBrk="1" latinLnBrk="0" hangingPunct="1">
+      <a:lvl4pPr marL="1600200" indent="-228600" algn="l" defTabSz="914400" rtl="0" eaLnBrk="1" latinLnBrk="0" hangingPunct="1">
         <a:spcBef>
           <a:spcPct val="20000"/>
         </a:spcBef>
-        <a:buFont typeface="Arial"/>
+        <a:buFont typeface="Arial" pitchFamily="34" charset="0"/>
         <a:buChar char="–"/>
         <a:defRPr sz="2000" kern="1200">
           <a:solidFill>
@@ -2903,11 +2869,11 @@
           <a:cs typeface="+mn-cs"/>
         </a:defRPr>
       </a:lvl4pPr>
-      <a:lvl5pPr marL="2057400" indent="-228600" algn="l" defTabSz="457200" rtl="0" eaLnBrk="1" latinLnBrk="0" hangingPunct="1">
+      <a:lvl5pPr marL="2057400" indent="-228600" algn="l" defTabSz="914400" rtl="0" eaLnBrk="1" latinLnBrk="0" hangingPunct="1">
         <a:spcBef>
           <a:spcPct val="20000"/>
         </a:spcBef>
-        <a:buFont typeface="Arial"/>
+        <a:buFont typeface="Arial" pitchFamily="34" charset="0"/>
         <a:buChar char="»"/>
         <a:defRPr sz="2000" kern="1200">
           <a:solidFill>
@@ -2918,11 +2884,11 @@
           <a:cs typeface="+mn-cs"/>
         </a:defRPr>
       </a:lvl5pPr>
-      <a:lvl6pPr marL="2514600" indent="-228600" algn="l" defTabSz="457200" rtl="0" eaLnBrk="1" latinLnBrk="0" hangingPunct="1">
+      <a:lvl6pPr marL="2514600" indent="-228600" algn="l" defTabSz="914400" rtl="0" eaLnBrk="1" latinLnBrk="0" hangingPunct="1">
         <a:spcBef>
           <a:spcPct val="20000"/>
         </a:spcBef>
-        <a:buFont typeface="Arial"/>
+        <a:buFont typeface="Arial" pitchFamily="34" charset="0"/>
         <a:buChar char="•"/>
         <a:defRPr sz="2000" kern="1200">
           <a:solidFill>
@@ -2933,11 +2899,11 @@
           <a:cs typeface="+mn-cs"/>
         </a:defRPr>
       </a:lvl6pPr>
-      <a:lvl7pPr marL="2971800" indent="-228600" algn="l" defTabSz="457200" rtl="0" eaLnBrk="1" latinLnBrk="0" hangingPunct="1">
+      <a:lvl7pPr marL="2971800" indent="-228600" algn="l" defTabSz="914400" rtl="0" eaLnBrk="1" latinLnBrk="0" hangingPunct="1">
         <a:spcBef>
           <a:spcPct val="20000"/>
         </a:spcBef>
-        <a:buFont typeface="Arial"/>
+        <a:buFont typeface="Arial" pitchFamily="34" charset="0"/>
         <a:buChar char="•"/>
         <a:defRPr sz="2000" kern="1200">
           <a:solidFill>
@@ -2948,11 +2914,11 @@
           <a:cs typeface="+mn-cs"/>
         </a:defRPr>
       </a:lvl7pPr>
-      <a:lvl8pPr marL="3429000" indent="-228600" algn="l" defTabSz="457200" rtl="0" eaLnBrk="1" latinLnBrk="0" hangingPunct="1">
+      <a:lvl8pPr marL="3429000" indent="-228600" algn="l" defTabSz="914400" rtl="0" eaLnBrk="1" latinLnBrk="0" hangingPunct="1">
         <a:spcBef>
           <a:spcPct val="20000"/>
         </a:spcBef>
-        <a:buFont typeface="Arial"/>
+        <a:buFont typeface="Arial" pitchFamily="34" charset="0"/>
         <a:buChar char="•"/>
         <a:defRPr sz="2000" kern="1200">
           <a:solidFill>
@@ -2963,11 +2929,11 @@
           <a:cs typeface="+mn-cs"/>
         </a:defRPr>
       </a:lvl8pPr>
-      <a:lvl9pPr marL="3886200" indent="-228600" algn="l" defTabSz="457200" rtl="0" eaLnBrk="1" latinLnBrk="0" hangingPunct="1">
+      <a:lvl9pPr marL="3886200" indent="-228600" algn="l" defTabSz="914400" rtl="0" eaLnBrk="1" latinLnBrk="0" hangingPunct="1">
         <a:spcBef>
           <a:spcPct val="20000"/>
         </a:spcBef>
-        <a:buFont typeface="Arial"/>
+        <a:buFont typeface="Arial" pitchFamily="34" charset="0"/>
         <a:buChar char="•"/>
         <a:defRPr sz="2000" kern="1200">
           <a:solidFill>
@@ -2983,7 +2949,7 @@
       <a:defPPr>
         <a:defRPr lang="en-US"/>
       </a:defPPr>
-      <a:lvl1pPr marL="0" algn="l" defTabSz="457200" rtl="0" eaLnBrk="1" latinLnBrk="0" hangingPunct="1">
+      <a:lvl1pPr marL="0" algn="l" defTabSz="914400" rtl="0" eaLnBrk="1" latinLnBrk="0" hangingPunct="1">
         <a:defRPr sz="1800" kern="1200">
           <a:solidFill>
             <a:schemeClr val="tx1"/>
@@ -2993,7 +2959,7 @@
           <a:cs typeface="+mn-cs"/>
         </a:defRPr>
       </a:lvl1pPr>
-      <a:lvl2pPr marL="457200" algn="l" defTabSz="457200" rtl="0" eaLnBrk="1" latinLnBrk="0" hangingPunct="1">
+      <a:lvl2pPr marL="457200" algn="l" defTabSz="914400" rtl="0" eaLnBrk="1" latinLnBrk="0" hangingPunct="1">
         <a:defRPr sz="1800" kern="1200">
           <a:solidFill>
             <a:schemeClr val="tx1"/>
@@ -3003,7 +2969,7 @@
           <a:cs typeface="+mn-cs"/>
         </a:defRPr>
       </a:lvl2pPr>
-      <a:lvl3pPr marL="914400" algn="l" defTabSz="457200" rtl="0" eaLnBrk="1" latinLnBrk="0" hangingPunct="1">
+      <a:lvl3pPr marL="914400" algn="l" defTabSz="914400" rtl="0" eaLnBrk="1" latinLnBrk="0" hangingPunct="1">
         <a:defRPr sz="1800" kern="1200">
           <a:solidFill>
             <a:schemeClr val="tx1"/>
@@ -3013,7 +2979,7 @@
           <a:cs typeface="+mn-cs"/>
         </a:defRPr>
       </a:lvl3pPr>
-      <a:lvl4pPr marL="1371600" algn="l" defTabSz="457200" rtl="0" eaLnBrk="1" latinLnBrk="0" hangingPunct="1">
+      <a:lvl4pPr marL="1371600" algn="l" defTabSz="914400" rtl="0" eaLnBrk="1" latinLnBrk="0" hangingPunct="1">
         <a:defRPr sz="1800" kern="1200">
           <a:solidFill>
             <a:schemeClr val="tx1"/>
@@ -3023,7 +2989,7 @@
           <a:cs typeface="+mn-cs"/>
         </a:defRPr>
       </a:lvl4pPr>
-      <a:lvl5pPr marL="1828800" algn="l" defTabSz="457200" rtl="0" eaLnBrk="1" latinLnBrk="0" hangingPunct="1">
+      <a:lvl5pPr marL="1828800" algn="l" defTabSz="914400" rtl="0" eaLnBrk="1" latinLnBrk="0" hangingPunct="1">
         <a:defRPr sz="1800" kern="1200">
           <a:solidFill>
             <a:schemeClr val="tx1"/>
@@ -3033,7 +2999,7 @@
           <a:cs typeface="+mn-cs"/>
         </a:defRPr>
       </a:lvl5pPr>
-      <a:lvl6pPr marL="2286000" algn="l" defTabSz="457200" rtl="0" eaLnBrk="1" latinLnBrk="0" hangingPunct="1">
+      <a:lvl6pPr marL="2286000" algn="l" defTabSz="914400" rtl="0" eaLnBrk="1" latinLnBrk="0" hangingPunct="1">
         <a:defRPr sz="1800" kern="1200">
           <a:solidFill>
             <a:schemeClr val="tx1"/>
@@ -3043,7 +3009,7 @@
           <a:cs typeface="+mn-cs"/>
         </a:defRPr>
       </a:lvl6pPr>
-      <a:lvl7pPr marL="2743200" algn="l" defTabSz="457200" rtl="0" eaLnBrk="1" latinLnBrk="0" hangingPunct="1">
+      <a:lvl7pPr marL="2743200" algn="l" defTabSz="914400" rtl="0" eaLnBrk="1" latinLnBrk="0" hangingPunct="1">
         <a:defRPr sz="1800" kern="1200">
           <a:solidFill>
             <a:schemeClr val="tx1"/>
@@ -3053,7 +3019,7 @@
           <a:cs typeface="+mn-cs"/>
         </a:defRPr>
       </a:lvl7pPr>
-      <a:lvl8pPr marL="3200400" algn="l" defTabSz="457200" rtl="0" eaLnBrk="1" latinLnBrk="0" hangingPunct="1">
+      <a:lvl8pPr marL="3200400" algn="l" defTabSz="914400" rtl="0" eaLnBrk="1" latinLnBrk="0" hangingPunct="1">
         <a:defRPr sz="1800" kern="1200">
           <a:solidFill>
             <a:schemeClr val="tx1"/>
@@ -3063,7 +3029,7 @@
           <a:cs typeface="+mn-cs"/>
         </a:defRPr>
       </a:lvl8pPr>
-      <a:lvl9pPr marL="3657600" algn="l" defTabSz="457200" rtl="0" eaLnBrk="1" latinLnBrk="0" hangingPunct="1">
+      <a:lvl9pPr marL="3657600" algn="l" defTabSz="914400" rtl="0" eaLnBrk="1" latinLnBrk="0" hangingPunct="1">
         <a:defRPr sz="1800" kern="1200">
           <a:solidFill>
             <a:schemeClr val="tx1"/>
@@ -3079,7 +3045,7 @@
 </file>
 
 <file path=ppt/slides/slide1.xml><?xml version="1.0" encoding="utf-8"?>
-<p:sld xmlns:a="http://schemas.openxmlformats.org/drawingml/2006/main" xmlns:p="http://schemas.openxmlformats.org/presentationml/2006/main" xmlns:r="http://schemas.openxmlformats.org/officeDocument/2006/relationships">
+<p:sld xmlns:a="http://schemas.openxmlformats.org/drawingml/2006/main" xmlns:r="http://schemas.openxmlformats.org/officeDocument/2006/relationships" xmlns:p="http://schemas.openxmlformats.org/presentationml/2006/main">
   <p:cSld>
     <p:spTree>
       <p:nvGrpSpPr>
@@ -3087,31 +3053,5066 @@
         <p:cNvGrpSpPr/>
         <p:nvPr/>
       </p:nvGrpSpPr>
-      <p:grpSpPr/>
-      <p:pic>
-        <p:nvPicPr>
-          <p:cNvPr id="2" name="Picture 1" descr="fig4_architecture.png"/>
-          <p:cNvPicPr>
-            <a:picLocks noChangeAspect="1"/>
-          </p:cNvPicPr>
+      <p:grpSpPr>
+        <a:xfrm>
+          <a:off x="0" y="0"/>
+          <a:ext cx="0" cy="0"/>
+          <a:chOff x="0" y="0"/>
+          <a:chExt cx="0" cy="0"/>
+        </a:xfrm>
+      </p:grpSpPr>
+      <p:grpSp>
+        <p:nvGrpSpPr>
+          <p:cNvPr id="2" name="Group 2"/>
+          <p:cNvGrpSpPr/>
           <p:nvPr/>
-        </p:nvPicPr>
-        <p:blipFill>
-          <a:blip r:embed="rId2"/>
-          <a:stretch>
-            <a:fillRect/>
-          </a:stretch>
-        </p:blipFill>
+        </p:nvGrpSpPr>
+        <p:grpSpPr>
+          <a:xfrm>
+            <a:off x="76676" y="152400"/>
+            <a:ext cx="14850117" cy="1793775"/>
+            <a:chOff x="0" y="0"/>
+            <a:chExt cx="19255550" cy="2325916"/>
+          </a:xfrm>
+        </p:grpSpPr>
+        <p:sp>
+          <p:nvSpPr>
+            <p:cNvPr id="3" name="Freeform 3"/>
+            <p:cNvSpPr/>
+            <p:nvPr/>
+          </p:nvSpPr>
+          <p:spPr>
+            <a:xfrm>
+              <a:off x="0" y="0"/>
+              <a:ext cx="19255485" cy="2325878"/>
+            </a:xfrm>
+            <a:custGeom>
+              <a:avLst/>
+              <a:gdLst/>
+              <a:ahLst/>
+              <a:cxnLst/>
+              <a:rect l="l" t="t" r="r" b="b"/>
+              <a:pathLst>
+                <a:path w="19255485" h="2325878">
+                  <a:moveTo>
+                    <a:pt x="0" y="69723"/>
+                  </a:moveTo>
+                  <a:cubicBezTo>
+                    <a:pt x="0" y="31242"/>
+                    <a:pt x="31242" y="0"/>
+                    <a:pt x="69723" y="0"/>
+                  </a:cubicBezTo>
+                  <a:lnTo>
+                    <a:pt x="19185762" y="0"/>
+                  </a:lnTo>
+                  <a:cubicBezTo>
+                    <a:pt x="19224244" y="0"/>
+                    <a:pt x="19255485" y="31242"/>
+                    <a:pt x="19255485" y="69723"/>
+                  </a:cubicBezTo>
+                  <a:lnTo>
+                    <a:pt x="19255485" y="2256155"/>
+                  </a:lnTo>
+                  <a:cubicBezTo>
+                    <a:pt x="19255485" y="2294636"/>
+                    <a:pt x="19224244" y="2325878"/>
+                    <a:pt x="19185762" y="2325878"/>
+                  </a:cubicBezTo>
+                  <a:lnTo>
+                    <a:pt x="69723" y="2325878"/>
+                  </a:lnTo>
+                  <a:cubicBezTo>
+                    <a:pt x="31242" y="2325878"/>
+                    <a:pt x="0" y="2294636"/>
+                    <a:pt x="0" y="2256155"/>
+                  </a:cubicBezTo>
+                  <a:close/>
+                </a:path>
+              </a:pathLst>
+            </a:custGeom>
+            <a:solidFill>
+              <a:srgbClr val="FFFFFF"/>
+            </a:solidFill>
+            <a:ln w="28597" cap="sq">
+              <a:solidFill>
+                <a:srgbClr val="1E40AF"/>
+              </a:solidFill>
+              <a:prstDash val="solid"/>
+              <a:miter/>
+            </a:ln>
+          </p:spPr>
+        </p:sp>
+      </p:grpSp>
+      <p:grpSp>
+        <p:nvGrpSpPr>
+          <p:cNvPr id="4" name="Group 4"/>
+          <p:cNvGrpSpPr/>
+          <p:nvPr/>
+        </p:nvGrpSpPr>
+        <p:grpSpPr>
+          <a:xfrm>
+            <a:off x="91377" y="167101"/>
+            <a:ext cx="2540696" cy="1764372"/>
+            <a:chOff x="0" y="0"/>
+            <a:chExt cx="3294418" cy="2287791"/>
+          </a:xfrm>
+        </p:grpSpPr>
+        <p:sp>
+          <p:nvSpPr>
+            <p:cNvPr id="5" name="Freeform 5"/>
+            <p:cNvSpPr/>
+            <p:nvPr/>
+          </p:nvSpPr>
+          <p:spPr>
+            <a:xfrm>
+              <a:off x="0" y="0"/>
+              <a:ext cx="3294380" cy="2287778"/>
+            </a:xfrm>
+            <a:custGeom>
+              <a:avLst/>
+              <a:gdLst/>
+              <a:ahLst/>
+              <a:cxnLst/>
+              <a:rect l="l" t="t" r="r" b="b"/>
+              <a:pathLst>
+                <a:path w="3294380" h="2287778">
+                  <a:moveTo>
+                    <a:pt x="0" y="0"/>
+                  </a:moveTo>
+                  <a:lnTo>
+                    <a:pt x="3294380" y="0"/>
+                  </a:lnTo>
+                  <a:lnTo>
+                    <a:pt x="3294380" y="2287778"/>
+                  </a:lnTo>
+                  <a:lnTo>
+                    <a:pt x="0" y="2287778"/>
+                  </a:lnTo>
+                  <a:close/>
+                </a:path>
+              </a:pathLst>
+            </a:custGeom>
+            <a:solidFill>
+              <a:srgbClr val="004B9E"/>
+            </a:solidFill>
+            <a:ln>
+              <a:noFill/>
+            </a:ln>
+          </p:spPr>
+          <p:style>
+            <a:lnRef idx="1">
+              <a:schemeClr val="accent1"/>
+            </a:lnRef>
+            <a:fillRef idx="3">
+              <a:schemeClr val="accent1"/>
+            </a:fillRef>
+            <a:effectRef idx="2">
+              <a:schemeClr val="accent1"/>
+            </a:effectRef>
+            <a:fontRef idx="minor">
+              <a:schemeClr val="lt1"/>
+            </a:fontRef>
+          </p:style>
+        </p:sp>
+      </p:grpSp>
+      <p:sp>
+        <p:nvSpPr>
+          <p:cNvPr id="6" name="TextBox 6"/>
+          <p:cNvSpPr txBox="1"/>
+          <p:nvPr/>
+        </p:nvSpPr>
         <p:spPr>
           <a:xfrm>
-            <a:off x="0" y="0"/>
-            <a:ext cx="12191695" cy="7010224"/>
+            <a:off x="147793" y="530454"/>
+            <a:ext cx="2448021" cy="897682"/>
           </a:xfrm>
           <a:prstGeom prst="rect">
             <a:avLst/>
           </a:prstGeom>
         </p:spPr>
-      </p:pic>
+        <p:txBody>
+          <a:bodyPr lIns="0" tIns="0" rIns="0" bIns="0" rtlCol="0" anchor="t">
+            <a:spAutoFit/>
+          </a:bodyPr>
+          <a:lstStyle/>
+          <a:p>
+            <a:pPr algn="ctr">
+              <a:lnSpc>
+                <a:spcPts val="2591"/>
+              </a:lnSpc>
+            </a:pPr>
+            <a:r>
+              <a:rPr lang="en-US" sz="2400" b="1" dirty="0">
+                <a:solidFill>
+                  <a:srgbClr val="FFFFFF"/>
+                </a:solidFill>
+                <a:latin typeface="Times New Roman Bold"/>
+                <a:ea typeface="Times New Roman Bold"/>
+                <a:cs typeface="Times New Roman Bold"/>
+                <a:sym typeface="Times New Roman Bold"/>
+              </a:rPr>
+              <a:t>LAYER 1</a:t>
+            </a:r>
+          </a:p>
+          <a:p>
+            <a:pPr algn="ctr">
+              <a:lnSpc>
+                <a:spcPts val="2221"/>
+              </a:lnSpc>
+            </a:pPr>
+            <a:r>
+              <a:rPr lang="en-US" sz="2400" b="1" dirty="0">
+                <a:solidFill>
+                  <a:srgbClr val="FFFFFF"/>
+                </a:solidFill>
+                <a:latin typeface="Times New Roman Bold"/>
+                <a:ea typeface="Times New Roman Bold"/>
+                <a:cs typeface="Times New Roman Bold"/>
+                <a:sym typeface="Times New Roman Bold"/>
+              </a:rPr>
+              <a:t>User and Assistive</a:t>
+            </a:r>
+          </a:p>
+          <a:p>
+            <a:pPr algn="ctr">
+              <a:lnSpc>
+                <a:spcPts val="2221"/>
+              </a:lnSpc>
+            </a:pPr>
+            <a:r>
+              <a:rPr lang="en-US" sz="2400" b="1" dirty="0">
+                <a:solidFill>
+                  <a:srgbClr val="FFFFFF"/>
+                </a:solidFill>
+                <a:latin typeface="Times New Roman Bold"/>
+                <a:ea typeface="Times New Roman Bold"/>
+                <a:cs typeface="Times New Roman Bold"/>
+                <a:sym typeface="Times New Roman Bold"/>
+              </a:rPr>
+              <a:t>Technology</a:t>
+            </a:r>
+          </a:p>
+        </p:txBody>
+      </p:sp>
+      <p:sp>
+        <p:nvSpPr>
+          <p:cNvPr id="7" name="TextBox 7"/>
+          <p:cNvSpPr txBox="1"/>
+          <p:nvPr/>
+        </p:nvSpPr>
+        <p:spPr>
+          <a:xfrm>
+            <a:off x="2773220" y="233429"/>
+            <a:ext cx="9217066" cy="487313"/>
+          </a:xfrm>
+          <a:prstGeom prst="rect">
+            <a:avLst/>
+          </a:prstGeom>
+        </p:spPr>
+        <p:txBody>
+          <a:bodyPr lIns="0" tIns="0" rIns="0" bIns="0" rtlCol="0" anchor="t">
+            <a:spAutoFit/>
+          </a:bodyPr>
+          <a:lstStyle/>
+          <a:p>
+            <a:pPr algn="ctr">
+              <a:lnSpc>
+                <a:spcPts val="1920"/>
+              </a:lnSpc>
+            </a:pPr>
+            <a:r>
+              <a:rPr lang="en-US" sz="2000" b="1" dirty="0">
+                <a:solidFill>
+                  <a:srgbClr val="004B9E"/>
+                </a:solidFill>
+                <a:latin typeface="Times New Roman" panose="02020603050405020304" pitchFamily="18" charset="0"/>
+                <a:cs typeface="Times New Roman" panose="02020603050405020304" pitchFamily="18" charset="0"/>
+                <a:sym typeface="Times New Roman Bold"/>
+              </a:rPr>
+              <a:t>Accessible user interfaces and assistive technologies ensuring perceivable, operable, understandable and robust interaction (WCAG 2.1 Level AA)</a:t>
+            </a:r>
+          </a:p>
+        </p:txBody>
+      </p:sp>
+      <p:grpSp>
+        <p:nvGrpSpPr>
+          <p:cNvPr id="8" name="Group 8"/>
+          <p:cNvGrpSpPr/>
+          <p:nvPr/>
+        </p:nvGrpSpPr>
+        <p:grpSpPr>
+          <a:xfrm>
+            <a:off x="2833995" y="825518"/>
+            <a:ext cx="1784833" cy="887914"/>
+            <a:chOff x="0" y="0"/>
+            <a:chExt cx="2314321" cy="956418"/>
+          </a:xfrm>
+        </p:grpSpPr>
+        <p:sp>
+          <p:nvSpPr>
+            <p:cNvPr id="9" name="Freeform 9"/>
+            <p:cNvSpPr/>
+            <p:nvPr/>
+          </p:nvSpPr>
+          <p:spPr>
+            <a:xfrm>
+              <a:off x="0" y="0"/>
+              <a:ext cx="2314229" cy="956320"/>
+            </a:xfrm>
+            <a:custGeom>
+              <a:avLst/>
+              <a:gdLst/>
+              <a:ahLst/>
+              <a:cxnLst/>
+              <a:rect l="l" t="t" r="r" b="b"/>
+              <a:pathLst>
+                <a:path w="2314229" h="956320">
+                  <a:moveTo>
+                    <a:pt x="0" y="76486"/>
+                  </a:moveTo>
+                  <a:cubicBezTo>
+                    <a:pt x="0" y="34247"/>
+                    <a:pt x="55564" y="0"/>
+                    <a:pt x="124092" y="0"/>
+                  </a:cubicBezTo>
+                  <a:lnTo>
+                    <a:pt x="2190136" y="0"/>
+                  </a:lnTo>
+                  <a:cubicBezTo>
+                    <a:pt x="2258665" y="0"/>
+                    <a:pt x="2314229" y="34247"/>
+                    <a:pt x="2314229" y="76486"/>
+                  </a:cubicBezTo>
+                  <a:lnTo>
+                    <a:pt x="2314229" y="879834"/>
+                  </a:lnTo>
+                  <a:cubicBezTo>
+                    <a:pt x="2314229" y="922073"/>
+                    <a:pt x="2258665" y="956320"/>
+                    <a:pt x="2190136" y="956320"/>
+                  </a:cubicBezTo>
+                  <a:lnTo>
+                    <a:pt x="124092" y="956320"/>
+                  </a:lnTo>
+                  <a:cubicBezTo>
+                    <a:pt x="55564" y="956320"/>
+                    <a:pt x="0" y="922073"/>
+                    <a:pt x="0" y="879834"/>
+                  </a:cubicBezTo>
+                  <a:close/>
+                </a:path>
+              </a:pathLst>
+            </a:custGeom>
+            <a:solidFill>
+              <a:srgbClr val="FFFFFF"/>
+            </a:solidFill>
+            <a:ln w="19065" cap="sq">
+              <a:solidFill>
+                <a:srgbClr val="1E40AF"/>
+              </a:solidFill>
+              <a:prstDash val="solid"/>
+              <a:miter/>
+            </a:ln>
+          </p:spPr>
+        </p:sp>
+      </p:grpSp>
+      <p:sp>
+        <p:nvSpPr>
+          <p:cNvPr id="10" name="TextBox 10"/>
+          <p:cNvSpPr txBox="1"/>
+          <p:nvPr/>
+        </p:nvSpPr>
+        <p:spPr>
+          <a:xfrm>
+            <a:off x="2929314" y="952500"/>
+            <a:ext cx="1566486" cy="665480"/>
+          </a:xfrm>
+          <a:prstGeom prst="rect">
+            <a:avLst/>
+          </a:prstGeom>
+        </p:spPr>
+        <p:txBody>
+          <a:bodyPr lIns="0" tIns="0" rIns="0" bIns="0" rtlCol="0" anchor="t">
+            <a:spAutoFit/>
+          </a:bodyPr>
+          <a:lstStyle/>
+          <a:p>
+            <a:pPr algn="ctr">
+              <a:lnSpc>
+                <a:spcPts val="1727"/>
+              </a:lnSpc>
+            </a:pPr>
+            <a:r>
+              <a:rPr lang="en-US" sz="1600" b="1" dirty="0">
+                <a:solidFill>
+                  <a:srgbClr val="111827"/>
+                </a:solidFill>
+                <a:latin typeface="Times New Roman Bold"/>
+                <a:ea typeface="Times New Roman Bold"/>
+                <a:cs typeface="Times New Roman Bold"/>
+                <a:sym typeface="Times New Roman Bold"/>
+              </a:rPr>
+              <a:t>Screen Readers</a:t>
+            </a:r>
+          </a:p>
+          <a:p>
+            <a:pPr algn="ctr">
+              <a:lnSpc>
+                <a:spcPts val="1727"/>
+              </a:lnSpc>
+            </a:pPr>
+            <a:r>
+              <a:rPr lang="en-US" sz="1600" b="1" dirty="0">
+                <a:solidFill>
+                  <a:srgbClr val="111827"/>
+                </a:solidFill>
+                <a:latin typeface="Times New Roman Bold"/>
+                <a:ea typeface="Times New Roman Bold"/>
+                <a:cs typeface="Times New Roman Bold"/>
+                <a:sym typeface="Times New Roman Bold"/>
+              </a:rPr>
+              <a:t>(NVDA, JAWS,</a:t>
+            </a:r>
+          </a:p>
+          <a:p>
+            <a:pPr algn="ctr">
+              <a:lnSpc>
+                <a:spcPts val="1727"/>
+              </a:lnSpc>
+            </a:pPr>
+            <a:r>
+              <a:rPr lang="en-US" sz="1600" b="1" dirty="0">
+                <a:solidFill>
+                  <a:srgbClr val="111827"/>
+                </a:solidFill>
+                <a:latin typeface="Times New Roman Bold"/>
+                <a:ea typeface="Times New Roman Bold"/>
+                <a:cs typeface="Times New Roman Bold"/>
+                <a:sym typeface="Times New Roman Bold"/>
+              </a:rPr>
+              <a:t>Voice Over)</a:t>
+            </a:r>
+          </a:p>
+        </p:txBody>
+      </p:sp>
+      <p:grpSp>
+        <p:nvGrpSpPr>
+          <p:cNvPr id="11" name="Group 11"/>
+          <p:cNvGrpSpPr/>
+          <p:nvPr/>
+        </p:nvGrpSpPr>
+        <p:grpSpPr>
+          <a:xfrm>
+            <a:off x="4775518" y="830012"/>
+            <a:ext cx="1713402" cy="883419"/>
+            <a:chOff x="0" y="0"/>
+            <a:chExt cx="2221700" cy="983183"/>
+          </a:xfrm>
+        </p:grpSpPr>
+        <p:sp>
+          <p:nvSpPr>
+            <p:cNvPr id="12" name="Freeform 12"/>
+            <p:cNvSpPr/>
+            <p:nvPr/>
+          </p:nvSpPr>
+          <p:spPr>
+            <a:xfrm>
+              <a:off x="0" y="0"/>
+              <a:ext cx="2221611" cy="983083"/>
+            </a:xfrm>
+            <a:custGeom>
+              <a:avLst/>
+              <a:gdLst/>
+              <a:ahLst/>
+              <a:cxnLst/>
+              <a:rect l="l" t="t" r="r" b="b"/>
+              <a:pathLst>
+                <a:path w="2221611" h="983083">
+                  <a:moveTo>
+                    <a:pt x="0" y="78626"/>
+                  </a:moveTo>
+                  <a:cubicBezTo>
+                    <a:pt x="0" y="35206"/>
+                    <a:pt x="53340" y="0"/>
+                    <a:pt x="119126" y="0"/>
+                  </a:cubicBezTo>
+                  <a:lnTo>
+                    <a:pt x="2102485" y="0"/>
+                  </a:lnTo>
+                  <a:cubicBezTo>
+                    <a:pt x="2168271" y="0"/>
+                    <a:pt x="2221611" y="35206"/>
+                    <a:pt x="2221611" y="78626"/>
+                  </a:cubicBezTo>
+                  <a:lnTo>
+                    <a:pt x="2221611" y="904456"/>
+                  </a:lnTo>
+                  <a:cubicBezTo>
+                    <a:pt x="2221611" y="947877"/>
+                    <a:pt x="2168271" y="983083"/>
+                    <a:pt x="2102485" y="983083"/>
+                  </a:cubicBezTo>
+                  <a:lnTo>
+                    <a:pt x="119126" y="983083"/>
+                  </a:lnTo>
+                  <a:cubicBezTo>
+                    <a:pt x="53340" y="983083"/>
+                    <a:pt x="0" y="947877"/>
+                    <a:pt x="0" y="904456"/>
+                  </a:cubicBezTo>
+                  <a:close/>
+                </a:path>
+              </a:pathLst>
+            </a:custGeom>
+            <a:solidFill>
+              <a:srgbClr val="FFFFFF"/>
+            </a:solidFill>
+            <a:ln w="19065" cap="sq">
+              <a:solidFill>
+                <a:srgbClr val="1E40AF"/>
+              </a:solidFill>
+              <a:prstDash val="solid"/>
+              <a:miter/>
+            </a:ln>
+          </p:spPr>
+        </p:sp>
+      </p:grpSp>
+      <p:sp>
+        <p:nvSpPr>
+          <p:cNvPr id="13" name="TextBox 13"/>
+          <p:cNvSpPr txBox="1"/>
+          <p:nvPr/>
+        </p:nvSpPr>
+        <p:spPr>
+          <a:xfrm>
+            <a:off x="4765743" y="1028700"/>
+            <a:ext cx="1693794" cy="450003"/>
+          </a:xfrm>
+          <a:prstGeom prst="rect">
+            <a:avLst/>
+          </a:prstGeom>
+        </p:spPr>
+        <p:txBody>
+          <a:bodyPr lIns="0" tIns="0" rIns="0" bIns="0" rtlCol="0" anchor="t">
+            <a:spAutoFit/>
+          </a:bodyPr>
+          <a:lstStyle/>
+          <a:p>
+            <a:pPr algn="ctr">
+              <a:lnSpc>
+                <a:spcPts val="1727"/>
+              </a:lnSpc>
+            </a:pPr>
+            <a:r>
+              <a:rPr lang="en-US" sz="1600" b="1" dirty="0">
+                <a:solidFill>
+                  <a:srgbClr val="111827"/>
+                </a:solidFill>
+                <a:latin typeface="Times New Roman Bold"/>
+                <a:ea typeface="Times New Roman Bold"/>
+                <a:cs typeface="Times New Roman Bold"/>
+                <a:sym typeface="Times New Roman Bold"/>
+              </a:rPr>
+              <a:t>Keyboard-only</a:t>
+            </a:r>
+          </a:p>
+          <a:p>
+            <a:pPr algn="ctr">
+              <a:lnSpc>
+                <a:spcPts val="1727"/>
+              </a:lnSpc>
+            </a:pPr>
+            <a:r>
+              <a:rPr lang="en-US" sz="1600" b="1" dirty="0">
+                <a:solidFill>
+                  <a:srgbClr val="111827"/>
+                </a:solidFill>
+                <a:latin typeface="Times New Roman Bold"/>
+                <a:ea typeface="Times New Roman Bold"/>
+                <a:cs typeface="Times New Roman Bold"/>
+                <a:sym typeface="Times New Roman Bold"/>
+              </a:rPr>
+              <a:t>Navigation</a:t>
+            </a:r>
+          </a:p>
+        </p:txBody>
+      </p:sp>
+      <p:grpSp>
+        <p:nvGrpSpPr>
+          <p:cNvPr id="14" name="Group 14"/>
+          <p:cNvGrpSpPr/>
+          <p:nvPr/>
+        </p:nvGrpSpPr>
+        <p:grpSpPr>
+          <a:xfrm>
+            <a:off x="6560341" y="854062"/>
+            <a:ext cx="1713402" cy="859369"/>
+            <a:chOff x="0" y="0"/>
+            <a:chExt cx="2221700" cy="956418"/>
+          </a:xfrm>
+        </p:grpSpPr>
+        <p:sp>
+          <p:nvSpPr>
+            <p:cNvPr id="15" name="Freeform 15"/>
+            <p:cNvSpPr/>
+            <p:nvPr/>
+          </p:nvSpPr>
+          <p:spPr>
+            <a:xfrm>
+              <a:off x="0" y="0"/>
+              <a:ext cx="2221611" cy="956320"/>
+            </a:xfrm>
+            <a:custGeom>
+              <a:avLst/>
+              <a:gdLst/>
+              <a:ahLst/>
+              <a:cxnLst/>
+              <a:rect l="l" t="t" r="r" b="b"/>
+              <a:pathLst>
+                <a:path w="2221611" h="956320">
+                  <a:moveTo>
+                    <a:pt x="0" y="76486"/>
+                  </a:moveTo>
+                  <a:cubicBezTo>
+                    <a:pt x="0" y="34247"/>
+                    <a:pt x="53340" y="0"/>
+                    <a:pt x="119126" y="0"/>
+                  </a:cubicBezTo>
+                  <a:lnTo>
+                    <a:pt x="2102485" y="0"/>
+                  </a:lnTo>
+                  <a:cubicBezTo>
+                    <a:pt x="2168271" y="0"/>
+                    <a:pt x="2221611" y="34247"/>
+                    <a:pt x="2221611" y="76486"/>
+                  </a:cubicBezTo>
+                  <a:lnTo>
+                    <a:pt x="2221611" y="879834"/>
+                  </a:lnTo>
+                  <a:cubicBezTo>
+                    <a:pt x="2221611" y="922073"/>
+                    <a:pt x="2168271" y="956320"/>
+                    <a:pt x="2102485" y="956320"/>
+                  </a:cubicBezTo>
+                  <a:lnTo>
+                    <a:pt x="119126" y="956320"/>
+                  </a:lnTo>
+                  <a:cubicBezTo>
+                    <a:pt x="53340" y="956320"/>
+                    <a:pt x="0" y="922073"/>
+                    <a:pt x="0" y="879834"/>
+                  </a:cubicBezTo>
+                  <a:close/>
+                </a:path>
+              </a:pathLst>
+            </a:custGeom>
+            <a:solidFill>
+              <a:srgbClr val="FFFFFF"/>
+            </a:solidFill>
+            <a:ln w="19065" cap="sq">
+              <a:solidFill>
+                <a:srgbClr val="1E40AF"/>
+              </a:solidFill>
+              <a:prstDash val="solid"/>
+              <a:miter/>
+            </a:ln>
+          </p:spPr>
+        </p:sp>
+      </p:grpSp>
+      <p:sp>
+        <p:nvSpPr>
+          <p:cNvPr id="16" name="TextBox 16"/>
+          <p:cNvSpPr txBox="1"/>
+          <p:nvPr/>
+        </p:nvSpPr>
+        <p:spPr>
+          <a:xfrm>
+            <a:off x="6570145" y="1028700"/>
+            <a:ext cx="1693794" cy="450003"/>
+          </a:xfrm>
+          <a:prstGeom prst="rect">
+            <a:avLst/>
+          </a:prstGeom>
+        </p:spPr>
+        <p:txBody>
+          <a:bodyPr lIns="0" tIns="0" rIns="0" bIns="0" rtlCol="0" anchor="t">
+            <a:spAutoFit/>
+          </a:bodyPr>
+          <a:lstStyle/>
+          <a:p>
+            <a:pPr algn="ctr">
+              <a:lnSpc>
+                <a:spcPts val="1727"/>
+              </a:lnSpc>
+            </a:pPr>
+            <a:r>
+              <a:rPr lang="en-US" sz="1600" b="1" dirty="0">
+                <a:solidFill>
+                  <a:srgbClr val="111827"/>
+                </a:solidFill>
+                <a:latin typeface="Times New Roman Bold"/>
+                <a:ea typeface="Times New Roman Bold"/>
+                <a:cs typeface="Times New Roman Bold"/>
+                <a:sym typeface="Times New Roman Bold"/>
+              </a:rPr>
+              <a:t>Voice Control and</a:t>
+            </a:r>
+          </a:p>
+          <a:p>
+            <a:pPr algn="ctr">
+              <a:lnSpc>
+                <a:spcPts val="1727"/>
+              </a:lnSpc>
+            </a:pPr>
+            <a:r>
+              <a:rPr lang="en-US" sz="1600" b="1" dirty="0">
+                <a:solidFill>
+                  <a:srgbClr val="111827"/>
+                </a:solidFill>
+                <a:latin typeface="Times New Roman Bold"/>
+                <a:ea typeface="Times New Roman Bold"/>
+                <a:cs typeface="Times New Roman Bold"/>
+                <a:sym typeface="Times New Roman Bold"/>
+              </a:rPr>
+              <a:t>Voice Commands</a:t>
+            </a:r>
+          </a:p>
+        </p:txBody>
+      </p:sp>
+      <p:grpSp>
+        <p:nvGrpSpPr>
+          <p:cNvPr id="17" name="Group 17"/>
+          <p:cNvGrpSpPr/>
+          <p:nvPr/>
+        </p:nvGrpSpPr>
+        <p:grpSpPr>
+          <a:xfrm>
+            <a:off x="8423510" y="880872"/>
+            <a:ext cx="1713402" cy="852677"/>
+            <a:chOff x="0" y="0"/>
+            <a:chExt cx="2221700" cy="948969"/>
+          </a:xfrm>
+        </p:grpSpPr>
+        <p:sp>
+          <p:nvSpPr>
+            <p:cNvPr id="18" name="Freeform 18"/>
+            <p:cNvSpPr/>
+            <p:nvPr/>
+          </p:nvSpPr>
+          <p:spPr>
+            <a:xfrm>
+              <a:off x="0" y="0"/>
+              <a:ext cx="2221611" cy="948872"/>
+            </a:xfrm>
+            <a:custGeom>
+              <a:avLst/>
+              <a:gdLst/>
+              <a:ahLst/>
+              <a:cxnLst/>
+              <a:rect l="l" t="t" r="r" b="b"/>
+              <a:pathLst>
+                <a:path w="2221611" h="948872">
+                  <a:moveTo>
+                    <a:pt x="0" y="75890"/>
+                  </a:moveTo>
+                  <a:cubicBezTo>
+                    <a:pt x="0" y="33981"/>
+                    <a:pt x="53340" y="0"/>
+                    <a:pt x="119126" y="0"/>
+                  </a:cubicBezTo>
+                  <a:lnTo>
+                    <a:pt x="2102485" y="0"/>
+                  </a:lnTo>
+                  <a:cubicBezTo>
+                    <a:pt x="2168271" y="0"/>
+                    <a:pt x="2221611" y="33981"/>
+                    <a:pt x="2221611" y="75890"/>
+                  </a:cubicBezTo>
+                  <a:lnTo>
+                    <a:pt x="2221611" y="872982"/>
+                  </a:lnTo>
+                  <a:cubicBezTo>
+                    <a:pt x="2221611" y="914892"/>
+                    <a:pt x="2168271" y="948872"/>
+                    <a:pt x="2102485" y="948872"/>
+                  </a:cubicBezTo>
+                  <a:lnTo>
+                    <a:pt x="119126" y="948872"/>
+                  </a:lnTo>
+                  <a:cubicBezTo>
+                    <a:pt x="53340" y="948872"/>
+                    <a:pt x="0" y="914892"/>
+                    <a:pt x="0" y="872982"/>
+                  </a:cubicBezTo>
+                  <a:close/>
+                </a:path>
+              </a:pathLst>
+            </a:custGeom>
+            <a:solidFill>
+              <a:srgbClr val="FFFFFF"/>
+            </a:solidFill>
+            <a:ln w="19065" cap="sq">
+              <a:solidFill>
+                <a:srgbClr val="1E40AF"/>
+              </a:solidFill>
+              <a:prstDash val="solid"/>
+              <a:miter/>
+            </a:ln>
+          </p:spPr>
+        </p:sp>
+      </p:grpSp>
+      <p:sp>
+        <p:nvSpPr>
+          <p:cNvPr id="19" name="TextBox 19"/>
+          <p:cNvSpPr txBox="1"/>
+          <p:nvPr/>
+        </p:nvSpPr>
+        <p:spPr>
+          <a:xfrm>
+            <a:off x="8433314" y="1028700"/>
+            <a:ext cx="1693794" cy="450003"/>
+          </a:xfrm>
+          <a:prstGeom prst="rect">
+            <a:avLst/>
+          </a:prstGeom>
+        </p:spPr>
+        <p:txBody>
+          <a:bodyPr lIns="0" tIns="0" rIns="0" bIns="0" rtlCol="0" anchor="t">
+            <a:spAutoFit/>
+          </a:bodyPr>
+          <a:lstStyle/>
+          <a:p>
+            <a:pPr algn="ctr">
+              <a:lnSpc>
+                <a:spcPts val="1727"/>
+              </a:lnSpc>
+            </a:pPr>
+            <a:r>
+              <a:rPr lang="en-US" sz="1600" b="1" dirty="0">
+                <a:solidFill>
+                  <a:srgbClr val="111827"/>
+                </a:solidFill>
+                <a:latin typeface="Times New Roman Bold"/>
+                <a:ea typeface="Times New Roman Bold"/>
+                <a:cs typeface="Times New Roman Bold"/>
+                <a:sym typeface="Times New Roman Bold"/>
+              </a:rPr>
+              <a:t>High Contrast</a:t>
+            </a:r>
+          </a:p>
+          <a:p>
+            <a:pPr algn="ctr">
+              <a:lnSpc>
+                <a:spcPts val="1727"/>
+              </a:lnSpc>
+            </a:pPr>
+            <a:r>
+              <a:rPr lang="en-US" sz="1600" b="1" dirty="0">
+                <a:solidFill>
+                  <a:srgbClr val="111827"/>
+                </a:solidFill>
+                <a:latin typeface="Times New Roman Bold"/>
+                <a:ea typeface="Times New Roman Bold"/>
+                <a:cs typeface="Times New Roman Bold"/>
+                <a:sym typeface="Times New Roman Bold"/>
+              </a:rPr>
+              <a:t>and Zoom Modes</a:t>
+            </a:r>
+          </a:p>
+        </p:txBody>
+      </p:sp>
+      <p:grpSp>
+        <p:nvGrpSpPr>
+          <p:cNvPr id="20" name="Group 20"/>
+          <p:cNvGrpSpPr/>
+          <p:nvPr/>
+        </p:nvGrpSpPr>
+        <p:grpSpPr>
+          <a:xfrm>
+            <a:off x="10286688" y="865848"/>
+            <a:ext cx="1713402" cy="867702"/>
+            <a:chOff x="0" y="0"/>
+            <a:chExt cx="2221700" cy="887254"/>
+          </a:xfrm>
+        </p:grpSpPr>
+        <p:sp>
+          <p:nvSpPr>
+            <p:cNvPr id="21" name="Freeform 21"/>
+            <p:cNvSpPr/>
+            <p:nvPr/>
+          </p:nvSpPr>
+          <p:spPr>
+            <a:xfrm>
+              <a:off x="0" y="0"/>
+              <a:ext cx="2221611" cy="887163"/>
+            </a:xfrm>
+            <a:custGeom>
+              <a:avLst/>
+              <a:gdLst/>
+              <a:ahLst/>
+              <a:cxnLst/>
+              <a:rect l="l" t="t" r="r" b="b"/>
+              <a:pathLst>
+                <a:path w="2221611" h="887163">
+                  <a:moveTo>
+                    <a:pt x="0" y="70955"/>
+                  </a:moveTo>
+                  <a:cubicBezTo>
+                    <a:pt x="0" y="31771"/>
+                    <a:pt x="53340" y="0"/>
+                    <a:pt x="119126" y="0"/>
+                  </a:cubicBezTo>
+                  <a:lnTo>
+                    <a:pt x="2102485" y="0"/>
+                  </a:lnTo>
+                  <a:cubicBezTo>
+                    <a:pt x="2168271" y="0"/>
+                    <a:pt x="2221611" y="31771"/>
+                    <a:pt x="2221611" y="70955"/>
+                  </a:cubicBezTo>
+                  <a:lnTo>
+                    <a:pt x="2221611" y="816208"/>
+                  </a:lnTo>
+                  <a:cubicBezTo>
+                    <a:pt x="2221611" y="855392"/>
+                    <a:pt x="2168271" y="887163"/>
+                    <a:pt x="2102485" y="887163"/>
+                  </a:cubicBezTo>
+                  <a:lnTo>
+                    <a:pt x="119126" y="887163"/>
+                  </a:lnTo>
+                  <a:cubicBezTo>
+                    <a:pt x="53340" y="887163"/>
+                    <a:pt x="0" y="855392"/>
+                    <a:pt x="0" y="816208"/>
+                  </a:cubicBezTo>
+                  <a:close/>
+                </a:path>
+              </a:pathLst>
+            </a:custGeom>
+            <a:solidFill>
+              <a:srgbClr val="FFFFFF"/>
+            </a:solidFill>
+            <a:ln w="19065" cap="sq">
+              <a:solidFill>
+                <a:srgbClr val="1E40AF"/>
+              </a:solidFill>
+              <a:prstDash val="solid"/>
+              <a:miter/>
+            </a:ln>
+          </p:spPr>
+        </p:sp>
+      </p:grpSp>
+      <p:sp>
+        <p:nvSpPr>
+          <p:cNvPr id="22" name="TextBox 22"/>
+          <p:cNvSpPr txBox="1"/>
+          <p:nvPr/>
+        </p:nvSpPr>
+        <p:spPr>
+          <a:xfrm>
+            <a:off x="10296492" y="1035897"/>
+            <a:ext cx="1693794" cy="450003"/>
+          </a:xfrm>
+          <a:prstGeom prst="rect">
+            <a:avLst/>
+          </a:prstGeom>
+        </p:spPr>
+        <p:txBody>
+          <a:bodyPr lIns="0" tIns="0" rIns="0" bIns="0" rtlCol="0" anchor="t">
+            <a:spAutoFit/>
+          </a:bodyPr>
+          <a:lstStyle/>
+          <a:p>
+            <a:pPr algn="ctr">
+              <a:lnSpc>
+                <a:spcPts val="1727"/>
+              </a:lnSpc>
+            </a:pPr>
+            <a:r>
+              <a:rPr lang="en-US" sz="1600" b="1" dirty="0">
+                <a:solidFill>
+                  <a:srgbClr val="111827"/>
+                </a:solidFill>
+                <a:latin typeface="Times New Roman Bold"/>
+                <a:ea typeface="Times New Roman Bold"/>
+                <a:cs typeface="Times New Roman Bold"/>
+                <a:sym typeface="Times New Roman Bold"/>
+              </a:rPr>
+              <a:t>Plain Language</a:t>
+            </a:r>
+          </a:p>
+          <a:p>
+            <a:pPr algn="ctr">
+              <a:lnSpc>
+                <a:spcPts val="1727"/>
+              </a:lnSpc>
+            </a:pPr>
+            <a:r>
+              <a:rPr lang="en-US" sz="1600" b="1" dirty="0">
+                <a:solidFill>
+                  <a:srgbClr val="111827"/>
+                </a:solidFill>
+                <a:latin typeface="Times New Roman Bold"/>
+                <a:ea typeface="Times New Roman Bold"/>
+                <a:cs typeface="Times New Roman Bold"/>
+                <a:sym typeface="Times New Roman Bold"/>
+              </a:rPr>
+              <a:t>Support</a:t>
+            </a:r>
+          </a:p>
+        </p:txBody>
+      </p:sp>
+      <p:sp>
+        <p:nvSpPr>
+          <p:cNvPr id="23" name="TextBox 23"/>
+          <p:cNvSpPr txBox="1"/>
+          <p:nvPr/>
+        </p:nvSpPr>
+        <p:spPr>
+          <a:xfrm>
+            <a:off x="12535991" y="265633"/>
+            <a:ext cx="2211487" cy="293293"/>
+          </a:xfrm>
+          <a:prstGeom prst="rect">
+            <a:avLst/>
+          </a:prstGeom>
+        </p:spPr>
+        <p:txBody>
+          <a:bodyPr lIns="0" tIns="0" rIns="0" bIns="0" rtlCol="0" anchor="t">
+            <a:spAutoFit/>
+          </a:bodyPr>
+          <a:lstStyle/>
+          <a:p>
+            <a:pPr algn="ctr">
+              <a:lnSpc>
+                <a:spcPts val="2221"/>
+              </a:lnSpc>
+            </a:pPr>
+            <a:r>
+              <a:rPr lang="en-US" sz="2000" b="1" dirty="0">
+                <a:solidFill>
+                  <a:srgbClr val="004B9E"/>
+                </a:solidFill>
+                <a:latin typeface="Times New Roman" panose="02020603050405020304" pitchFamily="18" charset="0"/>
+                <a:cs typeface="Times New Roman" panose="02020603050405020304" pitchFamily="18" charset="0"/>
+                <a:sym typeface="Times New Roman Bold"/>
+              </a:rPr>
+              <a:t>Layer Function</a:t>
+            </a:r>
+          </a:p>
+        </p:txBody>
+      </p:sp>
+      <p:sp>
+        <p:nvSpPr>
+          <p:cNvPr id="24" name="TextBox 24"/>
+          <p:cNvSpPr txBox="1"/>
+          <p:nvPr/>
+        </p:nvSpPr>
+        <p:spPr>
+          <a:xfrm>
+            <a:off x="12441964" y="599730"/>
+            <a:ext cx="2399539" cy="974626"/>
+          </a:xfrm>
+          <a:prstGeom prst="rect">
+            <a:avLst/>
+          </a:prstGeom>
+        </p:spPr>
+        <p:txBody>
+          <a:bodyPr wrap="square" lIns="0" tIns="0" rIns="0" bIns="0" rtlCol="0" anchor="t">
+            <a:spAutoFit/>
+          </a:bodyPr>
+          <a:lstStyle/>
+          <a:p>
+            <a:pPr algn="l">
+              <a:lnSpc>
+                <a:spcPts val="1920"/>
+              </a:lnSpc>
+            </a:pPr>
+            <a:r>
+              <a:rPr lang="en-US" sz="2000" dirty="0">
+                <a:solidFill>
+                  <a:srgbClr val="111827"/>
+                </a:solidFill>
+                <a:latin typeface="Times New Roman"/>
+                <a:ea typeface="Times New Roman"/>
+                <a:cs typeface="Times New Roman"/>
+                <a:sym typeface="Times New Roman"/>
+              </a:rPr>
+              <a:t>Ensures accessibility and usability for people with disabilities (</a:t>
+            </a:r>
+            <a:r>
+              <a:rPr lang="en-US" sz="2000" dirty="0" err="1">
+                <a:solidFill>
+                  <a:srgbClr val="111827"/>
+                </a:solidFill>
+                <a:latin typeface="Times New Roman"/>
+                <a:ea typeface="Times New Roman"/>
+                <a:cs typeface="Times New Roman"/>
+                <a:sym typeface="Times New Roman"/>
+              </a:rPr>
+              <a:t>PwDs</a:t>
+            </a:r>
+            <a:r>
+              <a:rPr lang="en-US" sz="2000" dirty="0">
+                <a:solidFill>
+                  <a:srgbClr val="111827"/>
+                </a:solidFill>
+                <a:latin typeface="Times New Roman"/>
+                <a:ea typeface="Times New Roman"/>
+                <a:cs typeface="Times New Roman"/>
+                <a:sym typeface="Times New Roman"/>
+              </a:rPr>
+              <a:t>).</a:t>
+            </a:r>
+          </a:p>
+        </p:txBody>
+      </p:sp>
+      <p:grpSp>
+        <p:nvGrpSpPr>
+          <p:cNvPr id="25" name="Group 25"/>
+          <p:cNvGrpSpPr/>
+          <p:nvPr/>
+        </p:nvGrpSpPr>
+        <p:grpSpPr>
+          <a:xfrm>
+            <a:off x="76676" y="2448976"/>
+            <a:ext cx="14850117" cy="1793775"/>
+            <a:chOff x="0" y="0"/>
+            <a:chExt cx="19255550" cy="2325916"/>
+          </a:xfrm>
+        </p:grpSpPr>
+        <p:sp>
+          <p:nvSpPr>
+            <p:cNvPr id="26" name="Freeform 26"/>
+            <p:cNvSpPr/>
+            <p:nvPr/>
+          </p:nvSpPr>
+          <p:spPr>
+            <a:xfrm>
+              <a:off x="0" y="0"/>
+              <a:ext cx="19255485" cy="2325878"/>
+            </a:xfrm>
+            <a:custGeom>
+              <a:avLst/>
+              <a:gdLst/>
+              <a:ahLst/>
+              <a:cxnLst/>
+              <a:rect l="l" t="t" r="r" b="b"/>
+              <a:pathLst>
+                <a:path w="19255485" h="2325878">
+                  <a:moveTo>
+                    <a:pt x="0" y="69723"/>
+                  </a:moveTo>
+                  <a:cubicBezTo>
+                    <a:pt x="0" y="31242"/>
+                    <a:pt x="31242" y="0"/>
+                    <a:pt x="69723" y="0"/>
+                  </a:cubicBezTo>
+                  <a:lnTo>
+                    <a:pt x="19185762" y="0"/>
+                  </a:lnTo>
+                  <a:cubicBezTo>
+                    <a:pt x="19224244" y="0"/>
+                    <a:pt x="19255485" y="31242"/>
+                    <a:pt x="19255485" y="69723"/>
+                  </a:cubicBezTo>
+                  <a:lnTo>
+                    <a:pt x="19255485" y="2256155"/>
+                  </a:lnTo>
+                  <a:cubicBezTo>
+                    <a:pt x="19255485" y="2294636"/>
+                    <a:pt x="19224244" y="2325878"/>
+                    <a:pt x="19185762" y="2325878"/>
+                  </a:cubicBezTo>
+                  <a:lnTo>
+                    <a:pt x="69723" y="2325878"/>
+                  </a:lnTo>
+                  <a:cubicBezTo>
+                    <a:pt x="31242" y="2325878"/>
+                    <a:pt x="0" y="2294636"/>
+                    <a:pt x="0" y="2256155"/>
+                  </a:cubicBezTo>
+                  <a:close/>
+                </a:path>
+              </a:pathLst>
+            </a:custGeom>
+            <a:solidFill>
+              <a:srgbClr val="FFFFFF"/>
+            </a:solidFill>
+            <a:ln w="28597" cap="sq">
+              <a:solidFill>
+                <a:srgbClr val="C27803"/>
+              </a:solidFill>
+              <a:prstDash val="solid"/>
+              <a:miter/>
+            </a:ln>
+          </p:spPr>
+        </p:sp>
+      </p:grpSp>
+      <p:grpSp>
+        <p:nvGrpSpPr>
+          <p:cNvPr id="27" name="Group 27"/>
+          <p:cNvGrpSpPr/>
+          <p:nvPr/>
+        </p:nvGrpSpPr>
+        <p:grpSpPr>
+          <a:xfrm>
+            <a:off x="91377" y="2463677"/>
+            <a:ext cx="2540696" cy="1764372"/>
+            <a:chOff x="0" y="0"/>
+            <a:chExt cx="3294418" cy="2287791"/>
+          </a:xfrm>
+        </p:grpSpPr>
+        <p:sp>
+          <p:nvSpPr>
+            <p:cNvPr id="28" name="Freeform 28"/>
+            <p:cNvSpPr/>
+            <p:nvPr/>
+          </p:nvSpPr>
+          <p:spPr>
+            <a:xfrm>
+              <a:off x="0" y="0"/>
+              <a:ext cx="3294380" cy="2287778"/>
+            </a:xfrm>
+            <a:custGeom>
+              <a:avLst/>
+              <a:gdLst/>
+              <a:ahLst/>
+              <a:cxnLst/>
+              <a:rect l="l" t="t" r="r" b="b"/>
+              <a:pathLst>
+                <a:path w="3294380" h="2287778">
+                  <a:moveTo>
+                    <a:pt x="0" y="0"/>
+                  </a:moveTo>
+                  <a:lnTo>
+                    <a:pt x="3294380" y="0"/>
+                  </a:lnTo>
+                  <a:lnTo>
+                    <a:pt x="3294380" y="2287778"/>
+                  </a:lnTo>
+                  <a:lnTo>
+                    <a:pt x="0" y="2287778"/>
+                  </a:lnTo>
+                  <a:close/>
+                </a:path>
+              </a:pathLst>
+            </a:custGeom>
+            <a:solidFill>
+              <a:srgbClr val="D86B00"/>
+            </a:solidFill>
+            <a:ln>
+              <a:noFill/>
+            </a:ln>
+          </p:spPr>
+          <p:style>
+            <a:lnRef idx="1">
+              <a:schemeClr val="accent1"/>
+            </a:lnRef>
+            <a:fillRef idx="3">
+              <a:schemeClr val="accent1"/>
+            </a:fillRef>
+            <a:effectRef idx="2">
+              <a:schemeClr val="accent1"/>
+            </a:effectRef>
+            <a:fontRef idx="minor">
+              <a:schemeClr val="lt1"/>
+            </a:fontRef>
+          </p:style>
+        </p:sp>
+      </p:grpSp>
+      <p:sp>
+        <p:nvSpPr>
+          <p:cNvPr id="29" name="TextBox 29"/>
+          <p:cNvSpPr txBox="1"/>
+          <p:nvPr/>
+        </p:nvSpPr>
+        <p:spPr>
+          <a:xfrm>
+            <a:off x="185404" y="2705100"/>
+            <a:ext cx="2352643" cy="1181414"/>
+          </a:xfrm>
+          <a:prstGeom prst="rect">
+            <a:avLst/>
+          </a:prstGeom>
+        </p:spPr>
+        <p:txBody>
+          <a:bodyPr lIns="0" tIns="0" rIns="0" bIns="0" rtlCol="0" anchor="t">
+            <a:spAutoFit/>
+          </a:bodyPr>
+          <a:lstStyle/>
+          <a:p>
+            <a:pPr algn="ctr">
+              <a:lnSpc>
+                <a:spcPts val="2591"/>
+              </a:lnSpc>
+            </a:pPr>
+            <a:r>
+              <a:rPr lang="en-US" sz="2400" b="1" dirty="0">
+                <a:solidFill>
+                  <a:srgbClr val="FFFFFF"/>
+                </a:solidFill>
+                <a:latin typeface="Times New Roman Bold"/>
+                <a:ea typeface="Times New Roman Bold"/>
+                <a:cs typeface="Times New Roman Bold"/>
+                <a:sym typeface="Times New Roman Bold"/>
+              </a:rPr>
+              <a:t>LAYER 2</a:t>
+            </a:r>
+          </a:p>
+          <a:p>
+            <a:pPr algn="ctr">
+              <a:lnSpc>
+                <a:spcPts val="2221"/>
+              </a:lnSpc>
+            </a:pPr>
+            <a:r>
+              <a:rPr lang="en-US" sz="2400" b="1" dirty="0">
+                <a:solidFill>
+                  <a:srgbClr val="FFFFFF"/>
+                </a:solidFill>
+                <a:latin typeface="Times New Roman Bold"/>
+                <a:ea typeface="Times New Roman Bold"/>
+                <a:cs typeface="Times New Roman Bold"/>
+                <a:sym typeface="Times New Roman Bold"/>
+              </a:rPr>
+              <a:t>HCI Abstraction and</a:t>
+            </a:r>
+          </a:p>
+          <a:p>
+            <a:pPr algn="ctr">
+              <a:lnSpc>
+                <a:spcPts val="2221"/>
+              </a:lnSpc>
+            </a:pPr>
+            <a:r>
+              <a:rPr lang="en-US" sz="2400" b="1" dirty="0">
+                <a:solidFill>
+                  <a:srgbClr val="FFFFFF"/>
+                </a:solidFill>
+                <a:latin typeface="Times New Roman Bold"/>
+                <a:ea typeface="Times New Roman Bold"/>
+                <a:cs typeface="Times New Roman Bold"/>
+                <a:sym typeface="Times New Roman Bold"/>
+              </a:rPr>
+              <a:t>Presentation </a:t>
+            </a:r>
+          </a:p>
+        </p:txBody>
+      </p:sp>
+      <p:sp>
+        <p:nvSpPr>
+          <p:cNvPr id="30" name="TextBox 30"/>
+          <p:cNvSpPr txBox="1"/>
+          <p:nvPr/>
+        </p:nvSpPr>
+        <p:spPr>
+          <a:xfrm>
+            <a:off x="2773220" y="2520480"/>
+            <a:ext cx="9217066" cy="495300"/>
+          </a:xfrm>
+          <a:prstGeom prst="rect">
+            <a:avLst/>
+          </a:prstGeom>
+        </p:spPr>
+        <p:txBody>
+          <a:bodyPr lIns="0" tIns="0" rIns="0" bIns="0" rtlCol="0" anchor="t">
+            <a:spAutoFit/>
+          </a:bodyPr>
+          <a:lstStyle/>
+          <a:p>
+            <a:pPr algn="ctr">
+              <a:lnSpc>
+                <a:spcPts val="1920"/>
+              </a:lnSpc>
+            </a:pPr>
+            <a:r>
+              <a:rPr lang="en-US" sz="2000" b="1" dirty="0">
+                <a:solidFill>
+                  <a:srgbClr val="D86B00"/>
+                </a:solidFill>
+                <a:latin typeface="Times New Roman" panose="02020603050405020304" pitchFamily="18" charset="0"/>
+                <a:cs typeface="Times New Roman" panose="02020603050405020304" pitchFamily="18" charset="0"/>
+                <a:sym typeface="Times New Roman Bold"/>
+              </a:rPr>
+              <a:t>Applies</a:t>
+            </a:r>
+            <a:r>
+              <a:rPr lang="en-US" sz="2000" b="1" dirty="0">
+                <a:solidFill>
+                  <a:srgbClr val="C27803"/>
+                </a:solidFill>
+                <a:latin typeface="Times New Roman Bold"/>
+                <a:ea typeface="Times New Roman Bold"/>
+                <a:cs typeface="Times New Roman Bold"/>
+                <a:sym typeface="Times New Roman Bold"/>
+              </a:rPr>
+              <a:t> </a:t>
+            </a:r>
+            <a:r>
+              <a:rPr lang="en-US" sz="2000" b="1" dirty="0">
+                <a:solidFill>
+                  <a:srgbClr val="D86B00"/>
+                </a:solidFill>
+                <a:latin typeface="Times New Roman" panose="02020603050405020304" pitchFamily="18" charset="0"/>
+                <a:cs typeface="Times New Roman" panose="02020603050405020304" pitchFamily="18" charset="0"/>
+                <a:sym typeface="Times New Roman Bold"/>
+              </a:rPr>
+              <a:t>HCI principles (AAD, PTD, CID, UAC) to present information clearly, reduce cognitive load and support inclusive interaction</a:t>
+            </a:r>
+            <a:r>
+              <a:rPr lang="en-US" sz="2000" b="1" dirty="0">
+                <a:solidFill>
+                  <a:srgbClr val="C27803"/>
+                </a:solidFill>
+                <a:latin typeface="Times New Roman Bold"/>
+                <a:ea typeface="Times New Roman Bold"/>
+                <a:cs typeface="Times New Roman Bold"/>
+                <a:sym typeface="Times New Roman Bold"/>
+              </a:rPr>
+              <a:t>.</a:t>
+            </a:r>
+          </a:p>
+        </p:txBody>
+      </p:sp>
+      <p:grpSp>
+        <p:nvGrpSpPr>
+          <p:cNvPr id="31" name="Group 31"/>
+          <p:cNvGrpSpPr/>
+          <p:nvPr/>
+        </p:nvGrpSpPr>
+        <p:grpSpPr>
+          <a:xfrm>
+            <a:off x="2833995" y="3122548"/>
+            <a:ext cx="1713402" cy="988274"/>
+            <a:chOff x="0" y="0"/>
+            <a:chExt cx="2221700" cy="991889"/>
+          </a:xfrm>
+        </p:grpSpPr>
+        <p:sp>
+          <p:nvSpPr>
+            <p:cNvPr id="32" name="Freeform 32"/>
+            <p:cNvSpPr/>
+            <p:nvPr/>
+          </p:nvSpPr>
+          <p:spPr>
+            <a:xfrm>
+              <a:off x="0" y="0"/>
+              <a:ext cx="2221611" cy="991788"/>
+            </a:xfrm>
+            <a:custGeom>
+              <a:avLst/>
+              <a:gdLst/>
+              <a:ahLst/>
+              <a:cxnLst/>
+              <a:rect l="l" t="t" r="r" b="b"/>
+              <a:pathLst>
+                <a:path w="2221611" h="991788">
+                  <a:moveTo>
+                    <a:pt x="0" y="79323"/>
+                  </a:moveTo>
+                  <a:cubicBezTo>
+                    <a:pt x="0" y="35518"/>
+                    <a:pt x="53340" y="0"/>
+                    <a:pt x="119126" y="0"/>
+                  </a:cubicBezTo>
+                  <a:lnTo>
+                    <a:pt x="2102485" y="0"/>
+                  </a:lnTo>
+                  <a:cubicBezTo>
+                    <a:pt x="2168271" y="0"/>
+                    <a:pt x="2221611" y="35518"/>
+                    <a:pt x="2221611" y="79323"/>
+                  </a:cubicBezTo>
+                  <a:lnTo>
+                    <a:pt x="2221611" y="912465"/>
+                  </a:lnTo>
+                  <a:cubicBezTo>
+                    <a:pt x="2221611" y="956270"/>
+                    <a:pt x="2168271" y="991788"/>
+                    <a:pt x="2102485" y="991788"/>
+                  </a:cubicBezTo>
+                  <a:lnTo>
+                    <a:pt x="119126" y="991788"/>
+                  </a:lnTo>
+                  <a:cubicBezTo>
+                    <a:pt x="53340" y="991788"/>
+                    <a:pt x="0" y="956270"/>
+                    <a:pt x="0" y="912465"/>
+                  </a:cubicBezTo>
+                  <a:close/>
+                </a:path>
+              </a:pathLst>
+            </a:custGeom>
+            <a:solidFill>
+              <a:srgbClr val="FFFFFF"/>
+            </a:solidFill>
+            <a:ln w="19065" cap="sq">
+              <a:solidFill>
+                <a:srgbClr val="C27803"/>
+              </a:solidFill>
+              <a:prstDash val="solid"/>
+              <a:miter/>
+            </a:ln>
+          </p:spPr>
+        </p:sp>
+      </p:grpSp>
+      <p:sp>
+        <p:nvSpPr>
+          <p:cNvPr id="33" name="TextBox 33"/>
+          <p:cNvSpPr txBox="1"/>
+          <p:nvPr/>
+        </p:nvSpPr>
+        <p:spPr>
+          <a:xfrm>
+            <a:off x="2843789" y="3314700"/>
+            <a:ext cx="1693794" cy="450003"/>
+          </a:xfrm>
+          <a:prstGeom prst="rect">
+            <a:avLst/>
+          </a:prstGeom>
+        </p:spPr>
+        <p:txBody>
+          <a:bodyPr lIns="0" tIns="0" rIns="0" bIns="0" rtlCol="0" anchor="t">
+            <a:spAutoFit/>
+          </a:bodyPr>
+          <a:lstStyle/>
+          <a:p>
+            <a:pPr algn="ctr">
+              <a:lnSpc>
+                <a:spcPts val="1727"/>
+              </a:lnSpc>
+            </a:pPr>
+            <a:r>
+              <a:rPr lang="en-US" sz="1600" b="1" dirty="0">
+                <a:solidFill>
+                  <a:srgbClr val="111827"/>
+                </a:solidFill>
+                <a:latin typeface="Times New Roman Bold"/>
+                <a:ea typeface="Times New Roman Bold"/>
+                <a:cs typeface="Times New Roman Bold"/>
+                <a:sym typeface="Times New Roman Bold"/>
+              </a:rPr>
+              <a:t>Biometric Key</a:t>
+            </a:r>
+          </a:p>
+          <a:p>
+            <a:pPr algn="ctr">
+              <a:lnSpc>
+                <a:spcPts val="1727"/>
+              </a:lnSpc>
+            </a:pPr>
+            <a:r>
+              <a:rPr lang="en-US" sz="1600" b="1" dirty="0">
+                <a:solidFill>
+                  <a:srgbClr val="111827"/>
+                </a:solidFill>
+                <a:latin typeface="Times New Roman Bold"/>
+                <a:ea typeface="Times New Roman Bold"/>
+                <a:cs typeface="Times New Roman Bold"/>
+                <a:sym typeface="Times New Roman Bold"/>
+              </a:rPr>
+              <a:t>Binding Interface</a:t>
+            </a:r>
+          </a:p>
+        </p:txBody>
+      </p:sp>
+      <p:grpSp>
+        <p:nvGrpSpPr>
+          <p:cNvPr id="34" name="Group 34"/>
+          <p:cNvGrpSpPr/>
+          <p:nvPr/>
+        </p:nvGrpSpPr>
+        <p:grpSpPr>
+          <a:xfrm>
+            <a:off x="4697163" y="3119590"/>
+            <a:ext cx="1713402" cy="991231"/>
+            <a:chOff x="0" y="0"/>
+            <a:chExt cx="2221700" cy="994857"/>
+          </a:xfrm>
+        </p:grpSpPr>
+        <p:sp>
+          <p:nvSpPr>
+            <p:cNvPr id="35" name="Freeform 35"/>
+            <p:cNvSpPr/>
+            <p:nvPr/>
+          </p:nvSpPr>
+          <p:spPr>
+            <a:xfrm>
+              <a:off x="0" y="0"/>
+              <a:ext cx="2221611" cy="994755"/>
+            </a:xfrm>
+            <a:custGeom>
+              <a:avLst/>
+              <a:gdLst/>
+              <a:ahLst/>
+              <a:cxnLst/>
+              <a:rect l="l" t="t" r="r" b="b"/>
+              <a:pathLst>
+                <a:path w="2221611" h="994755">
+                  <a:moveTo>
+                    <a:pt x="0" y="79560"/>
+                  </a:moveTo>
+                  <a:cubicBezTo>
+                    <a:pt x="0" y="35624"/>
+                    <a:pt x="53340" y="0"/>
+                    <a:pt x="119126" y="0"/>
+                  </a:cubicBezTo>
+                  <a:lnTo>
+                    <a:pt x="2102485" y="0"/>
+                  </a:lnTo>
+                  <a:cubicBezTo>
+                    <a:pt x="2168271" y="0"/>
+                    <a:pt x="2221611" y="35624"/>
+                    <a:pt x="2221611" y="79560"/>
+                  </a:cubicBezTo>
+                  <a:lnTo>
+                    <a:pt x="2221611" y="915195"/>
+                  </a:lnTo>
+                  <a:cubicBezTo>
+                    <a:pt x="2221611" y="959131"/>
+                    <a:pt x="2168271" y="994755"/>
+                    <a:pt x="2102485" y="994755"/>
+                  </a:cubicBezTo>
+                  <a:lnTo>
+                    <a:pt x="119126" y="994755"/>
+                  </a:lnTo>
+                  <a:cubicBezTo>
+                    <a:pt x="53340" y="994755"/>
+                    <a:pt x="0" y="959131"/>
+                    <a:pt x="0" y="915195"/>
+                  </a:cubicBezTo>
+                  <a:close/>
+                </a:path>
+              </a:pathLst>
+            </a:custGeom>
+            <a:solidFill>
+              <a:srgbClr val="FFFFFF"/>
+            </a:solidFill>
+            <a:ln w="19065" cap="sq">
+              <a:solidFill>
+                <a:srgbClr val="C27803"/>
+              </a:solidFill>
+              <a:prstDash val="solid"/>
+              <a:miter/>
+            </a:ln>
+          </p:spPr>
+        </p:sp>
+      </p:grpSp>
+      <p:sp>
+        <p:nvSpPr>
+          <p:cNvPr id="36" name="TextBox 36"/>
+          <p:cNvSpPr txBox="1"/>
+          <p:nvPr/>
+        </p:nvSpPr>
+        <p:spPr>
+          <a:xfrm>
+            <a:off x="4706967" y="3314700"/>
+            <a:ext cx="1693794" cy="665480"/>
+          </a:xfrm>
+          <a:prstGeom prst="rect">
+            <a:avLst/>
+          </a:prstGeom>
+        </p:spPr>
+        <p:txBody>
+          <a:bodyPr lIns="0" tIns="0" rIns="0" bIns="0" rtlCol="0" anchor="t">
+            <a:spAutoFit/>
+          </a:bodyPr>
+          <a:lstStyle/>
+          <a:p>
+            <a:pPr algn="ctr">
+              <a:lnSpc>
+                <a:spcPts val="1727"/>
+              </a:lnSpc>
+            </a:pPr>
+            <a:r>
+              <a:rPr lang="en-US" sz="1600" b="1" dirty="0">
+                <a:solidFill>
+                  <a:srgbClr val="111827"/>
+                </a:solidFill>
+                <a:latin typeface="Times New Roman Bold"/>
+                <a:ea typeface="Times New Roman Bold"/>
+                <a:cs typeface="Times New Roman Bold"/>
+                <a:sym typeface="Times New Roman Bold"/>
+              </a:rPr>
+              <a:t>Time-locked</a:t>
+            </a:r>
+          </a:p>
+          <a:p>
+            <a:pPr algn="ctr">
+              <a:lnSpc>
+                <a:spcPts val="1727"/>
+              </a:lnSpc>
+            </a:pPr>
+            <a:r>
+              <a:rPr lang="en-US" sz="1600" b="1" dirty="0">
+                <a:solidFill>
+                  <a:srgbClr val="111827"/>
+                </a:solidFill>
+                <a:latin typeface="Times New Roman Bold"/>
+                <a:ea typeface="Times New Roman Bold"/>
+                <a:cs typeface="Times New Roman Bold"/>
+                <a:sym typeface="Times New Roman Bold"/>
+              </a:rPr>
+              <a:t>Confirmation</a:t>
+            </a:r>
+          </a:p>
+          <a:p>
+            <a:pPr algn="ctr">
+              <a:lnSpc>
+                <a:spcPts val="1727"/>
+              </a:lnSpc>
+            </a:pPr>
+            <a:r>
+              <a:rPr lang="en-US" sz="1600" b="1" dirty="0">
+                <a:solidFill>
+                  <a:srgbClr val="111827"/>
+                </a:solidFill>
+                <a:latin typeface="Times New Roman Bold"/>
+                <a:ea typeface="Times New Roman Bold"/>
+                <a:cs typeface="Times New Roman Bold"/>
+                <a:sym typeface="Times New Roman Bold"/>
+              </a:rPr>
+              <a:t>Dialog</a:t>
+            </a:r>
+          </a:p>
+        </p:txBody>
+      </p:sp>
+      <p:grpSp>
+        <p:nvGrpSpPr>
+          <p:cNvPr id="37" name="Group 37"/>
+          <p:cNvGrpSpPr/>
+          <p:nvPr/>
+        </p:nvGrpSpPr>
+        <p:grpSpPr>
+          <a:xfrm>
+            <a:off x="6560341" y="3122548"/>
+            <a:ext cx="1713402" cy="988274"/>
+            <a:chOff x="0" y="0"/>
+            <a:chExt cx="2221700" cy="991889"/>
+          </a:xfrm>
+        </p:grpSpPr>
+        <p:sp>
+          <p:nvSpPr>
+            <p:cNvPr id="38" name="Freeform 38"/>
+            <p:cNvSpPr/>
+            <p:nvPr/>
+          </p:nvSpPr>
+          <p:spPr>
+            <a:xfrm>
+              <a:off x="0" y="0"/>
+              <a:ext cx="2221611" cy="991788"/>
+            </a:xfrm>
+            <a:custGeom>
+              <a:avLst/>
+              <a:gdLst/>
+              <a:ahLst/>
+              <a:cxnLst/>
+              <a:rect l="l" t="t" r="r" b="b"/>
+              <a:pathLst>
+                <a:path w="2221611" h="991788">
+                  <a:moveTo>
+                    <a:pt x="0" y="79323"/>
+                  </a:moveTo>
+                  <a:cubicBezTo>
+                    <a:pt x="0" y="35518"/>
+                    <a:pt x="53340" y="0"/>
+                    <a:pt x="119126" y="0"/>
+                  </a:cubicBezTo>
+                  <a:lnTo>
+                    <a:pt x="2102485" y="0"/>
+                  </a:lnTo>
+                  <a:cubicBezTo>
+                    <a:pt x="2168271" y="0"/>
+                    <a:pt x="2221611" y="35518"/>
+                    <a:pt x="2221611" y="79323"/>
+                  </a:cubicBezTo>
+                  <a:lnTo>
+                    <a:pt x="2221611" y="912465"/>
+                  </a:lnTo>
+                  <a:cubicBezTo>
+                    <a:pt x="2221611" y="956270"/>
+                    <a:pt x="2168271" y="991788"/>
+                    <a:pt x="2102485" y="991788"/>
+                  </a:cubicBezTo>
+                  <a:lnTo>
+                    <a:pt x="119126" y="991788"/>
+                  </a:lnTo>
+                  <a:cubicBezTo>
+                    <a:pt x="53340" y="991788"/>
+                    <a:pt x="0" y="956270"/>
+                    <a:pt x="0" y="912465"/>
+                  </a:cubicBezTo>
+                  <a:close/>
+                </a:path>
+              </a:pathLst>
+            </a:custGeom>
+            <a:solidFill>
+              <a:srgbClr val="FFFFFF"/>
+            </a:solidFill>
+            <a:ln w="19065" cap="sq">
+              <a:solidFill>
+                <a:srgbClr val="C27803"/>
+              </a:solidFill>
+              <a:prstDash val="solid"/>
+              <a:miter/>
+            </a:ln>
+          </p:spPr>
+        </p:sp>
+      </p:grpSp>
+      <p:sp>
+        <p:nvSpPr>
+          <p:cNvPr id="39" name="TextBox 39"/>
+          <p:cNvSpPr txBox="1"/>
+          <p:nvPr/>
+        </p:nvSpPr>
+        <p:spPr>
+          <a:xfrm>
+            <a:off x="6570145" y="3314700"/>
+            <a:ext cx="1693794" cy="665480"/>
+          </a:xfrm>
+          <a:prstGeom prst="rect">
+            <a:avLst/>
+          </a:prstGeom>
+        </p:spPr>
+        <p:txBody>
+          <a:bodyPr lIns="0" tIns="0" rIns="0" bIns="0" rtlCol="0" anchor="t">
+            <a:spAutoFit/>
+          </a:bodyPr>
+          <a:lstStyle/>
+          <a:p>
+            <a:pPr algn="ctr">
+              <a:lnSpc>
+                <a:spcPts val="1727"/>
+              </a:lnSpc>
+            </a:pPr>
+            <a:r>
+              <a:rPr lang="en-US" sz="1600" b="1" dirty="0">
+                <a:solidFill>
+                  <a:srgbClr val="111827"/>
+                </a:solidFill>
+                <a:latin typeface="Times New Roman Bold"/>
+                <a:ea typeface="Times New Roman Bold"/>
+                <a:cs typeface="Times New Roman Bold"/>
+                <a:sym typeface="Times New Roman Bold"/>
+              </a:rPr>
+              <a:t>Plain-Language</a:t>
+            </a:r>
+          </a:p>
+          <a:p>
+            <a:pPr algn="ctr">
+              <a:lnSpc>
+                <a:spcPts val="1727"/>
+              </a:lnSpc>
+            </a:pPr>
+            <a:r>
+              <a:rPr lang="en-US" sz="1600" b="1" dirty="0">
+                <a:solidFill>
+                  <a:srgbClr val="111827"/>
+                </a:solidFill>
+                <a:latin typeface="Times New Roman Bold"/>
+                <a:ea typeface="Times New Roman Bold"/>
+                <a:cs typeface="Times New Roman Bold"/>
+                <a:sym typeface="Times New Roman Bold"/>
+              </a:rPr>
+              <a:t>Transaction</a:t>
+            </a:r>
+          </a:p>
+          <a:p>
+            <a:pPr algn="ctr">
+              <a:lnSpc>
+                <a:spcPts val="1727"/>
+              </a:lnSpc>
+            </a:pPr>
+            <a:r>
+              <a:rPr lang="en-US" sz="1600" b="1" dirty="0">
+                <a:solidFill>
+                  <a:srgbClr val="111827"/>
+                </a:solidFill>
+                <a:latin typeface="Times New Roman Bold"/>
+                <a:ea typeface="Times New Roman Bold"/>
+                <a:cs typeface="Times New Roman Bold"/>
+                <a:sym typeface="Times New Roman Bold"/>
+              </a:rPr>
+              <a:t>Feedback</a:t>
+            </a:r>
+          </a:p>
+        </p:txBody>
+      </p:sp>
+      <p:grpSp>
+        <p:nvGrpSpPr>
+          <p:cNvPr id="40" name="Group 40"/>
+          <p:cNvGrpSpPr/>
+          <p:nvPr/>
+        </p:nvGrpSpPr>
+        <p:grpSpPr>
+          <a:xfrm>
+            <a:off x="8423510" y="3122548"/>
+            <a:ext cx="1713402" cy="988274"/>
+            <a:chOff x="0" y="0"/>
+            <a:chExt cx="2221700" cy="991889"/>
+          </a:xfrm>
+        </p:grpSpPr>
+        <p:sp>
+          <p:nvSpPr>
+            <p:cNvPr id="41" name="Freeform 41"/>
+            <p:cNvSpPr/>
+            <p:nvPr/>
+          </p:nvSpPr>
+          <p:spPr>
+            <a:xfrm>
+              <a:off x="0" y="0"/>
+              <a:ext cx="2221611" cy="991788"/>
+            </a:xfrm>
+            <a:custGeom>
+              <a:avLst/>
+              <a:gdLst/>
+              <a:ahLst/>
+              <a:cxnLst/>
+              <a:rect l="l" t="t" r="r" b="b"/>
+              <a:pathLst>
+                <a:path w="2221611" h="991788">
+                  <a:moveTo>
+                    <a:pt x="0" y="79323"/>
+                  </a:moveTo>
+                  <a:cubicBezTo>
+                    <a:pt x="0" y="35518"/>
+                    <a:pt x="53340" y="0"/>
+                    <a:pt x="119126" y="0"/>
+                  </a:cubicBezTo>
+                  <a:lnTo>
+                    <a:pt x="2102485" y="0"/>
+                  </a:lnTo>
+                  <a:cubicBezTo>
+                    <a:pt x="2168271" y="0"/>
+                    <a:pt x="2221611" y="35518"/>
+                    <a:pt x="2221611" y="79323"/>
+                  </a:cubicBezTo>
+                  <a:lnTo>
+                    <a:pt x="2221611" y="912465"/>
+                  </a:lnTo>
+                  <a:cubicBezTo>
+                    <a:pt x="2221611" y="956270"/>
+                    <a:pt x="2168271" y="991788"/>
+                    <a:pt x="2102485" y="991788"/>
+                  </a:cubicBezTo>
+                  <a:lnTo>
+                    <a:pt x="119126" y="991788"/>
+                  </a:lnTo>
+                  <a:cubicBezTo>
+                    <a:pt x="53340" y="991788"/>
+                    <a:pt x="0" y="956270"/>
+                    <a:pt x="0" y="912465"/>
+                  </a:cubicBezTo>
+                  <a:close/>
+                </a:path>
+              </a:pathLst>
+            </a:custGeom>
+            <a:solidFill>
+              <a:srgbClr val="FFFFFF"/>
+            </a:solidFill>
+            <a:ln w="19065" cap="sq">
+              <a:solidFill>
+                <a:srgbClr val="C27803"/>
+              </a:solidFill>
+              <a:prstDash val="solid"/>
+              <a:miter/>
+            </a:ln>
+          </p:spPr>
+        </p:sp>
+      </p:grpSp>
+      <p:sp>
+        <p:nvSpPr>
+          <p:cNvPr id="42" name="TextBox 42"/>
+          <p:cNvSpPr txBox="1"/>
+          <p:nvPr/>
+        </p:nvSpPr>
+        <p:spPr>
+          <a:xfrm>
+            <a:off x="8433314" y="3314700"/>
+            <a:ext cx="1693794" cy="665480"/>
+          </a:xfrm>
+          <a:prstGeom prst="rect">
+            <a:avLst/>
+          </a:prstGeom>
+        </p:spPr>
+        <p:txBody>
+          <a:bodyPr lIns="0" tIns="0" rIns="0" bIns="0" rtlCol="0" anchor="t">
+            <a:spAutoFit/>
+          </a:bodyPr>
+          <a:lstStyle/>
+          <a:p>
+            <a:pPr algn="ctr">
+              <a:lnSpc>
+                <a:spcPts val="1727"/>
+              </a:lnSpc>
+            </a:pPr>
+            <a:r>
+              <a:rPr lang="en-US" sz="1600" b="1" dirty="0">
+                <a:solidFill>
+                  <a:srgbClr val="111827"/>
+                </a:solidFill>
+                <a:latin typeface="Times New Roman Bold"/>
+                <a:ea typeface="Times New Roman Bold"/>
+                <a:cs typeface="Times New Roman Bold"/>
+                <a:sym typeface="Times New Roman Bold"/>
+              </a:rPr>
+              <a:t>ARIA Live Regions</a:t>
+            </a:r>
+          </a:p>
+          <a:p>
+            <a:pPr algn="ctr">
+              <a:lnSpc>
+                <a:spcPts val="1727"/>
+              </a:lnSpc>
+            </a:pPr>
+            <a:r>
+              <a:rPr lang="en-US" sz="1600" b="1" dirty="0">
+                <a:solidFill>
+                  <a:srgbClr val="111827"/>
+                </a:solidFill>
+                <a:latin typeface="Times New Roman Bold"/>
+                <a:ea typeface="Times New Roman Bold"/>
+                <a:cs typeface="Times New Roman Bold"/>
+                <a:sym typeface="Times New Roman Bold"/>
+              </a:rPr>
+              <a:t>and Focus</a:t>
+            </a:r>
+          </a:p>
+          <a:p>
+            <a:pPr algn="ctr">
+              <a:lnSpc>
+                <a:spcPts val="1727"/>
+              </a:lnSpc>
+            </a:pPr>
+            <a:r>
+              <a:rPr lang="en-US" sz="1600" b="1" dirty="0">
+                <a:solidFill>
+                  <a:srgbClr val="111827"/>
+                </a:solidFill>
+                <a:latin typeface="Times New Roman Bold"/>
+                <a:ea typeface="Times New Roman Bold"/>
+                <a:cs typeface="Times New Roman Bold"/>
+                <a:sym typeface="Times New Roman Bold"/>
+              </a:rPr>
+              <a:t>Management</a:t>
+            </a:r>
+          </a:p>
+        </p:txBody>
+      </p:sp>
+      <p:grpSp>
+        <p:nvGrpSpPr>
+          <p:cNvPr id="43" name="Group 43"/>
+          <p:cNvGrpSpPr/>
+          <p:nvPr/>
+        </p:nvGrpSpPr>
+        <p:grpSpPr>
+          <a:xfrm>
+            <a:off x="10286688" y="3160885"/>
+            <a:ext cx="1713402" cy="892786"/>
+            <a:chOff x="0" y="0"/>
+            <a:chExt cx="2221700" cy="896052"/>
+          </a:xfrm>
+        </p:grpSpPr>
+        <p:sp>
+          <p:nvSpPr>
+            <p:cNvPr id="44" name="Freeform 44"/>
+            <p:cNvSpPr/>
+            <p:nvPr/>
+          </p:nvSpPr>
+          <p:spPr>
+            <a:xfrm>
+              <a:off x="0" y="0"/>
+              <a:ext cx="2221611" cy="895960"/>
+            </a:xfrm>
+            <a:custGeom>
+              <a:avLst/>
+              <a:gdLst/>
+              <a:ahLst/>
+              <a:cxnLst/>
+              <a:rect l="l" t="t" r="r" b="b"/>
+              <a:pathLst>
+                <a:path w="2221611" h="895960">
+                  <a:moveTo>
+                    <a:pt x="0" y="71658"/>
+                  </a:moveTo>
+                  <a:cubicBezTo>
+                    <a:pt x="0" y="32086"/>
+                    <a:pt x="53340" y="0"/>
+                    <a:pt x="119126" y="0"/>
+                  </a:cubicBezTo>
+                  <a:lnTo>
+                    <a:pt x="2102485" y="0"/>
+                  </a:lnTo>
+                  <a:cubicBezTo>
+                    <a:pt x="2168271" y="0"/>
+                    <a:pt x="2221611" y="32086"/>
+                    <a:pt x="2221611" y="71658"/>
+                  </a:cubicBezTo>
+                  <a:lnTo>
+                    <a:pt x="2221611" y="824301"/>
+                  </a:lnTo>
+                  <a:cubicBezTo>
+                    <a:pt x="2221611" y="863874"/>
+                    <a:pt x="2168271" y="895960"/>
+                    <a:pt x="2102485" y="895960"/>
+                  </a:cubicBezTo>
+                  <a:lnTo>
+                    <a:pt x="119126" y="895960"/>
+                  </a:lnTo>
+                  <a:cubicBezTo>
+                    <a:pt x="53340" y="895960"/>
+                    <a:pt x="0" y="863874"/>
+                    <a:pt x="0" y="824301"/>
+                  </a:cubicBezTo>
+                  <a:close/>
+                </a:path>
+              </a:pathLst>
+            </a:custGeom>
+            <a:solidFill>
+              <a:srgbClr val="FFFFFF"/>
+            </a:solidFill>
+            <a:ln w="19065" cap="sq">
+              <a:solidFill>
+                <a:srgbClr val="C27803"/>
+              </a:solidFill>
+              <a:prstDash val="solid"/>
+              <a:miter/>
+            </a:ln>
+          </p:spPr>
+        </p:sp>
+      </p:grpSp>
+      <p:sp>
+        <p:nvSpPr>
+          <p:cNvPr id="45" name="TextBox 45"/>
+          <p:cNvSpPr txBox="1"/>
+          <p:nvPr/>
+        </p:nvSpPr>
+        <p:spPr>
+          <a:xfrm>
+            <a:off x="10296492" y="3314700"/>
+            <a:ext cx="1621597" cy="665480"/>
+          </a:xfrm>
+          <a:prstGeom prst="rect">
+            <a:avLst/>
+          </a:prstGeom>
+        </p:spPr>
+        <p:txBody>
+          <a:bodyPr lIns="0" tIns="0" rIns="0" bIns="0" rtlCol="0" anchor="t">
+            <a:spAutoFit/>
+          </a:bodyPr>
+          <a:lstStyle/>
+          <a:p>
+            <a:pPr algn="ctr">
+              <a:lnSpc>
+                <a:spcPts val="1727"/>
+              </a:lnSpc>
+            </a:pPr>
+            <a:r>
+              <a:rPr lang="en-US" sz="1600" b="1" dirty="0">
+                <a:solidFill>
+                  <a:srgbClr val="111827"/>
+                </a:solidFill>
+                <a:latin typeface="Times New Roman Bold"/>
+                <a:ea typeface="Times New Roman Bold"/>
+                <a:cs typeface="Times New Roman Bold"/>
+                <a:sym typeface="Times New Roman Bold"/>
+              </a:rPr>
+              <a:t>Adaptive UI</a:t>
+            </a:r>
+          </a:p>
+          <a:p>
+            <a:pPr algn="ctr">
+              <a:lnSpc>
+                <a:spcPts val="1727"/>
+              </a:lnSpc>
+            </a:pPr>
+            <a:r>
+              <a:rPr lang="en-US" sz="1600" b="1" dirty="0">
+                <a:solidFill>
+                  <a:srgbClr val="111827"/>
+                </a:solidFill>
+                <a:latin typeface="Times New Roman Bold"/>
+                <a:ea typeface="Times New Roman Bold"/>
+                <a:cs typeface="Times New Roman Bold"/>
+                <a:sym typeface="Times New Roman Bold"/>
+              </a:rPr>
+              <a:t>(Context-aware</a:t>
+            </a:r>
+          </a:p>
+          <a:p>
+            <a:pPr algn="ctr">
+              <a:lnSpc>
+                <a:spcPts val="1727"/>
+              </a:lnSpc>
+            </a:pPr>
+            <a:r>
+              <a:rPr lang="en-US" sz="1600" b="1" dirty="0">
+                <a:solidFill>
+                  <a:srgbClr val="111827"/>
+                </a:solidFill>
+                <a:latin typeface="Times New Roman Bold"/>
+                <a:ea typeface="Times New Roman Bold"/>
+                <a:cs typeface="Times New Roman Bold"/>
+                <a:sym typeface="Times New Roman Bold"/>
+              </a:rPr>
+              <a:t>Presentation)</a:t>
+            </a:r>
+          </a:p>
+        </p:txBody>
+      </p:sp>
+      <p:sp>
+        <p:nvSpPr>
+          <p:cNvPr id="46" name="TextBox 46"/>
+          <p:cNvSpPr txBox="1"/>
+          <p:nvPr/>
+        </p:nvSpPr>
+        <p:spPr>
+          <a:xfrm>
+            <a:off x="12535991" y="2562219"/>
+            <a:ext cx="2211487" cy="293293"/>
+          </a:xfrm>
+          <a:prstGeom prst="rect">
+            <a:avLst/>
+          </a:prstGeom>
+        </p:spPr>
+        <p:txBody>
+          <a:bodyPr lIns="0" tIns="0" rIns="0" bIns="0" rtlCol="0" anchor="t">
+            <a:spAutoFit/>
+          </a:bodyPr>
+          <a:lstStyle/>
+          <a:p>
+            <a:pPr algn="ctr">
+              <a:lnSpc>
+                <a:spcPts val="2221"/>
+              </a:lnSpc>
+            </a:pPr>
+            <a:r>
+              <a:rPr lang="en-US" sz="2000" b="1" dirty="0">
+                <a:solidFill>
+                  <a:srgbClr val="D86B00"/>
+                </a:solidFill>
+                <a:latin typeface="Times New Roman" panose="02020603050405020304" pitchFamily="18" charset="0"/>
+                <a:cs typeface="Times New Roman" panose="02020603050405020304" pitchFamily="18" charset="0"/>
+                <a:sym typeface="Times New Roman Bold"/>
+              </a:rPr>
+              <a:t>Layer Function</a:t>
+            </a:r>
+          </a:p>
+        </p:txBody>
+      </p:sp>
+      <p:sp>
+        <p:nvSpPr>
+          <p:cNvPr id="47" name="TextBox 47"/>
+          <p:cNvSpPr txBox="1"/>
+          <p:nvPr/>
+        </p:nvSpPr>
+        <p:spPr>
+          <a:xfrm>
+            <a:off x="12344400" y="2896306"/>
+            <a:ext cx="2578805" cy="1218282"/>
+          </a:xfrm>
+          <a:prstGeom prst="rect">
+            <a:avLst/>
+          </a:prstGeom>
+        </p:spPr>
+        <p:txBody>
+          <a:bodyPr wrap="square" lIns="0" tIns="0" rIns="0" bIns="0" rtlCol="0" anchor="t">
+            <a:spAutoFit/>
+          </a:bodyPr>
+          <a:lstStyle/>
+          <a:p>
+            <a:pPr algn="l">
+              <a:lnSpc>
+                <a:spcPts val="1920"/>
+              </a:lnSpc>
+            </a:pPr>
+            <a:r>
+              <a:rPr lang="en-US" sz="2000" dirty="0">
+                <a:solidFill>
+                  <a:srgbClr val="111827"/>
+                </a:solidFill>
+                <a:latin typeface="Times New Roman"/>
+                <a:ea typeface="Times New Roman"/>
+                <a:cs typeface="Times New Roman"/>
+                <a:sym typeface="Times New Roman"/>
+              </a:rPr>
+              <a:t>Abstracts complexity and presents information in an accessible, inclusive and user-friendly manner.</a:t>
+            </a:r>
+          </a:p>
+        </p:txBody>
+      </p:sp>
+      <p:grpSp>
+        <p:nvGrpSpPr>
+          <p:cNvPr id="48" name="Group 48"/>
+          <p:cNvGrpSpPr/>
+          <p:nvPr/>
+        </p:nvGrpSpPr>
+        <p:grpSpPr>
+          <a:xfrm>
+            <a:off x="76676" y="4751185"/>
+            <a:ext cx="14850117" cy="1793775"/>
+            <a:chOff x="0" y="0"/>
+            <a:chExt cx="19255550" cy="2325916"/>
+          </a:xfrm>
+        </p:grpSpPr>
+        <p:sp>
+          <p:nvSpPr>
+            <p:cNvPr id="49" name="Freeform 49"/>
+            <p:cNvSpPr/>
+            <p:nvPr/>
+          </p:nvSpPr>
+          <p:spPr>
+            <a:xfrm>
+              <a:off x="0" y="0"/>
+              <a:ext cx="19255485" cy="2325878"/>
+            </a:xfrm>
+            <a:custGeom>
+              <a:avLst/>
+              <a:gdLst/>
+              <a:ahLst/>
+              <a:cxnLst/>
+              <a:rect l="l" t="t" r="r" b="b"/>
+              <a:pathLst>
+                <a:path w="19255485" h="2325878">
+                  <a:moveTo>
+                    <a:pt x="0" y="69723"/>
+                  </a:moveTo>
+                  <a:cubicBezTo>
+                    <a:pt x="0" y="31242"/>
+                    <a:pt x="31242" y="0"/>
+                    <a:pt x="69723" y="0"/>
+                  </a:cubicBezTo>
+                  <a:lnTo>
+                    <a:pt x="19185762" y="0"/>
+                  </a:lnTo>
+                  <a:cubicBezTo>
+                    <a:pt x="19224244" y="0"/>
+                    <a:pt x="19255485" y="31242"/>
+                    <a:pt x="19255485" y="69723"/>
+                  </a:cubicBezTo>
+                  <a:lnTo>
+                    <a:pt x="19255485" y="2256155"/>
+                  </a:lnTo>
+                  <a:cubicBezTo>
+                    <a:pt x="19255485" y="2294636"/>
+                    <a:pt x="19224244" y="2325878"/>
+                    <a:pt x="19185762" y="2325878"/>
+                  </a:cubicBezTo>
+                  <a:lnTo>
+                    <a:pt x="69723" y="2325878"/>
+                  </a:lnTo>
+                  <a:cubicBezTo>
+                    <a:pt x="31242" y="2325878"/>
+                    <a:pt x="0" y="2294636"/>
+                    <a:pt x="0" y="2256155"/>
+                  </a:cubicBezTo>
+                  <a:close/>
+                </a:path>
+              </a:pathLst>
+            </a:custGeom>
+            <a:solidFill>
+              <a:srgbClr val="FFFFFF"/>
+            </a:solidFill>
+            <a:ln w="28597" cap="sq">
+              <a:solidFill>
+                <a:srgbClr val="15803D"/>
+              </a:solidFill>
+              <a:prstDash val="solid"/>
+              <a:miter/>
+            </a:ln>
+          </p:spPr>
+        </p:sp>
+      </p:grpSp>
+      <p:grpSp>
+        <p:nvGrpSpPr>
+          <p:cNvPr id="50" name="Group 50"/>
+          <p:cNvGrpSpPr/>
+          <p:nvPr/>
+        </p:nvGrpSpPr>
+        <p:grpSpPr>
+          <a:xfrm>
+            <a:off x="91377" y="4812063"/>
+            <a:ext cx="2540696" cy="1764372"/>
+            <a:chOff x="0" y="0"/>
+            <a:chExt cx="3294418" cy="2287791"/>
+          </a:xfrm>
+        </p:grpSpPr>
+        <p:sp>
+          <p:nvSpPr>
+            <p:cNvPr id="51" name="Freeform 51"/>
+            <p:cNvSpPr/>
+            <p:nvPr/>
+          </p:nvSpPr>
+          <p:spPr>
+            <a:xfrm>
+              <a:off x="0" y="0"/>
+              <a:ext cx="3294380" cy="2287778"/>
+            </a:xfrm>
+            <a:custGeom>
+              <a:avLst/>
+              <a:gdLst/>
+              <a:ahLst/>
+              <a:cxnLst/>
+              <a:rect l="l" t="t" r="r" b="b"/>
+              <a:pathLst>
+                <a:path w="3294380" h="2287778">
+                  <a:moveTo>
+                    <a:pt x="0" y="0"/>
+                  </a:moveTo>
+                  <a:lnTo>
+                    <a:pt x="3294380" y="0"/>
+                  </a:lnTo>
+                  <a:lnTo>
+                    <a:pt x="3294380" y="2287778"/>
+                  </a:lnTo>
+                  <a:lnTo>
+                    <a:pt x="0" y="2287778"/>
+                  </a:lnTo>
+                  <a:close/>
+                </a:path>
+              </a:pathLst>
+            </a:custGeom>
+            <a:solidFill>
+              <a:srgbClr val="0B6A3A"/>
+            </a:solidFill>
+            <a:ln>
+              <a:noFill/>
+            </a:ln>
+          </p:spPr>
+          <p:style>
+            <a:lnRef idx="1">
+              <a:schemeClr val="accent1"/>
+            </a:lnRef>
+            <a:fillRef idx="3">
+              <a:schemeClr val="accent1"/>
+            </a:fillRef>
+            <a:effectRef idx="2">
+              <a:schemeClr val="accent1"/>
+            </a:effectRef>
+            <a:fontRef idx="minor">
+              <a:schemeClr val="lt1"/>
+            </a:fontRef>
+          </p:style>
+        </p:sp>
+      </p:grpSp>
+      <p:sp>
+        <p:nvSpPr>
+          <p:cNvPr id="52" name="TextBox 52"/>
+          <p:cNvSpPr txBox="1"/>
+          <p:nvPr/>
+        </p:nvSpPr>
+        <p:spPr>
+          <a:xfrm>
+            <a:off x="185404" y="5105086"/>
+            <a:ext cx="2352643" cy="1181414"/>
+          </a:xfrm>
+          <a:prstGeom prst="rect">
+            <a:avLst/>
+          </a:prstGeom>
+        </p:spPr>
+        <p:txBody>
+          <a:bodyPr lIns="0" tIns="0" rIns="0" bIns="0" rtlCol="0" anchor="t">
+            <a:spAutoFit/>
+          </a:bodyPr>
+          <a:lstStyle/>
+          <a:p>
+            <a:pPr algn="ctr">
+              <a:lnSpc>
+                <a:spcPts val="2591"/>
+              </a:lnSpc>
+            </a:pPr>
+            <a:r>
+              <a:rPr lang="en-US" sz="2400" b="1" dirty="0">
+                <a:solidFill>
+                  <a:srgbClr val="FFFFFF"/>
+                </a:solidFill>
+                <a:latin typeface="Times New Roman Bold"/>
+                <a:ea typeface="Times New Roman Bold"/>
+                <a:cs typeface="Times New Roman Bold"/>
+                <a:sym typeface="Times New Roman Bold"/>
+              </a:rPr>
+              <a:t>LAYER 3</a:t>
+            </a:r>
+          </a:p>
+          <a:p>
+            <a:pPr algn="ctr">
+              <a:lnSpc>
+                <a:spcPts val="2221"/>
+              </a:lnSpc>
+            </a:pPr>
+            <a:r>
+              <a:rPr lang="en-US" sz="2400" b="1" dirty="0">
+                <a:solidFill>
+                  <a:srgbClr val="FFFFFF"/>
+                </a:solidFill>
+                <a:latin typeface="Times New Roman Bold"/>
+                <a:ea typeface="Times New Roman Bold"/>
+                <a:cs typeface="Times New Roman Bold"/>
+                <a:sym typeface="Times New Roman Bold"/>
+              </a:rPr>
+              <a:t>Smart Contract and</a:t>
+            </a:r>
+          </a:p>
+          <a:p>
+            <a:pPr algn="ctr">
+              <a:lnSpc>
+                <a:spcPts val="2221"/>
+              </a:lnSpc>
+            </a:pPr>
+            <a:r>
+              <a:rPr lang="en-US" sz="2400" b="1" dirty="0">
+                <a:solidFill>
+                  <a:srgbClr val="FFFFFF"/>
+                </a:solidFill>
+                <a:latin typeface="Times New Roman Bold"/>
+                <a:ea typeface="Times New Roman Bold"/>
+                <a:cs typeface="Times New Roman Bold"/>
+                <a:sym typeface="Times New Roman Bold"/>
+              </a:rPr>
+              <a:t>Consent Logic </a:t>
+            </a:r>
+          </a:p>
+        </p:txBody>
+      </p:sp>
+      <p:sp>
+        <p:nvSpPr>
+          <p:cNvPr id="53" name="TextBox 53"/>
+          <p:cNvSpPr txBox="1"/>
+          <p:nvPr/>
+        </p:nvSpPr>
+        <p:spPr>
+          <a:xfrm>
+            <a:off x="2773220" y="4855960"/>
+            <a:ext cx="9217066" cy="495300"/>
+          </a:xfrm>
+          <a:prstGeom prst="rect">
+            <a:avLst/>
+          </a:prstGeom>
+        </p:spPr>
+        <p:txBody>
+          <a:bodyPr lIns="0" tIns="0" rIns="0" bIns="0" rtlCol="0" anchor="t">
+            <a:spAutoFit/>
+          </a:bodyPr>
+          <a:lstStyle/>
+          <a:p>
+            <a:pPr algn="ctr">
+              <a:lnSpc>
+                <a:spcPts val="1920"/>
+              </a:lnSpc>
+            </a:pPr>
+            <a:r>
+              <a:rPr lang="en-US" sz="2000" b="1" dirty="0">
+                <a:solidFill>
+                  <a:srgbClr val="0B6A3A"/>
+                </a:solidFill>
+                <a:latin typeface="Times New Roman" panose="02020603050405020304" pitchFamily="18" charset="0"/>
+                <a:cs typeface="Times New Roman" panose="02020603050405020304" pitchFamily="18" charset="0"/>
+                <a:sym typeface="Times New Roman Bold"/>
+              </a:rPr>
+              <a:t>Implements consent management, access control, and auditable workflows through smart contracts and off-chain logic</a:t>
+            </a:r>
+            <a:r>
+              <a:rPr lang="en-US" sz="2000" b="1" dirty="0">
+                <a:solidFill>
+                  <a:srgbClr val="15803D"/>
+                </a:solidFill>
+                <a:latin typeface="Times New Roman Bold"/>
+                <a:ea typeface="Times New Roman Bold"/>
+                <a:cs typeface="Times New Roman Bold"/>
+                <a:sym typeface="Times New Roman Bold"/>
+              </a:rPr>
+              <a:t>.</a:t>
+            </a:r>
+          </a:p>
+        </p:txBody>
+      </p:sp>
+      <p:grpSp>
+        <p:nvGrpSpPr>
+          <p:cNvPr id="54" name="Group 54"/>
+          <p:cNvGrpSpPr/>
+          <p:nvPr/>
+        </p:nvGrpSpPr>
+        <p:grpSpPr>
+          <a:xfrm>
+            <a:off x="2833995" y="5484581"/>
+            <a:ext cx="1713402" cy="974626"/>
+            <a:chOff x="0" y="0"/>
+            <a:chExt cx="2221700" cy="920740"/>
+          </a:xfrm>
+        </p:grpSpPr>
+        <p:sp>
+          <p:nvSpPr>
+            <p:cNvPr id="55" name="Freeform 55"/>
+            <p:cNvSpPr/>
+            <p:nvPr/>
+          </p:nvSpPr>
+          <p:spPr>
+            <a:xfrm>
+              <a:off x="0" y="0"/>
+              <a:ext cx="2221611" cy="920646"/>
+            </a:xfrm>
+            <a:custGeom>
+              <a:avLst/>
+              <a:gdLst/>
+              <a:ahLst/>
+              <a:cxnLst/>
+              <a:rect l="l" t="t" r="r" b="b"/>
+              <a:pathLst>
+                <a:path w="2221611" h="920646">
+                  <a:moveTo>
+                    <a:pt x="0" y="73633"/>
+                  </a:moveTo>
+                  <a:cubicBezTo>
+                    <a:pt x="0" y="32970"/>
+                    <a:pt x="53340" y="0"/>
+                    <a:pt x="119126" y="0"/>
+                  </a:cubicBezTo>
+                  <a:lnTo>
+                    <a:pt x="2102485" y="0"/>
+                  </a:lnTo>
+                  <a:cubicBezTo>
+                    <a:pt x="2168271" y="0"/>
+                    <a:pt x="2221611" y="32970"/>
+                    <a:pt x="2221611" y="73633"/>
+                  </a:cubicBezTo>
+                  <a:lnTo>
+                    <a:pt x="2221611" y="847013"/>
+                  </a:lnTo>
+                  <a:cubicBezTo>
+                    <a:pt x="2221611" y="887676"/>
+                    <a:pt x="2168271" y="920646"/>
+                    <a:pt x="2102485" y="920646"/>
+                  </a:cubicBezTo>
+                  <a:lnTo>
+                    <a:pt x="119126" y="920646"/>
+                  </a:lnTo>
+                  <a:cubicBezTo>
+                    <a:pt x="53340" y="920646"/>
+                    <a:pt x="0" y="887676"/>
+                    <a:pt x="0" y="847013"/>
+                  </a:cubicBezTo>
+                  <a:close/>
+                </a:path>
+              </a:pathLst>
+            </a:custGeom>
+            <a:solidFill>
+              <a:srgbClr val="FFFFFF"/>
+            </a:solidFill>
+            <a:ln w="19065" cap="sq">
+              <a:solidFill>
+                <a:srgbClr val="15803D"/>
+              </a:solidFill>
+              <a:prstDash val="solid"/>
+              <a:miter/>
+            </a:ln>
+          </p:spPr>
+        </p:sp>
+      </p:grpSp>
+      <p:sp>
+        <p:nvSpPr>
+          <p:cNvPr id="56" name="TextBox 56"/>
+          <p:cNvSpPr txBox="1"/>
+          <p:nvPr/>
+        </p:nvSpPr>
+        <p:spPr>
+          <a:xfrm>
+            <a:off x="2843789" y="5621020"/>
+            <a:ext cx="1693794" cy="665480"/>
+          </a:xfrm>
+          <a:prstGeom prst="rect">
+            <a:avLst/>
+          </a:prstGeom>
+        </p:spPr>
+        <p:txBody>
+          <a:bodyPr wrap="square" lIns="0" tIns="0" rIns="0" bIns="0" rtlCol="0" anchor="t">
+            <a:spAutoFit/>
+          </a:bodyPr>
+          <a:lstStyle/>
+          <a:p>
+            <a:pPr algn="ctr">
+              <a:lnSpc>
+                <a:spcPts val="1727"/>
+              </a:lnSpc>
+            </a:pPr>
+            <a:r>
+              <a:rPr lang="en-US" sz="1600" b="1" dirty="0" err="1">
+                <a:solidFill>
+                  <a:srgbClr val="111827"/>
+                </a:solidFill>
+                <a:latin typeface="Times New Roman Bold"/>
+                <a:ea typeface="Times New Roman Bold"/>
+                <a:cs typeface="Times New Roman Bold"/>
+                <a:sym typeface="Times New Roman Bold"/>
+              </a:rPr>
+              <a:t>InitiateGrant</a:t>
+            </a:r>
+            <a:endParaRPr lang="en-US" sz="1600" b="1" dirty="0">
+              <a:solidFill>
+                <a:srgbClr val="111827"/>
+              </a:solidFill>
+              <a:latin typeface="Times New Roman Bold"/>
+              <a:ea typeface="Times New Roman Bold"/>
+              <a:cs typeface="Times New Roman Bold"/>
+              <a:sym typeface="Times New Roman Bold"/>
+            </a:endParaRPr>
+          </a:p>
+          <a:p>
+            <a:pPr algn="ctr">
+              <a:lnSpc>
+                <a:spcPts val="1727"/>
+              </a:lnSpc>
+            </a:pPr>
+            <a:r>
+              <a:rPr lang="en-US" sz="1600" b="1" dirty="0">
+                <a:solidFill>
+                  <a:srgbClr val="111827"/>
+                </a:solidFill>
+                <a:latin typeface="Times New Roman Bold"/>
+                <a:ea typeface="Times New Roman Bold"/>
+                <a:cs typeface="Times New Roman Bold"/>
+                <a:sym typeface="Times New Roman Bold"/>
+              </a:rPr>
+              <a:t>(Permissioned</a:t>
+            </a:r>
+          </a:p>
+          <a:p>
+            <a:pPr algn="ctr">
+              <a:lnSpc>
+                <a:spcPts val="1727"/>
+              </a:lnSpc>
+            </a:pPr>
+            <a:r>
+              <a:rPr lang="en-US" sz="1600" b="1" dirty="0">
+                <a:solidFill>
+                  <a:srgbClr val="111827"/>
+                </a:solidFill>
+                <a:latin typeface="Times New Roman Bold"/>
+                <a:ea typeface="Times New Roman Bold"/>
+                <a:cs typeface="Times New Roman Bold"/>
+                <a:sym typeface="Times New Roman Bold"/>
+              </a:rPr>
+              <a:t>Access)</a:t>
+            </a:r>
+          </a:p>
+        </p:txBody>
+      </p:sp>
+      <p:grpSp>
+        <p:nvGrpSpPr>
+          <p:cNvPr id="57" name="Group 57"/>
+          <p:cNvGrpSpPr/>
+          <p:nvPr/>
+        </p:nvGrpSpPr>
+        <p:grpSpPr>
+          <a:xfrm>
+            <a:off x="4697163" y="5484580"/>
+            <a:ext cx="1713402" cy="974626"/>
+            <a:chOff x="0" y="0"/>
+            <a:chExt cx="2221700" cy="891222"/>
+          </a:xfrm>
+        </p:grpSpPr>
+        <p:sp>
+          <p:nvSpPr>
+            <p:cNvPr id="58" name="Freeform 58"/>
+            <p:cNvSpPr/>
+            <p:nvPr/>
+          </p:nvSpPr>
+          <p:spPr>
+            <a:xfrm>
+              <a:off x="0" y="0"/>
+              <a:ext cx="2221611" cy="891131"/>
+            </a:xfrm>
+            <a:custGeom>
+              <a:avLst/>
+              <a:gdLst/>
+              <a:ahLst/>
+              <a:cxnLst/>
+              <a:rect l="l" t="t" r="r" b="b"/>
+              <a:pathLst>
+                <a:path w="2221611" h="891131">
+                  <a:moveTo>
+                    <a:pt x="0" y="71272"/>
+                  </a:moveTo>
+                  <a:cubicBezTo>
+                    <a:pt x="0" y="31913"/>
+                    <a:pt x="53340" y="0"/>
+                    <a:pt x="119126" y="0"/>
+                  </a:cubicBezTo>
+                  <a:lnTo>
+                    <a:pt x="2102485" y="0"/>
+                  </a:lnTo>
+                  <a:cubicBezTo>
+                    <a:pt x="2168271" y="0"/>
+                    <a:pt x="2221611" y="31913"/>
+                    <a:pt x="2221611" y="71272"/>
+                  </a:cubicBezTo>
+                  <a:lnTo>
+                    <a:pt x="2221611" y="819859"/>
+                  </a:lnTo>
+                  <a:cubicBezTo>
+                    <a:pt x="2221611" y="859218"/>
+                    <a:pt x="2168271" y="891131"/>
+                    <a:pt x="2102485" y="891131"/>
+                  </a:cubicBezTo>
+                  <a:lnTo>
+                    <a:pt x="119126" y="891131"/>
+                  </a:lnTo>
+                  <a:cubicBezTo>
+                    <a:pt x="53340" y="891131"/>
+                    <a:pt x="0" y="859218"/>
+                    <a:pt x="0" y="819859"/>
+                  </a:cubicBezTo>
+                  <a:close/>
+                </a:path>
+              </a:pathLst>
+            </a:custGeom>
+            <a:solidFill>
+              <a:srgbClr val="FFFFFF"/>
+            </a:solidFill>
+            <a:ln w="19065" cap="sq">
+              <a:solidFill>
+                <a:srgbClr val="15803D"/>
+              </a:solidFill>
+              <a:prstDash val="solid"/>
+              <a:miter/>
+            </a:ln>
+          </p:spPr>
+        </p:sp>
+      </p:grpSp>
+      <p:sp>
+        <p:nvSpPr>
+          <p:cNvPr id="59" name="TextBox 59"/>
+          <p:cNvSpPr txBox="1"/>
+          <p:nvPr/>
+        </p:nvSpPr>
+        <p:spPr>
+          <a:xfrm>
+            <a:off x="4706932" y="5647690"/>
+            <a:ext cx="1693794" cy="665480"/>
+          </a:xfrm>
+          <a:prstGeom prst="rect">
+            <a:avLst/>
+          </a:prstGeom>
+        </p:spPr>
+        <p:txBody>
+          <a:bodyPr lIns="0" tIns="0" rIns="0" bIns="0" rtlCol="0" anchor="t">
+            <a:spAutoFit/>
+          </a:bodyPr>
+          <a:lstStyle/>
+          <a:p>
+            <a:pPr algn="ctr">
+              <a:lnSpc>
+                <a:spcPts val="1727"/>
+              </a:lnSpc>
+            </a:pPr>
+            <a:r>
+              <a:rPr lang="en-US" sz="1600" b="1" dirty="0">
+                <a:solidFill>
+                  <a:srgbClr val="111827"/>
+                </a:solidFill>
+                <a:latin typeface="Times New Roman Bold"/>
+                <a:ea typeface="Times New Roman Bold"/>
+                <a:cs typeface="Times New Roman Bold"/>
+                <a:sym typeface="Times New Roman Bold"/>
+              </a:rPr>
+              <a:t>Revoke Access</a:t>
+            </a:r>
+          </a:p>
+          <a:p>
+            <a:pPr algn="ctr">
+              <a:lnSpc>
+                <a:spcPts val="1727"/>
+              </a:lnSpc>
+            </a:pPr>
+            <a:r>
+              <a:rPr lang="en-US" sz="1600" b="1" dirty="0">
+                <a:solidFill>
+                  <a:srgbClr val="111827"/>
+                </a:solidFill>
+                <a:latin typeface="Times New Roman Bold"/>
+                <a:ea typeface="Times New Roman Bold"/>
+                <a:cs typeface="Times New Roman Bold"/>
+                <a:sym typeface="Times New Roman Bold"/>
+              </a:rPr>
+              <a:t>(Access</a:t>
+            </a:r>
+          </a:p>
+          <a:p>
+            <a:pPr algn="ctr">
+              <a:lnSpc>
+                <a:spcPts val="1727"/>
+              </a:lnSpc>
+            </a:pPr>
+            <a:r>
+              <a:rPr lang="en-US" sz="1600" b="1" dirty="0">
+                <a:solidFill>
+                  <a:srgbClr val="111827"/>
+                </a:solidFill>
+                <a:latin typeface="Times New Roman Bold"/>
+                <a:ea typeface="Times New Roman Bold"/>
+                <a:cs typeface="Times New Roman Bold"/>
+                <a:sym typeface="Times New Roman Bold"/>
+              </a:rPr>
+              <a:t>Revocation)</a:t>
+            </a:r>
+          </a:p>
+        </p:txBody>
+      </p:sp>
+      <p:grpSp>
+        <p:nvGrpSpPr>
+          <p:cNvPr id="60" name="Group 60"/>
+          <p:cNvGrpSpPr/>
+          <p:nvPr/>
+        </p:nvGrpSpPr>
+        <p:grpSpPr>
+          <a:xfrm>
+            <a:off x="6560341" y="5484580"/>
+            <a:ext cx="1713402" cy="974626"/>
+            <a:chOff x="0" y="0"/>
+            <a:chExt cx="2221700" cy="920740"/>
+          </a:xfrm>
+        </p:grpSpPr>
+        <p:sp>
+          <p:nvSpPr>
+            <p:cNvPr id="61" name="Freeform 61"/>
+            <p:cNvSpPr/>
+            <p:nvPr/>
+          </p:nvSpPr>
+          <p:spPr>
+            <a:xfrm>
+              <a:off x="0" y="0"/>
+              <a:ext cx="2221611" cy="920646"/>
+            </a:xfrm>
+            <a:custGeom>
+              <a:avLst/>
+              <a:gdLst/>
+              <a:ahLst/>
+              <a:cxnLst/>
+              <a:rect l="l" t="t" r="r" b="b"/>
+              <a:pathLst>
+                <a:path w="2221611" h="920646">
+                  <a:moveTo>
+                    <a:pt x="0" y="73633"/>
+                  </a:moveTo>
+                  <a:cubicBezTo>
+                    <a:pt x="0" y="32970"/>
+                    <a:pt x="53340" y="0"/>
+                    <a:pt x="119126" y="0"/>
+                  </a:cubicBezTo>
+                  <a:lnTo>
+                    <a:pt x="2102485" y="0"/>
+                  </a:lnTo>
+                  <a:cubicBezTo>
+                    <a:pt x="2168271" y="0"/>
+                    <a:pt x="2221611" y="32970"/>
+                    <a:pt x="2221611" y="73633"/>
+                  </a:cubicBezTo>
+                  <a:lnTo>
+                    <a:pt x="2221611" y="847013"/>
+                  </a:lnTo>
+                  <a:cubicBezTo>
+                    <a:pt x="2221611" y="887676"/>
+                    <a:pt x="2168271" y="920646"/>
+                    <a:pt x="2102485" y="920646"/>
+                  </a:cubicBezTo>
+                  <a:lnTo>
+                    <a:pt x="119126" y="920646"/>
+                  </a:lnTo>
+                  <a:cubicBezTo>
+                    <a:pt x="53340" y="920646"/>
+                    <a:pt x="0" y="887676"/>
+                    <a:pt x="0" y="847013"/>
+                  </a:cubicBezTo>
+                  <a:close/>
+                </a:path>
+              </a:pathLst>
+            </a:custGeom>
+            <a:solidFill>
+              <a:srgbClr val="FFFFFF"/>
+            </a:solidFill>
+            <a:ln w="19065" cap="sq">
+              <a:solidFill>
+                <a:srgbClr val="15803D"/>
+              </a:solidFill>
+              <a:prstDash val="solid"/>
+              <a:miter/>
+            </a:ln>
+          </p:spPr>
+        </p:sp>
+      </p:grpSp>
+      <p:sp>
+        <p:nvSpPr>
+          <p:cNvPr id="62" name="TextBox 62"/>
+          <p:cNvSpPr txBox="1"/>
+          <p:nvPr/>
+        </p:nvSpPr>
+        <p:spPr>
+          <a:xfrm>
+            <a:off x="6543656" y="5629325"/>
+            <a:ext cx="1693794" cy="665480"/>
+          </a:xfrm>
+          <a:prstGeom prst="rect">
+            <a:avLst/>
+          </a:prstGeom>
+        </p:spPr>
+        <p:txBody>
+          <a:bodyPr lIns="0" tIns="0" rIns="0" bIns="0" rtlCol="0" anchor="t">
+            <a:spAutoFit/>
+          </a:bodyPr>
+          <a:lstStyle/>
+          <a:p>
+            <a:pPr algn="ctr">
+              <a:lnSpc>
+                <a:spcPts val="1727"/>
+              </a:lnSpc>
+            </a:pPr>
+            <a:r>
+              <a:rPr lang="en-US" sz="1600" b="1" dirty="0" err="1">
+                <a:solidFill>
+                  <a:srgbClr val="111827"/>
+                </a:solidFill>
+                <a:latin typeface="Times New Roman Bold"/>
+                <a:cs typeface="Times New Roman Bold"/>
+              </a:rPr>
+              <a:t>ConfirmGrant</a:t>
+            </a:r>
+            <a:endParaRPr lang="en-US" sz="1600" b="1" dirty="0">
+              <a:solidFill>
+                <a:srgbClr val="111827"/>
+              </a:solidFill>
+              <a:latin typeface="Times New Roman Bold"/>
+              <a:cs typeface="Times New Roman Bold"/>
+              <a:sym typeface="Times New Roman Bold"/>
+            </a:endParaRPr>
+          </a:p>
+          <a:p>
+            <a:pPr algn="ctr">
+              <a:lnSpc>
+                <a:spcPts val="1727"/>
+              </a:lnSpc>
+            </a:pPr>
+            <a:r>
+              <a:rPr lang="en-US" sz="1600" b="1" dirty="0">
+                <a:solidFill>
+                  <a:srgbClr val="111827"/>
+                </a:solidFill>
+                <a:latin typeface="Times New Roman Bold"/>
+                <a:ea typeface="Times New Roman Bold"/>
+                <a:cs typeface="Times New Roman Bold"/>
+                <a:sym typeface="Times New Roman Bold"/>
+              </a:rPr>
+              <a:t>(Two-Stage</a:t>
+            </a:r>
+          </a:p>
+          <a:p>
+            <a:pPr algn="ctr">
+              <a:lnSpc>
+                <a:spcPts val="1727"/>
+              </a:lnSpc>
+            </a:pPr>
+            <a:r>
+              <a:rPr lang="en-US" sz="1600" b="1" dirty="0">
+                <a:solidFill>
+                  <a:srgbClr val="111827"/>
+                </a:solidFill>
+                <a:latin typeface="Times New Roman Bold"/>
+                <a:ea typeface="Times New Roman Bold"/>
+                <a:cs typeface="Times New Roman Bold"/>
+                <a:sym typeface="Times New Roman Bold"/>
+              </a:rPr>
+              <a:t>Commit)</a:t>
+            </a:r>
+          </a:p>
+        </p:txBody>
+      </p:sp>
+      <p:grpSp>
+        <p:nvGrpSpPr>
+          <p:cNvPr id="63" name="Group 63"/>
+          <p:cNvGrpSpPr/>
+          <p:nvPr/>
+        </p:nvGrpSpPr>
+        <p:grpSpPr>
+          <a:xfrm>
+            <a:off x="8423510" y="5484220"/>
+            <a:ext cx="1713402" cy="974625"/>
+            <a:chOff x="0" y="0"/>
+            <a:chExt cx="2221700" cy="915111"/>
+          </a:xfrm>
+        </p:grpSpPr>
+        <p:sp>
+          <p:nvSpPr>
+            <p:cNvPr id="64" name="Freeform 64"/>
+            <p:cNvSpPr/>
+            <p:nvPr/>
+          </p:nvSpPr>
+          <p:spPr>
+            <a:xfrm>
+              <a:off x="0" y="0"/>
+              <a:ext cx="2221611" cy="915018"/>
+            </a:xfrm>
+            <a:custGeom>
+              <a:avLst/>
+              <a:gdLst/>
+              <a:ahLst/>
+              <a:cxnLst/>
+              <a:rect l="l" t="t" r="r" b="b"/>
+              <a:pathLst>
+                <a:path w="2221611" h="915018">
+                  <a:moveTo>
+                    <a:pt x="0" y="73183"/>
+                  </a:moveTo>
+                  <a:cubicBezTo>
+                    <a:pt x="0" y="32768"/>
+                    <a:pt x="53340" y="0"/>
+                    <a:pt x="119126" y="0"/>
+                  </a:cubicBezTo>
+                  <a:lnTo>
+                    <a:pt x="2102485" y="0"/>
+                  </a:lnTo>
+                  <a:cubicBezTo>
+                    <a:pt x="2168271" y="0"/>
+                    <a:pt x="2221611" y="32768"/>
+                    <a:pt x="2221611" y="73183"/>
+                  </a:cubicBezTo>
+                  <a:lnTo>
+                    <a:pt x="2221611" y="841835"/>
+                  </a:lnTo>
+                  <a:cubicBezTo>
+                    <a:pt x="2221611" y="882249"/>
+                    <a:pt x="2168271" y="915018"/>
+                    <a:pt x="2102485" y="915018"/>
+                  </a:cubicBezTo>
+                  <a:lnTo>
+                    <a:pt x="119126" y="915018"/>
+                  </a:lnTo>
+                  <a:cubicBezTo>
+                    <a:pt x="53340" y="915018"/>
+                    <a:pt x="0" y="882249"/>
+                    <a:pt x="0" y="841835"/>
+                  </a:cubicBezTo>
+                  <a:close/>
+                </a:path>
+              </a:pathLst>
+            </a:custGeom>
+            <a:solidFill>
+              <a:srgbClr val="FFFFFF"/>
+            </a:solidFill>
+            <a:ln w="19065" cap="sq">
+              <a:solidFill>
+                <a:srgbClr val="15803D"/>
+              </a:solidFill>
+              <a:prstDash val="solid"/>
+              <a:miter/>
+            </a:ln>
+          </p:spPr>
+        </p:sp>
+      </p:grpSp>
+      <p:sp>
+        <p:nvSpPr>
+          <p:cNvPr id="65" name="TextBox 65"/>
+          <p:cNvSpPr txBox="1"/>
+          <p:nvPr/>
+        </p:nvSpPr>
+        <p:spPr>
+          <a:xfrm>
+            <a:off x="8423510" y="5620811"/>
+            <a:ext cx="1693794" cy="665480"/>
+          </a:xfrm>
+          <a:prstGeom prst="rect">
+            <a:avLst/>
+          </a:prstGeom>
+        </p:spPr>
+        <p:txBody>
+          <a:bodyPr lIns="0" tIns="0" rIns="0" bIns="0" rtlCol="0" anchor="t">
+            <a:spAutoFit/>
+          </a:bodyPr>
+          <a:lstStyle/>
+          <a:p>
+            <a:pPr algn="ctr">
+              <a:lnSpc>
+                <a:spcPts val="1727"/>
+              </a:lnSpc>
+            </a:pPr>
+            <a:r>
+              <a:rPr lang="en-US" sz="1600" b="1" dirty="0" err="1">
+                <a:solidFill>
+                  <a:srgbClr val="111827"/>
+                </a:solidFill>
+                <a:latin typeface="Times New Roman Bold"/>
+                <a:ea typeface="Times New Roman Bold"/>
+                <a:cs typeface="Times New Roman Bold"/>
+                <a:sym typeface="Times New Roman Bold"/>
+              </a:rPr>
+              <a:t>AuditLog</a:t>
+            </a:r>
+            <a:endParaRPr lang="en-US" sz="1600" b="1" dirty="0">
+              <a:solidFill>
+                <a:srgbClr val="111827"/>
+              </a:solidFill>
+              <a:latin typeface="Times New Roman Bold"/>
+              <a:ea typeface="Times New Roman Bold"/>
+              <a:cs typeface="Times New Roman Bold"/>
+              <a:sym typeface="Times New Roman Bold"/>
+            </a:endParaRPr>
+          </a:p>
+          <a:p>
+            <a:pPr algn="ctr">
+              <a:lnSpc>
+                <a:spcPts val="1727"/>
+              </a:lnSpc>
+            </a:pPr>
+            <a:r>
+              <a:rPr lang="en-US" sz="1600" b="1" dirty="0">
+                <a:solidFill>
+                  <a:srgbClr val="111827"/>
+                </a:solidFill>
+                <a:latin typeface="Times New Roman Bold"/>
+                <a:ea typeface="Times New Roman Bold"/>
+                <a:cs typeface="Times New Roman Bold"/>
+                <a:sym typeface="Times New Roman Bold"/>
+              </a:rPr>
+              <a:t>(Immutable</a:t>
+            </a:r>
+          </a:p>
+          <a:p>
+            <a:pPr algn="ctr">
+              <a:lnSpc>
+                <a:spcPts val="1727"/>
+              </a:lnSpc>
+            </a:pPr>
+            <a:r>
+              <a:rPr lang="en-US" sz="1600" b="1" dirty="0">
+                <a:solidFill>
+                  <a:srgbClr val="111827"/>
+                </a:solidFill>
+                <a:latin typeface="Times New Roman Bold"/>
+                <a:ea typeface="Times New Roman Bold"/>
+                <a:cs typeface="Times New Roman Bold"/>
+                <a:sym typeface="Times New Roman Bold"/>
+              </a:rPr>
+              <a:t>Audit Trail)</a:t>
+            </a:r>
+          </a:p>
+        </p:txBody>
+      </p:sp>
+      <p:grpSp>
+        <p:nvGrpSpPr>
+          <p:cNvPr id="66" name="Group 66"/>
+          <p:cNvGrpSpPr/>
+          <p:nvPr/>
+        </p:nvGrpSpPr>
+        <p:grpSpPr>
+          <a:xfrm>
+            <a:off x="10286688" y="5484220"/>
+            <a:ext cx="1713402" cy="974986"/>
+            <a:chOff x="0" y="0"/>
+            <a:chExt cx="2221700" cy="920740"/>
+          </a:xfrm>
+        </p:grpSpPr>
+        <p:sp>
+          <p:nvSpPr>
+            <p:cNvPr id="67" name="Freeform 67"/>
+            <p:cNvSpPr/>
+            <p:nvPr/>
+          </p:nvSpPr>
+          <p:spPr>
+            <a:xfrm>
+              <a:off x="0" y="0"/>
+              <a:ext cx="2221611" cy="920646"/>
+            </a:xfrm>
+            <a:custGeom>
+              <a:avLst/>
+              <a:gdLst/>
+              <a:ahLst/>
+              <a:cxnLst/>
+              <a:rect l="l" t="t" r="r" b="b"/>
+              <a:pathLst>
+                <a:path w="2221611" h="920646">
+                  <a:moveTo>
+                    <a:pt x="0" y="73633"/>
+                  </a:moveTo>
+                  <a:cubicBezTo>
+                    <a:pt x="0" y="32970"/>
+                    <a:pt x="53340" y="0"/>
+                    <a:pt x="119126" y="0"/>
+                  </a:cubicBezTo>
+                  <a:lnTo>
+                    <a:pt x="2102485" y="0"/>
+                  </a:lnTo>
+                  <a:cubicBezTo>
+                    <a:pt x="2168271" y="0"/>
+                    <a:pt x="2221611" y="32970"/>
+                    <a:pt x="2221611" y="73633"/>
+                  </a:cubicBezTo>
+                  <a:lnTo>
+                    <a:pt x="2221611" y="847013"/>
+                  </a:lnTo>
+                  <a:cubicBezTo>
+                    <a:pt x="2221611" y="887676"/>
+                    <a:pt x="2168271" y="920646"/>
+                    <a:pt x="2102485" y="920646"/>
+                  </a:cubicBezTo>
+                  <a:lnTo>
+                    <a:pt x="119126" y="920646"/>
+                  </a:lnTo>
+                  <a:cubicBezTo>
+                    <a:pt x="53340" y="920646"/>
+                    <a:pt x="0" y="887676"/>
+                    <a:pt x="0" y="847013"/>
+                  </a:cubicBezTo>
+                  <a:close/>
+                </a:path>
+              </a:pathLst>
+            </a:custGeom>
+            <a:solidFill>
+              <a:srgbClr val="FFFFFF"/>
+            </a:solidFill>
+            <a:ln w="19065" cap="sq">
+              <a:solidFill>
+                <a:srgbClr val="15803D"/>
+              </a:solidFill>
+              <a:prstDash val="solid"/>
+              <a:miter/>
+            </a:ln>
+          </p:spPr>
+        </p:sp>
+      </p:grpSp>
+      <p:sp>
+        <p:nvSpPr>
+          <p:cNvPr id="68" name="TextBox 68"/>
+          <p:cNvSpPr txBox="1"/>
+          <p:nvPr/>
+        </p:nvSpPr>
+        <p:spPr>
+          <a:xfrm>
+            <a:off x="10271553" y="5629325"/>
+            <a:ext cx="1693794" cy="872034"/>
+          </a:xfrm>
+          <a:prstGeom prst="rect">
+            <a:avLst/>
+          </a:prstGeom>
+        </p:spPr>
+        <p:txBody>
+          <a:bodyPr lIns="0" tIns="0" rIns="0" bIns="0" rtlCol="0" anchor="t">
+            <a:spAutoFit/>
+          </a:bodyPr>
+          <a:lstStyle/>
+          <a:p>
+            <a:pPr algn="ctr">
+              <a:lnSpc>
+                <a:spcPts val="1727"/>
+              </a:lnSpc>
+            </a:pPr>
+            <a:r>
+              <a:rPr lang="en-US" sz="1600" b="1" dirty="0" err="1">
+                <a:solidFill>
+                  <a:srgbClr val="111827"/>
+                </a:solidFill>
+                <a:latin typeface="Times New Roman Bold"/>
+                <a:cs typeface="Times New Roman Bold"/>
+              </a:rPr>
+              <a:t>CancelPending</a:t>
+            </a:r>
+            <a:r>
+              <a:rPr lang="en-US" sz="1600" b="1" dirty="0">
+                <a:solidFill>
+                  <a:srgbClr val="111827"/>
+                </a:solidFill>
+                <a:latin typeface="Times New Roman Bold"/>
+                <a:cs typeface="Times New Roman Bold"/>
+              </a:rPr>
+              <a:t> Grant (Time-Locked Cancellation)</a:t>
+            </a:r>
+            <a:endParaRPr lang="en-US" sz="1600" b="1" dirty="0">
+              <a:solidFill>
+                <a:srgbClr val="111827"/>
+              </a:solidFill>
+              <a:latin typeface="Times New Roman Bold"/>
+              <a:cs typeface="Times New Roman Bold"/>
+              <a:sym typeface="Times New Roman Bold"/>
+            </a:endParaRPr>
+          </a:p>
+        </p:txBody>
+      </p:sp>
+      <p:sp>
+        <p:nvSpPr>
+          <p:cNvPr id="69" name="TextBox 69"/>
+          <p:cNvSpPr txBox="1"/>
+          <p:nvPr/>
+        </p:nvSpPr>
+        <p:spPr>
+          <a:xfrm>
+            <a:off x="12535991" y="4910604"/>
+            <a:ext cx="2211487" cy="293293"/>
+          </a:xfrm>
+          <a:prstGeom prst="rect">
+            <a:avLst/>
+          </a:prstGeom>
+        </p:spPr>
+        <p:txBody>
+          <a:bodyPr lIns="0" tIns="0" rIns="0" bIns="0" rtlCol="0" anchor="t">
+            <a:spAutoFit/>
+          </a:bodyPr>
+          <a:lstStyle/>
+          <a:p>
+            <a:pPr algn="ctr">
+              <a:lnSpc>
+                <a:spcPts val="2221"/>
+              </a:lnSpc>
+            </a:pPr>
+            <a:r>
+              <a:rPr lang="en-US" sz="2000" b="1" dirty="0">
+                <a:solidFill>
+                  <a:srgbClr val="0B6A3A"/>
+                </a:solidFill>
+                <a:latin typeface="Times New Roman" panose="02020603050405020304" pitchFamily="18" charset="0"/>
+                <a:cs typeface="Times New Roman" panose="02020603050405020304" pitchFamily="18" charset="0"/>
+                <a:sym typeface="Times New Roman Bold"/>
+              </a:rPr>
+              <a:t>Layer Function</a:t>
+            </a:r>
+          </a:p>
+        </p:txBody>
+      </p:sp>
+      <p:sp>
+        <p:nvSpPr>
+          <p:cNvPr id="70" name="TextBox 70"/>
+          <p:cNvSpPr txBox="1"/>
+          <p:nvPr/>
+        </p:nvSpPr>
+        <p:spPr>
+          <a:xfrm>
+            <a:off x="12441964" y="5244691"/>
+            <a:ext cx="2399539" cy="1218282"/>
+          </a:xfrm>
+          <a:prstGeom prst="rect">
+            <a:avLst/>
+          </a:prstGeom>
+        </p:spPr>
+        <p:txBody>
+          <a:bodyPr wrap="square" lIns="0" tIns="0" rIns="0" bIns="0" rtlCol="0" anchor="t">
+            <a:spAutoFit/>
+          </a:bodyPr>
+          <a:lstStyle/>
+          <a:p>
+            <a:pPr algn="l">
+              <a:lnSpc>
+                <a:spcPts val="1920"/>
+              </a:lnSpc>
+            </a:pPr>
+            <a:r>
+              <a:rPr lang="en-US" sz="2000" dirty="0">
+                <a:solidFill>
+                  <a:srgbClr val="111827"/>
+                </a:solidFill>
+                <a:latin typeface="Times New Roman"/>
+                <a:ea typeface="Times New Roman"/>
+                <a:cs typeface="Times New Roman"/>
+                <a:sym typeface="Times New Roman"/>
+              </a:rPr>
+              <a:t>Enforces consent, access control and accountability with privacy-preserving mechanisms</a:t>
+            </a:r>
+            <a:r>
+              <a:rPr lang="en-US" dirty="0">
+                <a:solidFill>
+                  <a:srgbClr val="111827"/>
+                </a:solidFill>
+                <a:latin typeface="Times New Roman"/>
+                <a:ea typeface="Times New Roman"/>
+                <a:cs typeface="Times New Roman"/>
+                <a:sym typeface="Times New Roman"/>
+              </a:rPr>
+              <a:t>.</a:t>
+            </a:r>
+          </a:p>
+        </p:txBody>
+      </p:sp>
+      <p:sp>
+        <p:nvSpPr>
+          <p:cNvPr id="71" name="AutoShape 71"/>
+          <p:cNvSpPr/>
+          <p:nvPr/>
+        </p:nvSpPr>
+        <p:spPr>
+          <a:xfrm>
+            <a:off x="7086600" y="6544931"/>
+            <a:ext cx="0" cy="506971"/>
+          </a:xfrm>
+          <a:prstGeom prst="line">
+            <a:avLst/>
+          </a:prstGeom>
+          <a:ln w="38100" cap="rnd">
+            <a:solidFill>
+              <a:srgbClr val="111827"/>
+            </a:solidFill>
+            <a:prstDash val="solid"/>
+            <a:headEnd type="triangle" w="lg" len="med"/>
+            <a:tailEnd type="triangle" w="lg" len="med"/>
+          </a:ln>
+        </p:spPr>
+      </p:sp>
+      <p:grpSp>
+        <p:nvGrpSpPr>
+          <p:cNvPr id="72" name="Group 72"/>
+          <p:cNvGrpSpPr/>
+          <p:nvPr/>
+        </p:nvGrpSpPr>
+        <p:grpSpPr>
+          <a:xfrm>
+            <a:off x="76676" y="7051902"/>
+            <a:ext cx="14850117" cy="1793775"/>
+            <a:chOff x="0" y="0"/>
+            <a:chExt cx="19255550" cy="2325916"/>
+          </a:xfrm>
+        </p:grpSpPr>
+        <p:sp>
+          <p:nvSpPr>
+            <p:cNvPr id="73" name="Freeform 73"/>
+            <p:cNvSpPr/>
+            <p:nvPr/>
+          </p:nvSpPr>
+          <p:spPr>
+            <a:xfrm>
+              <a:off x="0" y="0"/>
+              <a:ext cx="19255485" cy="2325878"/>
+            </a:xfrm>
+            <a:custGeom>
+              <a:avLst/>
+              <a:gdLst/>
+              <a:ahLst/>
+              <a:cxnLst/>
+              <a:rect l="l" t="t" r="r" b="b"/>
+              <a:pathLst>
+                <a:path w="19255485" h="2325878">
+                  <a:moveTo>
+                    <a:pt x="0" y="69723"/>
+                  </a:moveTo>
+                  <a:cubicBezTo>
+                    <a:pt x="0" y="31242"/>
+                    <a:pt x="31242" y="0"/>
+                    <a:pt x="69723" y="0"/>
+                  </a:cubicBezTo>
+                  <a:lnTo>
+                    <a:pt x="19185762" y="0"/>
+                  </a:lnTo>
+                  <a:cubicBezTo>
+                    <a:pt x="19224244" y="0"/>
+                    <a:pt x="19255485" y="31242"/>
+                    <a:pt x="19255485" y="69723"/>
+                  </a:cubicBezTo>
+                  <a:lnTo>
+                    <a:pt x="19255485" y="2256155"/>
+                  </a:lnTo>
+                  <a:cubicBezTo>
+                    <a:pt x="19255485" y="2294636"/>
+                    <a:pt x="19224244" y="2325878"/>
+                    <a:pt x="19185762" y="2325878"/>
+                  </a:cubicBezTo>
+                  <a:lnTo>
+                    <a:pt x="69723" y="2325878"/>
+                  </a:lnTo>
+                  <a:cubicBezTo>
+                    <a:pt x="31242" y="2325878"/>
+                    <a:pt x="0" y="2294636"/>
+                    <a:pt x="0" y="2256155"/>
+                  </a:cubicBezTo>
+                  <a:close/>
+                </a:path>
+              </a:pathLst>
+            </a:custGeom>
+            <a:solidFill>
+              <a:srgbClr val="FFFFFF"/>
+            </a:solidFill>
+            <a:ln w="28597" cap="sq">
+              <a:solidFill>
+                <a:srgbClr val="6B21A8"/>
+              </a:solidFill>
+              <a:prstDash val="solid"/>
+              <a:miter/>
+            </a:ln>
+          </p:spPr>
+        </p:sp>
+      </p:grpSp>
+      <p:grpSp>
+        <p:nvGrpSpPr>
+          <p:cNvPr id="74" name="Group 74"/>
+          <p:cNvGrpSpPr/>
+          <p:nvPr/>
+        </p:nvGrpSpPr>
+        <p:grpSpPr>
+          <a:xfrm>
+            <a:off x="91377" y="7094597"/>
+            <a:ext cx="2540696" cy="1764372"/>
+            <a:chOff x="0" y="0"/>
+            <a:chExt cx="3294418" cy="2287791"/>
+          </a:xfrm>
+        </p:grpSpPr>
+        <p:sp>
+          <p:nvSpPr>
+            <p:cNvPr id="75" name="Freeform 75"/>
+            <p:cNvSpPr/>
+            <p:nvPr/>
+          </p:nvSpPr>
+          <p:spPr>
+            <a:xfrm>
+              <a:off x="0" y="0"/>
+              <a:ext cx="3294380" cy="2287778"/>
+            </a:xfrm>
+            <a:custGeom>
+              <a:avLst/>
+              <a:gdLst/>
+              <a:ahLst/>
+              <a:cxnLst/>
+              <a:rect l="l" t="t" r="r" b="b"/>
+              <a:pathLst>
+                <a:path w="3294380" h="2287778">
+                  <a:moveTo>
+                    <a:pt x="0" y="0"/>
+                  </a:moveTo>
+                  <a:lnTo>
+                    <a:pt x="3294380" y="0"/>
+                  </a:lnTo>
+                  <a:lnTo>
+                    <a:pt x="3294380" y="2287778"/>
+                  </a:lnTo>
+                  <a:lnTo>
+                    <a:pt x="0" y="2287778"/>
+                  </a:lnTo>
+                  <a:close/>
+                </a:path>
+              </a:pathLst>
+            </a:custGeom>
+            <a:solidFill>
+              <a:srgbClr val="5E1F8C"/>
+            </a:solidFill>
+            <a:ln>
+              <a:noFill/>
+            </a:ln>
+          </p:spPr>
+          <p:style>
+            <a:lnRef idx="1">
+              <a:schemeClr val="accent1"/>
+            </a:lnRef>
+            <a:fillRef idx="3">
+              <a:schemeClr val="accent1"/>
+            </a:fillRef>
+            <a:effectRef idx="2">
+              <a:schemeClr val="accent1"/>
+            </a:effectRef>
+            <a:fontRef idx="minor">
+              <a:schemeClr val="lt1"/>
+            </a:fontRef>
+          </p:style>
+        </p:sp>
+      </p:grpSp>
+      <p:sp>
+        <p:nvSpPr>
+          <p:cNvPr id="76" name="TextBox 76"/>
+          <p:cNvSpPr txBox="1"/>
+          <p:nvPr/>
+        </p:nvSpPr>
+        <p:spPr>
+          <a:xfrm>
+            <a:off x="185404" y="7522418"/>
+            <a:ext cx="2352643" cy="897682"/>
+          </a:xfrm>
+          <a:prstGeom prst="rect">
+            <a:avLst/>
+          </a:prstGeom>
+        </p:spPr>
+        <p:txBody>
+          <a:bodyPr lIns="0" tIns="0" rIns="0" bIns="0" rtlCol="0" anchor="t">
+            <a:spAutoFit/>
+          </a:bodyPr>
+          <a:lstStyle/>
+          <a:p>
+            <a:pPr algn="ctr">
+              <a:lnSpc>
+                <a:spcPts val="2591"/>
+              </a:lnSpc>
+            </a:pPr>
+            <a:r>
+              <a:rPr lang="en-US" sz="2400" b="1" dirty="0">
+                <a:solidFill>
+                  <a:srgbClr val="FFFFFF"/>
+                </a:solidFill>
+                <a:latin typeface="Times New Roman Bold"/>
+                <a:ea typeface="Times New Roman Bold"/>
+                <a:cs typeface="Times New Roman Bold"/>
+                <a:sym typeface="Times New Roman Bold"/>
+              </a:rPr>
+              <a:t>LAYER 4</a:t>
+            </a:r>
+          </a:p>
+          <a:p>
+            <a:pPr algn="ctr">
+              <a:lnSpc>
+                <a:spcPts val="2221"/>
+              </a:lnSpc>
+            </a:pPr>
+            <a:r>
+              <a:rPr lang="en-US" sz="2400" b="1" dirty="0">
+                <a:solidFill>
+                  <a:srgbClr val="FFFFFF"/>
+                </a:solidFill>
+                <a:latin typeface="Times New Roman Bold"/>
+                <a:ea typeface="Times New Roman Bold"/>
+                <a:cs typeface="Times New Roman Bold"/>
+                <a:sym typeface="Times New Roman Bold"/>
+              </a:rPr>
+              <a:t>Blockchain and</a:t>
+            </a:r>
+          </a:p>
+          <a:p>
+            <a:pPr algn="ctr">
+              <a:lnSpc>
+                <a:spcPts val="2221"/>
+              </a:lnSpc>
+            </a:pPr>
+            <a:r>
+              <a:rPr lang="en-US" sz="2400" b="1" dirty="0">
+                <a:solidFill>
+                  <a:srgbClr val="FFFFFF"/>
+                </a:solidFill>
+                <a:latin typeface="Times New Roman Bold"/>
+                <a:ea typeface="Times New Roman Bold"/>
+                <a:cs typeface="Times New Roman Bold"/>
+                <a:sym typeface="Times New Roman Bold"/>
+              </a:rPr>
+              <a:t>Off-chain Storage</a:t>
+            </a:r>
+          </a:p>
+        </p:txBody>
+      </p:sp>
+      <p:sp>
+        <p:nvSpPr>
+          <p:cNvPr id="77" name="TextBox 77"/>
+          <p:cNvSpPr txBox="1"/>
+          <p:nvPr/>
+        </p:nvSpPr>
+        <p:spPr>
+          <a:xfrm>
+            <a:off x="2773220" y="7118577"/>
+            <a:ext cx="9226870" cy="495300"/>
+          </a:xfrm>
+          <a:prstGeom prst="rect">
+            <a:avLst/>
+          </a:prstGeom>
+        </p:spPr>
+        <p:txBody>
+          <a:bodyPr lIns="0" tIns="0" rIns="0" bIns="0" rtlCol="0" anchor="t">
+            <a:spAutoFit/>
+          </a:bodyPr>
+          <a:lstStyle/>
+          <a:p>
+            <a:pPr algn="ctr">
+              <a:lnSpc>
+                <a:spcPts val="1920"/>
+              </a:lnSpc>
+            </a:pPr>
+            <a:r>
+              <a:rPr lang="en-US" sz="2000" b="1" dirty="0">
+                <a:solidFill>
+                  <a:srgbClr val="5E1F8C"/>
+                </a:solidFill>
+                <a:latin typeface="Times New Roman" panose="02020603050405020304" pitchFamily="18" charset="0"/>
+                <a:cs typeface="Times New Roman" panose="02020603050405020304" pitchFamily="18" charset="0"/>
+                <a:sym typeface="Times New Roman Bold"/>
+              </a:rPr>
+              <a:t>Provides immutable storage, transparency, and data integrity using blockchain and secure off-chain storage mechanisms</a:t>
+            </a:r>
+            <a:r>
+              <a:rPr lang="en-US" sz="2000" b="1" dirty="0">
+                <a:solidFill>
+                  <a:srgbClr val="6B21A8"/>
+                </a:solidFill>
+                <a:latin typeface="Times New Roman" panose="02020603050405020304" pitchFamily="18" charset="0"/>
+                <a:ea typeface="Times New Roman Bold"/>
+                <a:cs typeface="Times New Roman" panose="02020603050405020304" pitchFamily="18" charset="0"/>
+                <a:sym typeface="Times New Roman Bold"/>
+              </a:rPr>
+              <a:t>.</a:t>
+            </a:r>
+          </a:p>
+        </p:txBody>
+      </p:sp>
+      <p:grpSp>
+        <p:nvGrpSpPr>
+          <p:cNvPr id="78" name="Group 78"/>
+          <p:cNvGrpSpPr/>
+          <p:nvPr/>
+        </p:nvGrpSpPr>
+        <p:grpSpPr>
+          <a:xfrm>
+            <a:off x="2833995" y="7734925"/>
+            <a:ext cx="1713402" cy="1006805"/>
+            <a:chOff x="0" y="0"/>
+            <a:chExt cx="2221700" cy="918170"/>
+          </a:xfrm>
+        </p:grpSpPr>
+        <p:sp>
+          <p:nvSpPr>
+            <p:cNvPr id="79" name="Freeform 79"/>
+            <p:cNvSpPr/>
+            <p:nvPr/>
+          </p:nvSpPr>
+          <p:spPr>
+            <a:xfrm>
+              <a:off x="0" y="0"/>
+              <a:ext cx="2221611" cy="918076"/>
+            </a:xfrm>
+            <a:custGeom>
+              <a:avLst/>
+              <a:gdLst/>
+              <a:ahLst/>
+              <a:cxnLst/>
+              <a:rect l="l" t="t" r="r" b="b"/>
+              <a:pathLst>
+                <a:path w="2221611" h="918076">
+                  <a:moveTo>
+                    <a:pt x="0" y="73427"/>
+                  </a:moveTo>
+                  <a:cubicBezTo>
+                    <a:pt x="0" y="32878"/>
+                    <a:pt x="53340" y="0"/>
+                    <a:pt x="119126" y="0"/>
+                  </a:cubicBezTo>
+                  <a:lnTo>
+                    <a:pt x="2102485" y="0"/>
+                  </a:lnTo>
+                  <a:cubicBezTo>
+                    <a:pt x="2168271" y="0"/>
+                    <a:pt x="2221611" y="32878"/>
+                    <a:pt x="2221611" y="73427"/>
+                  </a:cubicBezTo>
+                  <a:lnTo>
+                    <a:pt x="2221611" y="844649"/>
+                  </a:lnTo>
+                  <a:cubicBezTo>
+                    <a:pt x="2221611" y="885198"/>
+                    <a:pt x="2168271" y="918076"/>
+                    <a:pt x="2102485" y="918076"/>
+                  </a:cubicBezTo>
+                  <a:lnTo>
+                    <a:pt x="119126" y="918076"/>
+                  </a:lnTo>
+                  <a:cubicBezTo>
+                    <a:pt x="53340" y="918076"/>
+                    <a:pt x="0" y="885198"/>
+                    <a:pt x="0" y="844649"/>
+                  </a:cubicBezTo>
+                  <a:close/>
+                </a:path>
+              </a:pathLst>
+            </a:custGeom>
+            <a:solidFill>
+              <a:srgbClr val="FFFFFF"/>
+            </a:solidFill>
+            <a:ln w="19065" cap="sq">
+              <a:solidFill>
+                <a:srgbClr val="6B21A8"/>
+              </a:solidFill>
+              <a:prstDash val="solid"/>
+              <a:miter/>
+            </a:ln>
+          </p:spPr>
+        </p:sp>
+      </p:grpSp>
+      <p:sp>
+        <p:nvSpPr>
+          <p:cNvPr id="80" name="TextBox 80"/>
+          <p:cNvSpPr txBox="1"/>
+          <p:nvPr/>
+        </p:nvSpPr>
+        <p:spPr>
+          <a:xfrm>
+            <a:off x="2748755" y="7886700"/>
+            <a:ext cx="1788828" cy="654025"/>
+          </a:xfrm>
+          <a:prstGeom prst="rect">
+            <a:avLst/>
+          </a:prstGeom>
+        </p:spPr>
+        <p:txBody>
+          <a:bodyPr wrap="square" lIns="0" tIns="0" rIns="0" bIns="0" rtlCol="0" anchor="t">
+            <a:spAutoFit/>
+          </a:bodyPr>
+          <a:lstStyle/>
+          <a:p>
+            <a:pPr algn="ctr">
+              <a:lnSpc>
+                <a:spcPts val="1727"/>
+              </a:lnSpc>
+            </a:pPr>
+            <a:r>
+              <a:rPr lang="en-US" sz="1600" b="1" dirty="0">
+                <a:solidFill>
+                  <a:srgbClr val="111827"/>
+                </a:solidFill>
+                <a:latin typeface="Times New Roman Bold"/>
+                <a:ea typeface="Times New Roman Bold"/>
+                <a:cs typeface="Times New Roman Bold"/>
+                <a:sym typeface="Times New Roman Bold"/>
+              </a:rPr>
+              <a:t>Consortium</a:t>
+            </a:r>
+          </a:p>
+          <a:p>
+            <a:pPr algn="ctr">
+              <a:lnSpc>
+                <a:spcPts val="1727"/>
+              </a:lnSpc>
+            </a:pPr>
+            <a:r>
+              <a:rPr lang="en-US" sz="1600" b="1" dirty="0">
+                <a:solidFill>
+                  <a:srgbClr val="111827"/>
+                </a:solidFill>
+                <a:latin typeface="Times New Roman Bold"/>
+                <a:ea typeface="Times New Roman Bold"/>
+                <a:cs typeface="Times New Roman Bold"/>
+                <a:sym typeface="Times New Roman Bold"/>
+              </a:rPr>
+              <a:t>Blockchain</a:t>
+            </a:r>
+          </a:p>
+          <a:p>
+            <a:pPr algn="ctr">
+              <a:lnSpc>
+                <a:spcPts val="1727"/>
+              </a:lnSpc>
+            </a:pPr>
+            <a:endParaRPr lang="en-US" sz="1600" b="1" dirty="0">
+              <a:solidFill>
+                <a:srgbClr val="111827"/>
+              </a:solidFill>
+              <a:latin typeface="Times New Roman Bold"/>
+              <a:ea typeface="Times New Roman Bold"/>
+              <a:cs typeface="Times New Roman Bold"/>
+              <a:sym typeface="Times New Roman Bold"/>
+            </a:endParaRPr>
+          </a:p>
+        </p:txBody>
+      </p:sp>
+      <p:grpSp>
+        <p:nvGrpSpPr>
+          <p:cNvPr id="81" name="Group 81"/>
+          <p:cNvGrpSpPr/>
+          <p:nvPr/>
+        </p:nvGrpSpPr>
+        <p:grpSpPr>
+          <a:xfrm>
+            <a:off x="4697163" y="7764474"/>
+            <a:ext cx="1713402" cy="977256"/>
+            <a:chOff x="0" y="0"/>
+            <a:chExt cx="2221700" cy="891222"/>
+          </a:xfrm>
+        </p:grpSpPr>
+        <p:sp>
+          <p:nvSpPr>
+            <p:cNvPr id="82" name="Freeform 82"/>
+            <p:cNvSpPr/>
+            <p:nvPr/>
+          </p:nvSpPr>
+          <p:spPr>
+            <a:xfrm>
+              <a:off x="0" y="0"/>
+              <a:ext cx="2221611" cy="891131"/>
+            </a:xfrm>
+            <a:custGeom>
+              <a:avLst/>
+              <a:gdLst/>
+              <a:ahLst/>
+              <a:cxnLst/>
+              <a:rect l="l" t="t" r="r" b="b"/>
+              <a:pathLst>
+                <a:path w="2221611" h="891131">
+                  <a:moveTo>
+                    <a:pt x="0" y="71272"/>
+                  </a:moveTo>
+                  <a:cubicBezTo>
+                    <a:pt x="0" y="31913"/>
+                    <a:pt x="53340" y="0"/>
+                    <a:pt x="119126" y="0"/>
+                  </a:cubicBezTo>
+                  <a:lnTo>
+                    <a:pt x="2102485" y="0"/>
+                  </a:lnTo>
+                  <a:cubicBezTo>
+                    <a:pt x="2168271" y="0"/>
+                    <a:pt x="2221611" y="31913"/>
+                    <a:pt x="2221611" y="71272"/>
+                  </a:cubicBezTo>
+                  <a:lnTo>
+                    <a:pt x="2221611" y="819859"/>
+                  </a:lnTo>
+                  <a:cubicBezTo>
+                    <a:pt x="2221611" y="859218"/>
+                    <a:pt x="2168271" y="891131"/>
+                    <a:pt x="2102485" y="891131"/>
+                  </a:cubicBezTo>
+                  <a:lnTo>
+                    <a:pt x="119126" y="891131"/>
+                  </a:lnTo>
+                  <a:cubicBezTo>
+                    <a:pt x="53340" y="891131"/>
+                    <a:pt x="0" y="859218"/>
+                    <a:pt x="0" y="819859"/>
+                  </a:cubicBezTo>
+                  <a:close/>
+                </a:path>
+              </a:pathLst>
+            </a:custGeom>
+            <a:solidFill>
+              <a:srgbClr val="FFFFFF"/>
+            </a:solidFill>
+            <a:ln w="19065" cap="sq">
+              <a:solidFill>
+                <a:srgbClr val="6B21A8"/>
+              </a:solidFill>
+              <a:prstDash val="solid"/>
+              <a:miter/>
+            </a:ln>
+          </p:spPr>
+        </p:sp>
+      </p:grpSp>
+      <p:sp>
+        <p:nvSpPr>
+          <p:cNvPr id="83" name="TextBox 83"/>
+          <p:cNvSpPr txBox="1"/>
+          <p:nvPr/>
+        </p:nvSpPr>
+        <p:spPr>
+          <a:xfrm>
+            <a:off x="4706967" y="7907020"/>
+            <a:ext cx="1693794" cy="665480"/>
+          </a:xfrm>
+          <a:prstGeom prst="rect">
+            <a:avLst/>
+          </a:prstGeom>
+        </p:spPr>
+        <p:txBody>
+          <a:bodyPr lIns="0" tIns="0" rIns="0" bIns="0" rtlCol="0" anchor="t">
+            <a:spAutoFit/>
+          </a:bodyPr>
+          <a:lstStyle/>
+          <a:p>
+            <a:pPr algn="ctr">
+              <a:lnSpc>
+                <a:spcPts val="1727"/>
+              </a:lnSpc>
+            </a:pPr>
+            <a:r>
+              <a:rPr lang="en-US" sz="1600" b="1" dirty="0">
+                <a:solidFill>
+                  <a:srgbClr val="111827"/>
+                </a:solidFill>
+                <a:latin typeface="Times New Roman Bold"/>
+                <a:ea typeface="Times New Roman Bold"/>
+                <a:cs typeface="Times New Roman Bold"/>
+                <a:sym typeface="Times New Roman Bold"/>
+              </a:rPr>
+              <a:t>On-chain</a:t>
+            </a:r>
+          </a:p>
+          <a:p>
+            <a:pPr algn="ctr">
+              <a:lnSpc>
+                <a:spcPts val="1727"/>
+              </a:lnSpc>
+            </a:pPr>
+            <a:r>
+              <a:rPr lang="en-US" sz="1600" b="1" dirty="0">
+                <a:solidFill>
+                  <a:srgbClr val="111827"/>
+                </a:solidFill>
+                <a:latin typeface="Times New Roman Bold"/>
+                <a:ea typeface="Times New Roman Bold"/>
+                <a:cs typeface="Times New Roman Bold"/>
+                <a:sym typeface="Times New Roman Bold"/>
+              </a:rPr>
+              <a:t>Hash</a:t>
+            </a:r>
+          </a:p>
+          <a:p>
+            <a:pPr algn="ctr">
+              <a:lnSpc>
+                <a:spcPts val="1727"/>
+              </a:lnSpc>
+            </a:pPr>
+            <a:r>
+              <a:rPr lang="en-US" sz="1600" b="1" dirty="0">
+                <a:solidFill>
+                  <a:srgbClr val="111827"/>
+                </a:solidFill>
+                <a:latin typeface="Times New Roman Bold"/>
+                <a:ea typeface="Times New Roman Bold"/>
+                <a:cs typeface="Times New Roman Bold"/>
+                <a:sym typeface="Times New Roman Bold"/>
+              </a:rPr>
+              <a:t>Verification</a:t>
+            </a:r>
+          </a:p>
+        </p:txBody>
+      </p:sp>
+      <p:grpSp>
+        <p:nvGrpSpPr>
+          <p:cNvPr id="84" name="Group 84"/>
+          <p:cNvGrpSpPr/>
+          <p:nvPr/>
+        </p:nvGrpSpPr>
+        <p:grpSpPr>
+          <a:xfrm>
+            <a:off x="6560341" y="7764474"/>
+            <a:ext cx="1713402" cy="977256"/>
+            <a:chOff x="0" y="0"/>
+            <a:chExt cx="2221700" cy="891222"/>
+          </a:xfrm>
+        </p:grpSpPr>
+        <p:sp>
+          <p:nvSpPr>
+            <p:cNvPr id="85" name="Freeform 85"/>
+            <p:cNvSpPr/>
+            <p:nvPr/>
+          </p:nvSpPr>
+          <p:spPr>
+            <a:xfrm>
+              <a:off x="0" y="0"/>
+              <a:ext cx="2221611" cy="891131"/>
+            </a:xfrm>
+            <a:custGeom>
+              <a:avLst/>
+              <a:gdLst/>
+              <a:ahLst/>
+              <a:cxnLst/>
+              <a:rect l="l" t="t" r="r" b="b"/>
+              <a:pathLst>
+                <a:path w="2221611" h="891131">
+                  <a:moveTo>
+                    <a:pt x="0" y="71272"/>
+                  </a:moveTo>
+                  <a:cubicBezTo>
+                    <a:pt x="0" y="31913"/>
+                    <a:pt x="53340" y="0"/>
+                    <a:pt x="119126" y="0"/>
+                  </a:cubicBezTo>
+                  <a:lnTo>
+                    <a:pt x="2102485" y="0"/>
+                  </a:lnTo>
+                  <a:cubicBezTo>
+                    <a:pt x="2168271" y="0"/>
+                    <a:pt x="2221611" y="31913"/>
+                    <a:pt x="2221611" y="71272"/>
+                  </a:cubicBezTo>
+                  <a:lnTo>
+                    <a:pt x="2221611" y="819859"/>
+                  </a:lnTo>
+                  <a:cubicBezTo>
+                    <a:pt x="2221611" y="859218"/>
+                    <a:pt x="2168271" y="891131"/>
+                    <a:pt x="2102485" y="891131"/>
+                  </a:cubicBezTo>
+                  <a:lnTo>
+                    <a:pt x="119126" y="891131"/>
+                  </a:lnTo>
+                  <a:cubicBezTo>
+                    <a:pt x="53340" y="891131"/>
+                    <a:pt x="0" y="859218"/>
+                    <a:pt x="0" y="819859"/>
+                  </a:cubicBezTo>
+                  <a:close/>
+                </a:path>
+              </a:pathLst>
+            </a:custGeom>
+            <a:solidFill>
+              <a:srgbClr val="FFFFFF"/>
+            </a:solidFill>
+            <a:ln w="19065" cap="sq">
+              <a:solidFill>
+                <a:srgbClr val="6B21A8"/>
+              </a:solidFill>
+              <a:prstDash val="solid"/>
+              <a:miter/>
+            </a:ln>
+          </p:spPr>
+        </p:sp>
+      </p:grpSp>
+      <p:sp>
+        <p:nvSpPr>
+          <p:cNvPr id="86" name="TextBox 86"/>
+          <p:cNvSpPr txBox="1"/>
+          <p:nvPr/>
+        </p:nvSpPr>
+        <p:spPr>
+          <a:xfrm>
+            <a:off x="6570145" y="7962900"/>
+            <a:ext cx="1693794" cy="665480"/>
+          </a:xfrm>
+          <a:prstGeom prst="rect">
+            <a:avLst/>
+          </a:prstGeom>
+        </p:spPr>
+        <p:txBody>
+          <a:bodyPr lIns="0" tIns="0" rIns="0" bIns="0" rtlCol="0" anchor="t">
+            <a:spAutoFit/>
+          </a:bodyPr>
+          <a:lstStyle/>
+          <a:p>
+            <a:pPr algn="ctr">
+              <a:lnSpc>
+                <a:spcPts val="1727"/>
+              </a:lnSpc>
+            </a:pPr>
+            <a:r>
+              <a:rPr lang="en-US" sz="1600" b="1" dirty="0">
+                <a:solidFill>
+                  <a:srgbClr val="111827"/>
+                </a:solidFill>
+                <a:latin typeface="Times New Roman Bold"/>
+                <a:ea typeface="Times New Roman Bold"/>
+                <a:cs typeface="Times New Roman Bold"/>
+                <a:sym typeface="Times New Roman Bold"/>
+              </a:rPr>
+              <a:t>IPFS  Off-chain</a:t>
+            </a:r>
+          </a:p>
+          <a:p>
+            <a:pPr algn="ctr">
+              <a:lnSpc>
+                <a:spcPts val="1727"/>
+              </a:lnSpc>
+            </a:pPr>
+            <a:r>
+              <a:rPr lang="en-US" sz="1600" b="1" dirty="0">
+                <a:solidFill>
+                  <a:srgbClr val="111827"/>
+                </a:solidFill>
+                <a:latin typeface="Times New Roman Bold"/>
+                <a:ea typeface="Times New Roman Bold"/>
+                <a:cs typeface="Times New Roman Bold"/>
+                <a:sym typeface="Times New Roman Bold"/>
+              </a:rPr>
+              <a:t>Encrypted</a:t>
+            </a:r>
+          </a:p>
+          <a:p>
+            <a:pPr algn="ctr">
+              <a:lnSpc>
+                <a:spcPts val="1727"/>
+              </a:lnSpc>
+            </a:pPr>
+            <a:r>
+              <a:rPr lang="en-US" sz="1600" b="1" dirty="0">
+                <a:solidFill>
+                  <a:srgbClr val="111827"/>
+                </a:solidFill>
+                <a:latin typeface="Times New Roman Bold"/>
+                <a:ea typeface="Times New Roman Bold"/>
+                <a:cs typeface="Times New Roman Bold"/>
+                <a:sym typeface="Times New Roman Bold"/>
+              </a:rPr>
+              <a:t>Storage</a:t>
+            </a:r>
+          </a:p>
+        </p:txBody>
+      </p:sp>
+      <p:grpSp>
+        <p:nvGrpSpPr>
+          <p:cNvPr id="87" name="Group 87"/>
+          <p:cNvGrpSpPr/>
+          <p:nvPr/>
+        </p:nvGrpSpPr>
+        <p:grpSpPr>
+          <a:xfrm>
+            <a:off x="8423510" y="7764474"/>
+            <a:ext cx="1713402" cy="977256"/>
+            <a:chOff x="0" y="0"/>
+            <a:chExt cx="2221700" cy="891222"/>
+          </a:xfrm>
+        </p:grpSpPr>
+        <p:sp>
+          <p:nvSpPr>
+            <p:cNvPr id="88" name="Freeform 88"/>
+            <p:cNvSpPr/>
+            <p:nvPr/>
+          </p:nvSpPr>
+          <p:spPr>
+            <a:xfrm>
+              <a:off x="0" y="0"/>
+              <a:ext cx="2221611" cy="891131"/>
+            </a:xfrm>
+            <a:custGeom>
+              <a:avLst/>
+              <a:gdLst/>
+              <a:ahLst/>
+              <a:cxnLst/>
+              <a:rect l="l" t="t" r="r" b="b"/>
+              <a:pathLst>
+                <a:path w="2221611" h="891131">
+                  <a:moveTo>
+                    <a:pt x="0" y="71272"/>
+                  </a:moveTo>
+                  <a:cubicBezTo>
+                    <a:pt x="0" y="31913"/>
+                    <a:pt x="53340" y="0"/>
+                    <a:pt x="119126" y="0"/>
+                  </a:cubicBezTo>
+                  <a:lnTo>
+                    <a:pt x="2102485" y="0"/>
+                  </a:lnTo>
+                  <a:cubicBezTo>
+                    <a:pt x="2168271" y="0"/>
+                    <a:pt x="2221611" y="31913"/>
+                    <a:pt x="2221611" y="71272"/>
+                  </a:cubicBezTo>
+                  <a:lnTo>
+                    <a:pt x="2221611" y="819859"/>
+                  </a:lnTo>
+                  <a:cubicBezTo>
+                    <a:pt x="2221611" y="859218"/>
+                    <a:pt x="2168271" y="891131"/>
+                    <a:pt x="2102485" y="891131"/>
+                  </a:cubicBezTo>
+                  <a:lnTo>
+                    <a:pt x="119126" y="891131"/>
+                  </a:lnTo>
+                  <a:cubicBezTo>
+                    <a:pt x="53340" y="891131"/>
+                    <a:pt x="0" y="859218"/>
+                    <a:pt x="0" y="819859"/>
+                  </a:cubicBezTo>
+                  <a:close/>
+                </a:path>
+              </a:pathLst>
+            </a:custGeom>
+            <a:solidFill>
+              <a:srgbClr val="FFFFFF"/>
+            </a:solidFill>
+            <a:ln w="19065" cap="sq">
+              <a:solidFill>
+                <a:srgbClr val="6B21A8"/>
+              </a:solidFill>
+              <a:prstDash val="solid"/>
+              <a:miter/>
+            </a:ln>
+          </p:spPr>
+        </p:sp>
+      </p:grpSp>
+      <p:sp>
+        <p:nvSpPr>
+          <p:cNvPr id="89" name="TextBox 89"/>
+          <p:cNvSpPr txBox="1"/>
+          <p:nvPr/>
+        </p:nvSpPr>
+        <p:spPr>
+          <a:xfrm>
+            <a:off x="8433314" y="7962900"/>
+            <a:ext cx="1693794" cy="665480"/>
+          </a:xfrm>
+          <a:prstGeom prst="rect">
+            <a:avLst/>
+          </a:prstGeom>
+        </p:spPr>
+        <p:txBody>
+          <a:bodyPr lIns="0" tIns="0" rIns="0" bIns="0" rtlCol="0" anchor="t">
+            <a:spAutoFit/>
+          </a:bodyPr>
+          <a:lstStyle/>
+          <a:p>
+            <a:pPr algn="ctr">
+              <a:lnSpc>
+                <a:spcPts val="1727"/>
+              </a:lnSpc>
+            </a:pPr>
+            <a:r>
+              <a:rPr lang="en-US" sz="1600" b="1" dirty="0">
+                <a:solidFill>
+                  <a:srgbClr val="111827"/>
+                </a:solidFill>
+                <a:latin typeface="Times New Roman Bold"/>
+                <a:ea typeface="Times New Roman Bold"/>
+                <a:cs typeface="Times New Roman Bold"/>
+                <a:sym typeface="Times New Roman Bold"/>
+              </a:rPr>
+              <a:t>On-Chain</a:t>
+            </a:r>
+          </a:p>
+          <a:p>
+            <a:pPr algn="ctr">
+              <a:lnSpc>
+                <a:spcPts val="1727"/>
+              </a:lnSpc>
+            </a:pPr>
+            <a:r>
+              <a:rPr lang="en-US" sz="1600" b="1" dirty="0">
+                <a:solidFill>
+                  <a:srgbClr val="111827"/>
+                </a:solidFill>
+                <a:latin typeface="Times New Roman Bold"/>
+                <a:ea typeface="Times New Roman Bold"/>
+                <a:cs typeface="Times New Roman Bold"/>
+                <a:sym typeface="Times New Roman Bold"/>
+              </a:rPr>
+              <a:t>Audit Log</a:t>
+            </a:r>
+          </a:p>
+          <a:p>
+            <a:pPr algn="ctr">
+              <a:lnSpc>
+                <a:spcPts val="1727"/>
+              </a:lnSpc>
+            </a:pPr>
+            <a:r>
+              <a:rPr lang="en-US" sz="1600" b="1" dirty="0">
+                <a:solidFill>
+                  <a:srgbClr val="111827"/>
+                </a:solidFill>
+                <a:latin typeface="Times New Roman Bold"/>
+                <a:ea typeface="Times New Roman Bold"/>
+                <a:cs typeface="Times New Roman Bold"/>
+                <a:sym typeface="Times New Roman Bold"/>
+              </a:rPr>
+              <a:t>Storage</a:t>
+            </a:r>
+          </a:p>
+        </p:txBody>
+      </p:sp>
+      <p:grpSp>
+        <p:nvGrpSpPr>
+          <p:cNvPr id="90" name="Group 90"/>
+          <p:cNvGrpSpPr/>
+          <p:nvPr/>
+        </p:nvGrpSpPr>
+        <p:grpSpPr>
+          <a:xfrm>
+            <a:off x="10286688" y="7734925"/>
+            <a:ext cx="1713402" cy="1006806"/>
+            <a:chOff x="0" y="0"/>
+            <a:chExt cx="2221700" cy="856417"/>
+          </a:xfrm>
+        </p:grpSpPr>
+        <p:sp>
+          <p:nvSpPr>
+            <p:cNvPr id="91" name="Freeform 91"/>
+            <p:cNvSpPr/>
+            <p:nvPr/>
+          </p:nvSpPr>
+          <p:spPr>
+            <a:xfrm>
+              <a:off x="0" y="0"/>
+              <a:ext cx="2221611" cy="856329"/>
+            </a:xfrm>
+            <a:custGeom>
+              <a:avLst/>
+              <a:gdLst/>
+              <a:ahLst/>
+              <a:cxnLst/>
+              <a:rect l="l" t="t" r="r" b="b"/>
+              <a:pathLst>
+                <a:path w="2221611" h="856329">
+                  <a:moveTo>
+                    <a:pt x="0" y="68489"/>
+                  </a:moveTo>
+                  <a:cubicBezTo>
+                    <a:pt x="0" y="30667"/>
+                    <a:pt x="53340" y="0"/>
+                    <a:pt x="119126" y="0"/>
+                  </a:cubicBezTo>
+                  <a:lnTo>
+                    <a:pt x="2102485" y="0"/>
+                  </a:lnTo>
+                  <a:cubicBezTo>
+                    <a:pt x="2168271" y="0"/>
+                    <a:pt x="2221611" y="30667"/>
+                    <a:pt x="2221611" y="68489"/>
+                  </a:cubicBezTo>
+                  <a:lnTo>
+                    <a:pt x="2221611" y="787840"/>
+                  </a:lnTo>
+                  <a:cubicBezTo>
+                    <a:pt x="2221611" y="825663"/>
+                    <a:pt x="2168271" y="856329"/>
+                    <a:pt x="2102485" y="856329"/>
+                  </a:cubicBezTo>
+                  <a:lnTo>
+                    <a:pt x="119126" y="856329"/>
+                  </a:lnTo>
+                  <a:cubicBezTo>
+                    <a:pt x="53340" y="856329"/>
+                    <a:pt x="0" y="825663"/>
+                    <a:pt x="0" y="787840"/>
+                  </a:cubicBezTo>
+                  <a:close/>
+                </a:path>
+              </a:pathLst>
+            </a:custGeom>
+            <a:solidFill>
+              <a:srgbClr val="FFFFFF"/>
+            </a:solidFill>
+            <a:ln w="19065" cap="sq">
+              <a:solidFill>
+                <a:srgbClr val="6B21A8"/>
+              </a:solidFill>
+              <a:prstDash val="solid"/>
+              <a:miter/>
+            </a:ln>
+          </p:spPr>
+        </p:sp>
+      </p:grpSp>
+      <p:sp>
+        <p:nvSpPr>
+          <p:cNvPr id="92" name="TextBox 92"/>
+          <p:cNvSpPr txBox="1"/>
+          <p:nvPr/>
+        </p:nvSpPr>
+        <p:spPr>
+          <a:xfrm>
+            <a:off x="10296492" y="7962900"/>
+            <a:ext cx="1693794" cy="665480"/>
+          </a:xfrm>
+          <a:prstGeom prst="rect">
+            <a:avLst/>
+          </a:prstGeom>
+        </p:spPr>
+        <p:txBody>
+          <a:bodyPr lIns="0" tIns="0" rIns="0" bIns="0" rtlCol="0" anchor="t">
+            <a:spAutoFit/>
+          </a:bodyPr>
+          <a:lstStyle/>
+          <a:p>
+            <a:pPr algn="ctr">
+              <a:lnSpc>
+                <a:spcPts val="1727"/>
+              </a:lnSpc>
+            </a:pPr>
+            <a:r>
+              <a:rPr lang="en-US" sz="1600" b="1" dirty="0">
+                <a:solidFill>
+                  <a:srgbClr val="111827"/>
+                </a:solidFill>
+                <a:latin typeface="Times New Roman Bold"/>
+                <a:ea typeface="Times New Roman Bold"/>
+                <a:cs typeface="Times New Roman Bold"/>
+                <a:sym typeface="Times New Roman Bold"/>
+              </a:rPr>
+              <a:t>Immutable</a:t>
+            </a:r>
+          </a:p>
+          <a:p>
+            <a:pPr algn="ctr">
+              <a:lnSpc>
+                <a:spcPts val="1727"/>
+              </a:lnSpc>
+            </a:pPr>
+            <a:r>
+              <a:rPr lang="en-US" sz="1600" b="1" dirty="0">
+                <a:solidFill>
+                  <a:srgbClr val="111827"/>
+                </a:solidFill>
+                <a:latin typeface="Times New Roman Bold"/>
+                <a:ea typeface="Times New Roman Bold"/>
+                <a:cs typeface="Times New Roman Bold"/>
+                <a:sym typeface="Times New Roman Bold"/>
+              </a:rPr>
+              <a:t>On-chain</a:t>
+            </a:r>
+          </a:p>
+          <a:p>
+            <a:pPr algn="ctr">
+              <a:lnSpc>
+                <a:spcPts val="1727"/>
+              </a:lnSpc>
+            </a:pPr>
+            <a:r>
+              <a:rPr lang="en-US" sz="1600" b="1" dirty="0">
+                <a:solidFill>
+                  <a:srgbClr val="111827"/>
+                </a:solidFill>
+                <a:latin typeface="Times New Roman Bold"/>
+                <a:ea typeface="Times New Roman Bold"/>
+                <a:cs typeface="Times New Roman Bold"/>
+                <a:sym typeface="Times New Roman Bold"/>
+              </a:rPr>
+              <a:t>Records</a:t>
+            </a:r>
+          </a:p>
+        </p:txBody>
+      </p:sp>
+      <p:sp>
+        <p:nvSpPr>
+          <p:cNvPr id="93" name="TextBox 93"/>
+          <p:cNvSpPr txBox="1"/>
+          <p:nvPr/>
+        </p:nvSpPr>
+        <p:spPr>
+          <a:xfrm>
+            <a:off x="12535991" y="7193128"/>
+            <a:ext cx="2211487" cy="293293"/>
+          </a:xfrm>
+          <a:prstGeom prst="rect">
+            <a:avLst/>
+          </a:prstGeom>
+        </p:spPr>
+        <p:txBody>
+          <a:bodyPr lIns="0" tIns="0" rIns="0" bIns="0" rtlCol="0" anchor="t">
+            <a:spAutoFit/>
+          </a:bodyPr>
+          <a:lstStyle/>
+          <a:p>
+            <a:pPr algn="ctr">
+              <a:lnSpc>
+                <a:spcPts val="2221"/>
+              </a:lnSpc>
+            </a:pPr>
+            <a:r>
+              <a:rPr lang="en-US" sz="2000" b="1" dirty="0">
+                <a:solidFill>
+                  <a:srgbClr val="5E1F8C"/>
+                </a:solidFill>
+                <a:latin typeface="Times New Roman" panose="02020603050405020304" pitchFamily="18" charset="0"/>
+                <a:cs typeface="Times New Roman" panose="02020603050405020304" pitchFamily="18" charset="0"/>
+                <a:sym typeface="Times New Roman Bold"/>
+              </a:rPr>
+              <a:t>Layer Function</a:t>
+            </a:r>
+          </a:p>
+        </p:txBody>
+      </p:sp>
+      <p:sp>
+        <p:nvSpPr>
+          <p:cNvPr id="94" name="TextBox 94"/>
+          <p:cNvSpPr txBox="1"/>
+          <p:nvPr/>
+        </p:nvSpPr>
+        <p:spPr>
+          <a:xfrm>
+            <a:off x="12303716" y="7527225"/>
+            <a:ext cx="2537787" cy="1218282"/>
+          </a:xfrm>
+          <a:prstGeom prst="rect">
+            <a:avLst/>
+          </a:prstGeom>
+        </p:spPr>
+        <p:txBody>
+          <a:bodyPr lIns="0" tIns="0" rIns="0" bIns="0" rtlCol="0" anchor="t">
+            <a:spAutoFit/>
+          </a:bodyPr>
+          <a:lstStyle/>
+          <a:p>
+            <a:pPr>
+              <a:lnSpc>
+                <a:spcPts val="1920"/>
+              </a:lnSpc>
+            </a:pPr>
+            <a:r>
+              <a:rPr lang="en-US" dirty="0">
+                <a:solidFill>
+                  <a:srgbClr val="111827"/>
+                </a:solidFill>
+                <a:latin typeface="Times New Roman"/>
+                <a:ea typeface="Times New Roman"/>
+                <a:cs typeface="Times New Roman"/>
+                <a:sym typeface="Times New Roman"/>
+              </a:rPr>
+              <a:t>Guarantees tamper resistance, transparency and long-term integrity of healthcare data and transactions.</a:t>
+            </a:r>
+          </a:p>
+        </p:txBody>
+      </p:sp>
+      <p:grpSp>
+        <p:nvGrpSpPr>
+          <p:cNvPr id="95" name="Group 95"/>
+          <p:cNvGrpSpPr/>
+          <p:nvPr/>
+        </p:nvGrpSpPr>
+        <p:grpSpPr>
+          <a:xfrm>
+            <a:off x="15179674" y="252479"/>
+            <a:ext cx="2993550" cy="8593198"/>
+            <a:chOff x="0" y="0"/>
+            <a:chExt cx="3881615" cy="11142455"/>
+          </a:xfrm>
+        </p:grpSpPr>
+        <p:sp>
+          <p:nvSpPr>
+            <p:cNvPr id="96" name="Freeform 96"/>
+            <p:cNvSpPr/>
+            <p:nvPr/>
+          </p:nvSpPr>
+          <p:spPr>
+            <a:xfrm>
+              <a:off x="0" y="0"/>
+              <a:ext cx="3881628" cy="11142518"/>
+            </a:xfrm>
+            <a:custGeom>
+              <a:avLst/>
+              <a:gdLst/>
+              <a:ahLst/>
+              <a:cxnLst/>
+              <a:rect l="l" t="t" r="r" b="b"/>
+              <a:pathLst>
+                <a:path w="3881628" h="11142518">
+                  <a:moveTo>
+                    <a:pt x="0" y="132010"/>
+                  </a:moveTo>
+                  <a:cubicBezTo>
+                    <a:pt x="0" y="59167"/>
+                    <a:pt x="52197" y="0"/>
+                    <a:pt x="116459" y="0"/>
+                  </a:cubicBezTo>
+                  <a:lnTo>
+                    <a:pt x="3765169" y="0"/>
+                  </a:lnTo>
+                  <a:cubicBezTo>
+                    <a:pt x="3829431" y="0"/>
+                    <a:pt x="3881628" y="59167"/>
+                    <a:pt x="3881628" y="132010"/>
+                  </a:cubicBezTo>
+                  <a:lnTo>
+                    <a:pt x="3881628" y="11010517"/>
+                  </a:lnTo>
+                  <a:cubicBezTo>
+                    <a:pt x="3881628" y="11083360"/>
+                    <a:pt x="3829431" y="11142518"/>
+                    <a:pt x="3765169" y="11142518"/>
+                  </a:cubicBezTo>
+                  <a:lnTo>
+                    <a:pt x="116459" y="11142518"/>
+                  </a:lnTo>
+                  <a:cubicBezTo>
+                    <a:pt x="52197" y="11142383"/>
+                    <a:pt x="0" y="11083360"/>
+                    <a:pt x="0" y="11010517"/>
+                  </a:cubicBezTo>
+                  <a:close/>
+                </a:path>
+              </a:pathLst>
+            </a:custGeom>
+            <a:solidFill>
+              <a:srgbClr val="F9FAFB"/>
+            </a:solidFill>
+            <a:ln w="28597" cap="sq">
+              <a:solidFill>
+                <a:srgbClr val="1E40AF"/>
+              </a:solidFill>
+              <a:prstDash val="sysDash"/>
+              <a:miter/>
+            </a:ln>
+          </p:spPr>
+        </p:sp>
+      </p:grpSp>
+      <p:sp>
+        <p:nvSpPr>
+          <p:cNvPr id="97" name="TextBox 97"/>
+          <p:cNvSpPr txBox="1"/>
+          <p:nvPr/>
+        </p:nvSpPr>
+        <p:spPr>
+          <a:xfrm>
+            <a:off x="15288402" y="345737"/>
+            <a:ext cx="2799542" cy="694870"/>
+          </a:xfrm>
+          <a:prstGeom prst="rect">
+            <a:avLst/>
+          </a:prstGeom>
+        </p:spPr>
+        <p:txBody>
+          <a:bodyPr lIns="0" tIns="0" rIns="0" bIns="0" rtlCol="0" anchor="t">
+            <a:spAutoFit/>
+          </a:bodyPr>
+          <a:lstStyle/>
+          <a:p>
+            <a:pPr algn="ctr">
+              <a:lnSpc>
+                <a:spcPts val="1759"/>
+              </a:lnSpc>
+            </a:pPr>
+            <a:r>
+              <a:rPr lang="en-US" sz="2000" b="1" dirty="0">
+                <a:solidFill>
+                  <a:srgbClr val="004B9E"/>
+                </a:solidFill>
+                <a:latin typeface="Times New Roman" panose="02020603050405020304" pitchFamily="18" charset="0"/>
+                <a:cs typeface="Times New Roman" panose="02020603050405020304" pitchFamily="18" charset="0"/>
+                <a:sym typeface="Times New Roman Bold"/>
+              </a:rPr>
+              <a:t>Cross-Cutting  Security and</a:t>
+            </a:r>
+          </a:p>
+          <a:p>
+            <a:pPr algn="ctr">
+              <a:lnSpc>
+                <a:spcPts val="1759"/>
+              </a:lnSpc>
+            </a:pPr>
+            <a:r>
+              <a:rPr lang="en-US" sz="2000" b="1" dirty="0">
+                <a:solidFill>
+                  <a:srgbClr val="004B9E"/>
+                </a:solidFill>
+                <a:latin typeface="Times New Roman" panose="02020603050405020304" pitchFamily="18" charset="0"/>
+                <a:cs typeface="Times New Roman" panose="02020603050405020304" pitchFamily="18" charset="0"/>
+                <a:sym typeface="Times New Roman Bold"/>
+              </a:rPr>
+              <a:t>Governance</a:t>
+            </a:r>
+          </a:p>
+        </p:txBody>
+      </p:sp>
+      <p:sp>
+        <p:nvSpPr>
+          <p:cNvPr id="98" name="TextBox 98"/>
+          <p:cNvSpPr txBox="1"/>
+          <p:nvPr/>
+        </p:nvSpPr>
+        <p:spPr>
+          <a:xfrm>
+            <a:off x="15469718" y="1136100"/>
+            <a:ext cx="2618226" cy="487313"/>
+          </a:xfrm>
+          <a:prstGeom prst="rect">
+            <a:avLst/>
+          </a:prstGeom>
+        </p:spPr>
+        <p:txBody>
+          <a:bodyPr lIns="0" tIns="0" rIns="0" bIns="0" rtlCol="0" anchor="t">
+            <a:spAutoFit/>
+          </a:bodyPr>
+          <a:lstStyle/>
+          <a:p>
+            <a:pPr algn="l">
+              <a:lnSpc>
+                <a:spcPts val="1919"/>
+              </a:lnSpc>
+            </a:pPr>
+            <a:r>
+              <a:rPr lang="en-US" b="1" dirty="0">
+                <a:solidFill>
+                  <a:srgbClr val="111827"/>
+                </a:solidFill>
+                <a:latin typeface="Times New Roman Bold"/>
+                <a:ea typeface="Times New Roman Bold"/>
+                <a:cs typeface="Times New Roman Bold"/>
+                <a:sym typeface="Times New Roman Bold"/>
+              </a:rPr>
+              <a:t>End-to-End Security and Privacy</a:t>
+            </a:r>
+          </a:p>
+        </p:txBody>
+      </p:sp>
+      <p:sp>
+        <p:nvSpPr>
+          <p:cNvPr id="99" name="TextBox 99"/>
+          <p:cNvSpPr txBox="1"/>
+          <p:nvPr/>
+        </p:nvSpPr>
+        <p:spPr>
+          <a:xfrm>
+            <a:off x="15469718" y="2178968"/>
+            <a:ext cx="2046666" cy="495300"/>
+          </a:xfrm>
+          <a:prstGeom prst="rect">
+            <a:avLst/>
+          </a:prstGeom>
+        </p:spPr>
+        <p:txBody>
+          <a:bodyPr lIns="0" tIns="0" rIns="0" bIns="0" rtlCol="0" anchor="t">
+            <a:spAutoFit/>
+          </a:bodyPr>
+          <a:lstStyle/>
+          <a:p>
+            <a:pPr algn="l">
+              <a:lnSpc>
+                <a:spcPts val="1919"/>
+              </a:lnSpc>
+            </a:pPr>
+            <a:r>
+              <a:rPr lang="en-US" b="1" dirty="0">
+                <a:solidFill>
+                  <a:srgbClr val="111827"/>
+                </a:solidFill>
+                <a:latin typeface="Times New Roman Bold"/>
+                <a:ea typeface="Times New Roman Bold"/>
+                <a:cs typeface="Times New Roman Bold"/>
+                <a:sym typeface="Times New Roman Bold"/>
+              </a:rPr>
+              <a:t>Role-Based Access Control</a:t>
+            </a:r>
+          </a:p>
+        </p:txBody>
+      </p:sp>
+      <p:sp>
+        <p:nvSpPr>
+          <p:cNvPr id="100" name="TextBox 100"/>
+          <p:cNvSpPr txBox="1"/>
+          <p:nvPr/>
+        </p:nvSpPr>
+        <p:spPr>
+          <a:xfrm>
+            <a:off x="15364943" y="3399277"/>
+            <a:ext cx="2618226" cy="495300"/>
+          </a:xfrm>
+          <a:prstGeom prst="rect">
+            <a:avLst/>
+          </a:prstGeom>
+        </p:spPr>
+        <p:txBody>
+          <a:bodyPr lIns="0" tIns="0" rIns="0" bIns="0" rtlCol="0" anchor="t">
+            <a:spAutoFit/>
+          </a:bodyPr>
+          <a:lstStyle/>
+          <a:p>
+            <a:pPr algn="l">
+              <a:lnSpc>
+                <a:spcPts val="1919"/>
+              </a:lnSpc>
+            </a:pPr>
+            <a:r>
+              <a:rPr lang="en-US" b="1" dirty="0">
+                <a:solidFill>
+                  <a:srgbClr val="111827"/>
+                </a:solidFill>
+                <a:latin typeface="Times New Roman Bold"/>
+                <a:ea typeface="Times New Roman Bold"/>
+                <a:cs typeface="Times New Roman Bold"/>
+                <a:sym typeface="Times New Roman Bold"/>
+              </a:rPr>
+              <a:t>Policies, Compliance and  Regulatory</a:t>
+            </a:r>
+          </a:p>
+        </p:txBody>
+      </p:sp>
+      <p:sp>
+        <p:nvSpPr>
+          <p:cNvPr id="101" name="TextBox 101"/>
+          <p:cNvSpPr txBox="1"/>
+          <p:nvPr/>
+        </p:nvSpPr>
+        <p:spPr>
+          <a:xfrm>
+            <a:off x="15379060" y="4765747"/>
+            <a:ext cx="2799542" cy="495300"/>
+          </a:xfrm>
+          <a:prstGeom prst="rect">
+            <a:avLst/>
+          </a:prstGeom>
+        </p:spPr>
+        <p:txBody>
+          <a:bodyPr lIns="0" tIns="0" rIns="0" bIns="0" rtlCol="0" anchor="t">
+            <a:spAutoFit/>
+          </a:bodyPr>
+          <a:lstStyle/>
+          <a:p>
+            <a:pPr algn="l">
+              <a:lnSpc>
+                <a:spcPts val="1919"/>
+              </a:lnSpc>
+            </a:pPr>
+            <a:r>
+              <a:rPr lang="en-US" b="1" dirty="0">
+                <a:solidFill>
+                  <a:srgbClr val="111827"/>
+                </a:solidFill>
+                <a:latin typeface="Times New Roman Bold"/>
+                <a:ea typeface="Times New Roman Bold"/>
+                <a:cs typeface="Times New Roman Bold"/>
+                <a:sym typeface="Times New Roman Bold"/>
+              </a:rPr>
+              <a:t>Independent Security Audit and Penetration Testing</a:t>
+            </a:r>
+          </a:p>
+        </p:txBody>
+      </p:sp>
+      <p:sp>
+        <p:nvSpPr>
+          <p:cNvPr id="102" name="TextBox 102"/>
+          <p:cNvSpPr txBox="1"/>
+          <p:nvPr/>
+        </p:nvSpPr>
+        <p:spPr>
+          <a:xfrm>
+            <a:off x="15336058" y="6217482"/>
+            <a:ext cx="2799542" cy="495300"/>
+          </a:xfrm>
+          <a:prstGeom prst="rect">
+            <a:avLst/>
+          </a:prstGeom>
+        </p:spPr>
+        <p:txBody>
+          <a:bodyPr lIns="0" tIns="0" rIns="0" bIns="0" rtlCol="0" anchor="t">
+            <a:spAutoFit/>
+          </a:bodyPr>
+          <a:lstStyle/>
+          <a:p>
+            <a:pPr algn="l">
+              <a:lnSpc>
+                <a:spcPts val="1919"/>
+              </a:lnSpc>
+            </a:pPr>
+            <a:r>
+              <a:rPr lang="en-US" b="1" dirty="0">
+                <a:solidFill>
+                  <a:srgbClr val="111827"/>
+                </a:solidFill>
+                <a:latin typeface="Times New Roman Bold"/>
+                <a:ea typeface="Times New Roman Bold"/>
+                <a:cs typeface="Times New Roman Bold"/>
+                <a:sym typeface="Times New Roman Bold"/>
+              </a:rPr>
+              <a:t>Three-Stage Compliance Decision Process</a:t>
+            </a:r>
+          </a:p>
+        </p:txBody>
+      </p:sp>
+      <p:sp>
+        <p:nvSpPr>
+          <p:cNvPr id="103" name="AutoShape 103"/>
+          <p:cNvSpPr/>
+          <p:nvPr/>
+        </p:nvSpPr>
+        <p:spPr>
+          <a:xfrm>
+            <a:off x="7120725" y="1924954"/>
+            <a:ext cx="0" cy="506971"/>
+          </a:xfrm>
+          <a:prstGeom prst="line">
+            <a:avLst/>
+          </a:prstGeom>
+          <a:ln w="38100" cap="rnd">
+            <a:solidFill>
+              <a:srgbClr val="111827"/>
+            </a:solidFill>
+            <a:prstDash val="solid"/>
+            <a:headEnd type="triangle" w="lg" len="med"/>
+            <a:tailEnd type="triangle" w="lg" len="med"/>
+          </a:ln>
+        </p:spPr>
+      </p:sp>
+      <p:sp>
+        <p:nvSpPr>
+          <p:cNvPr id="104" name="AutoShape 104"/>
+          <p:cNvSpPr/>
+          <p:nvPr/>
+        </p:nvSpPr>
+        <p:spPr>
+          <a:xfrm>
+            <a:off x="7101675" y="4225164"/>
+            <a:ext cx="0" cy="506971"/>
+          </a:xfrm>
+          <a:prstGeom prst="line">
+            <a:avLst/>
+          </a:prstGeom>
+          <a:ln w="38100" cap="rnd">
+            <a:solidFill>
+              <a:srgbClr val="111827"/>
+            </a:solidFill>
+            <a:prstDash val="solid"/>
+            <a:headEnd type="triangle" w="lg" len="med"/>
+            <a:tailEnd type="triangle" w="lg" len="med"/>
+          </a:ln>
+        </p:spPr>
+      </p:sp>
     </p:spTree>
   </p:cSld>
   <p:clrMapOvr>
@@ -3195,7 +8196,6 @@
         <a:font script="Mong" typeface="Mongolian Baiti"/>
         <a:font script="Viet" typeface="Times New Roman"/>
         <a:font script="Uigh" typeface="Microsoft Uighur"/>
-        <a:font script="Geor" typeface="Sylfaen"/>
       </a:majorFont>
       <a:minorFont>
         <a:latin typeface="Calibri"/>
@@ -3230,7 +8230,6 @@
         <a:font script="Mong" typeface="Mongolian Baiti"/>
         <a:font script="Viet" typeface="Arial"/>
         <a:font script="Uigh" typeface="Microsoft Uighur"/>
-        <a:font script="Geor" typeface="Sylfaen"/>
       </a:minorFont>
     </a:fontScheme>
     <a:fmtScheme name="Office">
@@ -3265,16 +8264,20 @@
           <a:gsLst>
             <a:gs pos="0">
               <a:schemeClr val="phClr">
-                <a:tint val="100000"/>
-                <a:shade val="100000"/>
+                <a:shade val="51000"/>
+                <a:satMod val="130000"/>
+              </a:schemeClr>
+            </a:gs>
+            <a:gs pos="80000">
+              <a:schemeClr val="phClr">
+                <a:shade val="93000"/>
                 <a:satMod val="130000"/>
               </a:schemeClr>
             </a:gs>
             <a:gs pos="100000">
               <a:schemeClr val="phClr">
-                <a:tint val="50000"/>
-                <a:shade val="100000"/>
-                <a:satMod val="350000"/>
+                <a:shade val="94000"/>
+                <a:satMod val="135000"/>
               </a:schemeClr>
             </a:gs>
           </a:gsLst>
@@ -3396,46 +8399,7 @@
       </a:bgFillStyleLst>
     </a:fmtScheme>
   </a:themeElements>
-  <a:objectDefaults>
-    <a:spDef>
-      <a:spPr/>
-      <a:bodyPr/>
-      <a:lstStyle/>
-      <a:style>
-        <a:lnRef idx="1">
-          <a:schemeClr val="accent1"/>
-        </a:lnRef>
-        <a:fillRef idx="3">
-          <a:schemeClr val="accent1"/>
-        </a:fillRef>
-        <a:effectRef idx="2">
-          <a:schemeClr val="accent1"/>
-        </a:effectRef>
-        <a:fontRef idx="minor">
-          <a:schemeClr val="lt1"/>
-        </a:fontRef>
-      </a:style>
-    </a:spDef>
-    <a:lnDef>
-      <a:spPr/>
-      <a:bodyPr/>
-      <a:lstStyle/>
-      <a:style>
-        <a:lnRef idx="2">
-          <a:schemeClr val="accent1"/>
-        </a:lnRef>
-        <a:fillRef idx="0">
-          <a:schemeClr val="accent1"/>
-        </a:fillRef>
-        <a:effectRef idx="1">
-          <a:schemeClr val="accent1"/>
-        </a:effectRef>
-        <a:fontRef idx="minor">
-          <a:schemeClr val="tx1"/>
-        </a:fontRef>
-      </a:style>
-    </a:lnDef>
-  </a:objectDefaults>
+  <a:objectDefaults/>
   <a:extraClrSchemeLst/>
 </a:theme>
 </file>